--- a/content/decks/media-studies/media-studies-s1-lesson-14-audiences-and-the-portfolio-submission.pptx
+++ b/content/decks/media-studies/media-studies-s1-lesson-14-audiences-and-the-portfolio-submission.pptx
@@ -17,9 +17,12 @@
     <p:sldId id="265" r:id="rId11"/>
     <p:sldId id="266" r:id="rId12"/>
     <p:sldId id="267" r:id="rId13"/>
+    <p:sldId id="268" r:id="rId14"/>
+    <p:sldId id="269" r:id="rId15"/>
+    <p:sldId id="270" r:id="rId16"/>
   </p:sldIdLst>
   <p:notesMasterIdLst>
-    <p:notesMasterId r:id="rId14"/>
+    <p:notesMasterId r:id="rId17"/>
   </p:notesMasterIdLst>
   <p:sldSz cx="12192000" cy="6858000"/>
   <p:notesSz cx="6858000" cy="12192000"/>
@@ -689,7 +692,7 @@
           <a:p>
             <a:r>
               <a:rPr lang="en-US" dirty="0"/>
-              <a:t/>
+              <a:t>Coursebook 5.3 names Hall's three readings, Jenkins's participatory culture (poaching) and Shirky (audiences speak back). Claims stated as taught claims, not quotations.</a:t>
             </a:r>
             <a:endParaRPr lang="en-US" dirty="0"/>
           </a:p>
@@ -777,7 +780,7 @@
           <a:p>
             <a:r>
               <a:rPr lang="en-US" dirty="0"/>
-              <a:t/>
+              <a:t>Coursebook 6.7's screening-feedback activity runs on two volunteers' near-final products before the triage opens.</a:t>
             </a:r>
             <a:endParaRPr lang="en-US" dirty="0"/>
           </a:p>
@@ -801,6 +804,270 @@
             <a:fld id="{F7021451-1387-4CA6-816F-3879F97B5CBC}" type="slidenum">
               <a:rPr lang="en-US"/>
               <a:t>12</a:t>
+            </a:fld>
+            <a:endParaRPr lang="en-US"/>
+          </a:p>
+        </p:txBody>
+      </p:sp>
+    </p:spTree>
+    <p:extLst>
+      <p:ext uri="{BB962C8B-B14F-4D97-AF65-F5344CB8AC3E}">
+        <p14:creationId xmlns:p14="http://schemas.microsoft.com/office/powerpoint/2010/main" val="1024086991"/>
+      </p:ext>
+    </p:extLst>
+  </p:cSld>
+  <p:clrMapOvr>
+    <a:masterClrMapping/>
+  </p:clrMapOvr>
+</p:notes>
+</file>
+
+<file path=ppt/notesSlides/notesSlide13.xml><?xml version="1.0" encoding="utf-8"?>
+<p:notes xmlns:a="http://schemas.openxmlformats.org/drawingml/2006/main" xmlns:r="http://schemas.openxmlformats.org/officeDocument/2006/relationships" xmlns:p="http://schemas.openxmlformats.org/presentationml/2006/main">
+  <p:cSld>
+    <p:spTree>
+      <p:nvGrpSpPr>
+        <p:cNvPr id="1" name=""/>
+        <p:cNvGrpSpPr/>
+        <p:nvPr/>
+      </p:nvGrpSpPr>
+      <p:grpSpPr>
+        <a:xfrm>
+          <a:off x="0" y="0"/>
+          <a:ext cx="0" cy="0"/>
+          <a:chOff x="0" y="0"/>
+          <a:chExt cx="0" cy="0"/>
+        </a:xfrm>
+      </p:grpSpPr>
+      <p:sp>
+        <p:nvSpPr>
+          <p:cNvPr id="2" name="Slide Image Placeholder 1"/>
+          <p:cNvSpPr>
+            <a:spLocks noGrp="1" noRot="1" noChangeAspect="1"/>
+          </p:cNvSpPr>
+          <p:nvPr>
+            <p:ph type="sldImg"/>
+          </p:nvPr>
+        </p:nvSpPr>
+        <p:spPr/>
+      </p:sp>
+      <p:sp>
+        <p:nvSpPr>
+          <p:cNvPr id="3" name="Notes Placeholder 2"/>
+          <p:cNvSpPr>
+            <a:spLocks noGrp="1"/>
+          </p:cNvSpPr>
+          <p:nvPr>
+            <p:ph type="body" idx="1"/>
+          </p:nvPr>
+        </p:nvSpPr>
+        <p:spPr/>
+        <p:txBody>
+          <a:bodyPr/>
+          <a:lstStyle/>
+          <a:p>
+            <a:r>
+              <a:rPr lang="en-US" dirty="0"/>
+              <a:t>Submission is a protocol, not an event: the checklist is walked once, calmly, and the room leaves with nothing owed.</a:t>
+            </a:r>
+            <a:endParaRPr lang="en-US" dirty="0"/>
+          </a:p>
+        </p:txBody>
+      </p:sp>
+      <p:sp>
+        <p:nvSpPr>
+          <p:cNvPr id="4" name="Slide Number Placeholder 3"/>
+          <p:cNvSpPr>
+            <a:spLocks noGrp="1"/>
+          </p:cNvSpPr>
+          <p:nvPr>
+            <p:ph type="sldNum" sz="quarter" idx="10"/>
+          </p:nvPr>
+        </p:nvSpPr>
+        <p:spPr/>
+        <p:txBody>
+          <a:bodyPr/>
+          <a:lstStyle/>
+          <a:p>
+            <a:fld id="{F7021451-1387-4CA6-816F-3879F97B5CBC}" type="slidenum">
+              <a:rPr lang="en-US"/>
+              <a:t>13</a:t>
+            </a:fld>
+            <a:endParaRPr lang="en-US"/>
+          </a:p>
+        </p:txBody>
+      </p:sp>
+    </p:spTree>
+    <p:extLst>
+      <p:ext uri="{BB962C8B-B14F-4D97-AF65-F5344CB8AC3E}">
+        <p14:creationId xmlns:p14="http://schemas.microsoft.com/office/powerpoint/2010/main" val="1024086991"/>
+      </p:ext>
+    </p:extLst>
+  </p:cSld>
+  <p:clrMapOvr>
+    <a:masterClrMapping/>
+  </p:clrMapOvr>
+</p:notes>
+</file>
+
+<file path=ppt/notesSlides/notesSlide14.xml><?xml version="1.0" encoding="utf-8"?>
+<p:notes xmlns:a="http://schemas.openxmlformats.org/drawingml/2006/main" xmlns:r="http://schemas.openxmlformats.org/officeDocument/2006/relationships" xmlns:p="http://schemas.openxmlformats.org/presentationml/2006/main">
+  <p:cSld>
+    <p:spTree>
+      <p:nvGrpSpPr>
+        <p:cNvPr id="1" name=""/>
+        <p:cNvGrpSpPr/>
+        <p:nvPr/>
+      </p:nvGrpSpPr>
+      <p:grpSpPr>
+        <a:xfrm>
+          <a:off x="0" y="0"/>
+          <a:ext cx="0" cy="0"/>
+          <a:chOff x="0" y="0"/>
+          <a:chExt cx="0" cy="0"/>
+        </a:xfrm>
+      </p:grpSpPr>
+      <p:sp>
+        <p:nvSpPr>
+          <p:cNvPr id="2" name="Slide Image Placeholder 1"/>
+          <p:cNvSpPr>
+            <a:spLocks noGrp="1" noRot="1" noChangeAspect="1"/>
+          </p:cNvSpPr>
+          <p:nvPr>
+            <p:ph type="sldImg"/>
+          </p:nvPr>
+        </p:nvSpPr>
+        <p:spPr/>
+      </p:sp>
+      <p:sp>
+        <p:nvSpPr>
+          <p:cNvPr id="3" name="Notes Placeholder 2"/>
+          <p:cNvSpPr>
+            <a:spLocks noGrp="1"/>
+          </p:cNvSpPr>
+          <p:nvPr>
+            <p:ph type="body" idx="1"/>
+          </p:nvPr>
+        </p:nvSpPr>
+        <p:spPr/>
+        <p:txBody>
+          <a:bodyPr/>
+          <a:lstStyle/>
+          <a:p>
+            <a:r>
+              <a:rPr lang="en-US" dirty="0"/>
+              <a:t>A3 marking runs on the register's corrected economy: 50 marks, AO3 40 + AO2 10, nothing scaled.</a:t>
+            </a:r>
+            <a:endParaRPr lang="en-US" dirty="0"/>
+          </a:p>
+        </p:txBody>
+      </p:sp>
+      <p:sp>
+        <p:nvSpPr>
+          <p:cNvPr id="4" name="Slide Number Placeholder 3"/>
+          <p:cNvSpPr>
+            <a:spLocks noGrp="1"/>
+          </p:cNvSpPr>
+          <p:nvPr>
+            <p:ph type="sldNum" sz="quarter" idx="10"/>
+          </p:nvPr>
+        </p:nvSpPr>
+        <p:spPr/>
+        <p:txBody>
+          <a:bodyPr/>
+          <a:lstStyle/>
+          <a:p>
+            <a:fld id="{F7021451-1387-4CA6-816F-3879F97B5CBC}" type="slidenum">
+              <a:rPr lang="en-US"/>
+              <a:t>14</a:t>
+            </a:fld>
+            <a:endParaRPr lang="en-US"/>
+          </a:p>
+        </p:txBody>
+      </p:sp>
+    </p:spTree>
+    <p:extLst>
+      <p:ext uri="{BB962C8B-B14F-4D97-AF65-F5344CB8AC3E}">
+        <p14:creationId xmlns:p14="http://schemas.microsoft.com/office/powerpoint/2010/main" val="1024086991"/>
+      </p:ext>
+    </p:extLst>
+  </p:cSld>
+  <p:clrMapOvr>
+    <a:masterClrMapping/>
+  </p:clrMapOvr>
+</p:notes>
+</file>
+
+<file path=ppt/notesSlides/notesSlide15.xml><?xml version="1.0" encoding="utf-8"?>
+<p:notes xmlns:a="http://schemas.openxmlformats.org/drawingml/2006/main" xmlns:r="http://schemas.openxmlformats.org/officeDocument/2006/relationships" xmlns:p="http://schemas.openxmlformats.org/presentationml/2006/main">
+  <p:cSld>
+    <p:spTree>
+      <p:nvGrpSpPr>
+        <p:cNvPr id="1" name=""/>
+        <p:cNvGrpSpPr/>
+        <p:nvPr/>
+      </p:nvGrpSpPr>
+      <p:grpSpPr>
+        <a:xfrm>
+          <a:off x="0" y="0"/>
+          <a:ext cx="0" cy="0"/>
+          <a:chOff x="0" y="0"/>
+          <a:chExt cx="0" cy="0"/>
+        </a:xfrm>
+      </p:grpSpPr>
+      <p:sp>
+        <p:nvSpPr>
+          <p:cNvPr id="2" name="Slide Image Placeholder 1"/>
+          <p:cNvSpPr>
+            <a:spLocks noGrp="1" noRot="1" noChangeAspect="1"/>
+          </p:cNvSpPr>
+          <p:nvPr>
+            <p:ph type="sldImg"/>
+          </p:nvPr>
+        </p:nvSpPr>
+        <p:spPr/>
+      </p:sp>
+      <p:sp>
+        <p:nvSpPr>
+          <p:cNvPr id="3" name="Notes Placeholder 2"/>
+          <p:cNvSpPr>
+            <a:spLocks noGrp="1"/>
+          </p:cNvSpPr>
+          <p:nvPr>
+            <p:ph type="body" idx="1"/>
+          </p:nvPr>
+        </p:nvSpPr>
+        <p:spPr/>
+        <p:txBody>
+          <a:bodyPr/>
+          <a:lstStyle/>
+          <a:p>
+            <a:r>
+              <a:rPr lang="en-US" dirty="0"/>
+              <a:t/>
+            </a:r>
+            <a:endParaRPr lang="en-US" dirty="0"/>
+          </a:p>
+        </p:txBody>
+      </p:sp>
+      <p:sp>
+        <p:nvSpPr>
+          <p:cNvPr id="4" name="Slide Number Placeholder 3"/>
+          <p:cNvSpPr>
+            <a:spLocks noGrp="1"/>
+          </p:cNvSpPr>
+          <p:nvPr>
+            <p:ph type="sldNum" sz="quarter" idx="10"/>
+          </p:nvPr>
+        </p:nvSpPr>
+        <p:spPr/>
+        <p:txBody>
+          <a:bodyPr/>
+          <a:lstStyle/>
+          <a:p>
+            <a:fld id="{F7021451-1387-4CA6-816F-3879F97B5CBC}" type="slidenum">
+              <a:rPr lang="en-US"/>
+              <a:t>15</a:t>
             </a:fld>
             <a:endParaRPr lang="en-US"/>
           </a:p>
@@ -953,7 +1220,7 @@
           <a:p>
             <a:r>
               <a:rPr lang="en-US" dirty="0"/>
-              <a:t/>
+              <a:t>The three cells are the plan's own D1 texts: a Super Bowl half-time show (US Department of Defense photograph, public domain), a niche YouTube restoration channel, a K-pop comeback teaser (thumbnails credited in CREDITS). A CCTV-gala or bilibili parallel can be taken orally as an aside; the taught set stays exam-eligible.</a:t>
             </a:r>
             <a:endParaRPr lang="en-US" dirty="0"/>
           </a:p>
@@ -1129,7 +1396,7 @@
           <a:p>
             <a:r>
               <a:rPr lang="en-US" dirty="0"/>
-              <a:t/>
+              <a:t>State each model fairly before limiting it; the limit lands harder that way. Cultivation gets its due: long-horizon worldview effects are the version that survives scrutiny best.</a:t>
             </a:r>
             <a:endParaRPr lang="en-US" dirty="0"/>
           </a:p>
@@ -1217,7 +1484,7 @@
           <a:p>
             <a:r>
               <a:rPr lang="en-US" dirty="0"/>
-              <a:t/>
+              <a:t>BARB is the UK's audience measurement body; the figures are seven-day consolidated audiences. Use the bars to ask: who pays for each of these audiences, and what would an advertiser pay to reach each one?</a:t>
             </a:r>
             <a:endParaRPr lang="en-US" dirty="0"/>
           </a:p>
@@ -1305,7 +1572,7 @@
           <a:p>
             <a:r>
               <a:rPr lang="en-US" dirty="0"/>
-              <a:t>Daumier's theatre crowd, rapt and forward-leaning: the active audience, a century before the theory named it.</a:t>
+              <a:t>Photographs are Unsplash, credited in CREDITS: Gariev (diversion), Balakrishnan (relationships), Ciprian (identity), Brunxs (surveillance). Each cell shows the practice, not a text: the theory is about what people do.</a:t>
             </a:r>
             <a:endParaRPr lang="en-US" dirty="0"/>
           </a:p>
@@ -1393,7 +1660,7 @@
           <a:p>
             <a:r>
               <a:rPr lang="en-US" dirty="0"/>
-              <a:t/>
+              <a:t>Swapped 2026-08-24: was Daumier's theatre crowd. Frank's drive-in is a media audience, mid-century mass culture photographed from inside. Daumier's plate stays in img/ for rollback.</a:t>
             </a:r>
             <a:endParaRPr lang="en-US" dirty="0"/>
           </a:p>
@@ -1481,7 +1748,7 @@
           <a:p>
             <a:r>
               <a:rPr lang="en-US" dirty="0"/>
-              <a:t/>
+              <a:t>Swapped 2026-08-24: was Manet's A Good Glass of Beer (kept in img/ for rollback; its diversion reading is still apt if wanted). WS 5.2 is the plan's own D5 option and shows students the instrument itself.</a:t>
             </a:r>
             <a:endParaRPr lang="en-US" dirty="0"/>
           </a:p>
@@ -2174,8 +2441,8 @@
         </p:nvSpPr>
         <p:spPr>
           <a:xfrm>
-            <a:off x="822960" y="1920240"/>
-            <a:ext cx="10424160" cy="2194560"/>
+            <a:off x="822960" y="1783080"/>
+            <a:ext cx="10424160" cy="3291840"/>
           </a:xfrm>
           <a:prstGeom prst="rect">
             <a:avLst/>
@@ -2189,12 +2456,12 @@
           <a:p>
             <a:pPr indent="0" marL="0">
               <a:lnSpc>
-                <a:spcPts val="6000"/>
+                <a:spcPts val="4000"/>
               </a:lnSpc>
               <a:buNone/>
             </a:pPr>
             <a:r>
-              <a:rPr lang="en-US" sz="5400" dirty="0">
+              <a:rPr lang="en-US" sz="3000" dirty="0">
                 <a:solidFill>
                   <a:srgbClr val="24313F"/>
                 </a:solidFill>
@@ -2202,29 +2469,9 @@
                 <a:ea typeface="Georgia" pitchFamily="34" charset="-122"/>
                 <a:cs typeface="Georgia" pitchFamily="34" charset="-120"/>
               </a:rPr>
-              <a:t>It goes in.</a:t>
-            </a:r>
-            <a:endParaRPr lang="en-US" sz="5400" dirty="0"/>
-          </a:p>
-          <a:p>
-            <a:pPr indent="0" marL="0">
-              <a:lnSpc>
-                <a:spcPts val="6000"/>
-              </a:lnSpc>
-              <a:buNone/>
-            </a:pPr>
-            <a:r>
-              <a:rPr lang="en-US" sz="5400" dirty="0">
-                <a:solidFill>
-                  <a:srgbClr val="24313F"/>
-                </a:solidFill>
-                <a:latin typeface="Georgia" pitchFamily="34" charset="0"/>
-                <a:ea typeface="Georgia" pitchFamily="34" charset="-122"/>
-                <a:cs typeface="Georgia" pitchFamily="34" charset="-120"/>
-              </a:rPr>
-              <a:t>No edits after.</a:t>
-            </a:r>
-            <a:endParaRPr lang="en-US" sz="5400" dirty="0"/>
+              <a:t>The people formerly known as the audience wish to inform media people of our existence, and of a shift in power that goes with the platform shift.</a:t>
+            </a:r>
+            <a:endParaRPr lang="en-US" sz="3000" dirty="0"/>
           </a:p>
         </p:txBody>
       </p:sp>
@@ -2236,7 +2483,7 @@
         </p:nvSpPr>
         <p:spPr>
           <a:xfrm>
-            <a:off x="822960" y="4663440"/>
+            <a:off x="822960" y="5029200"/>
             <a:ext cx="914400" cy="0"/>
           </a:xfrm>
           <a:prstGeom prst="line">
@@ -2259,8 +2506,8 @@
         </p:nvSpPr>
         <p:spPr>
           <a:xfrm>
-            <a:off x="822960" y="4846320"/>
-            <a:ext cx="10241280" cy="457200"/>
+            <a:off x="822960" y="5212080"/>
+            <a:ext cx="10058400" cy="457200"/>
           </a:xfrm>
           <a:prstGeom prst="rect">
             <a:avLst/>
@@ -2276,7 +2523,7 @@
               <a:buNone/>
             </a:pPr>
             <a:r>
-              <a:rPr lang="en-US" sz="1350" spc="100" kern="0" dirty="0">
+              <a:rPr lang="en-US" sz="1400" spc="100" kern="0" dirty="0">
                 <a:solidFill>
                   <a:srgbClr val="4A6B5D"/>
                 </a:solidFill>
@@ -2284,9 +2531,9 @@
                 <a:ea typeface="Arial" pitchFamily="34" charset="-122"/>
                 <a:cs typeface="Arial" pitchFamily="34" charset="-120"/>
               </a:rPr>
-              <a:t>Product exported and playable, CCR posted, blog complete and dated, URLs logged. A3 in Friday 27 November. No edits after is in the register, and it is absolute.</a:t>
-            </a:r>
-            <a:endParaRPr lang="en-US" sz="1350" dirty="0"/>
+              <a:t>Jay Rosen, PressThink, 2006</a:t>
+            </a:r>
+            <a:endParaRPr lang="en-US" sz="1400" dirty="0"/>
           </a:p>
         </p:txBody>
       </p:sp>
@@ -2355,7 +2602,7 @@
                 <a:ea typeface="Arial" pitchFamily="34" charset="-122"/>
                 <a:cs typeface="Arial" pitchFamily="34" charset="-120"/>
               </a:rPr>
-              <a:t>THE RETURN, AND THE TARGET</a:t>
+              <a:t>AUDIENCES SPEAK BACK</a:t>
             </a:r>
             <a:endParaRPr lang="en-US" sz="1100" dirty="0"/>
           </a:p>
@@ -2394,7 +2641,7 @@
                 <a:ea typeface="Arial" pitchFamily="34" charset="-122"/>
                 <a:cs typeface="Arial" pitchFamily="34" charset="-120"/>
               </a:rPr>
-              <a:t>SELF-BAND BEFORE THE MARK</a:t>
+              <a:t>THE COURSEBOOK'S OWN ROSTER, 5.3</a:t>
             </a:r>
             <a:endParaRPr lang="en-US" sz="1100" dirty="0"/>
           </a:p>
@@ -2456,7 +2703,7 @@
                 <a:ea typeface="Georgia" pitchFamily="34" charset="-122"/>
                 <a:cs typeface="Georgia" pitchFamily="34" charset="-120"/>
               </a:rPr>
-              <a:t>A3 back, one target forward</a:t>
+              <a:t>Three claims to carry</a:t>
             </a:r>
             <a:endParaRPr lang="en-US" sz="3400" dirty="0"/>
           </a:p>
@@ -2470,89 +2717,47 @@
         </p:nvSpPr>
         <p:spPr>
           <a:xfrm>
-            <a:off x="822960" y="1828800"/>
-            <a:ext cx="3108960" cy="822960"/>
-          </a:xfrm>
-          <a:prstGeom prst="rect">
-            <a:avLst/>
-          </a:prstGeom>
-          <a:noFill/>
-          <a:ln/>
-        </p:spPr>
-        <p:txBody>
-          <a:bodyPr wrap="square" lIns="0" tIns="0" rIns="0" bIns="0" rtlCol="0" anchor="t"/>
-          <a:lstStyle/>
-          <a:p>
-            <a:pPr indent="0" marL="0">
-              <a:buNone/>
-            </a:pPr>
-            <a:r>
-              <a:rPr lang="en-US" sz="2000" dirty="0">
-                <a:solidFill>
-                  <a:srgbClr val="4A6B5D"/>
+            <a:off x="822960" y="2057400"/>
+            <a:ext cx="3246120" cy="502920"/>
+          </a:xfrm>
+          <a:prstGeom prst="rect">
+            <a:avLst/>
+          </a:prstGeom>
+          <a:noFill/>
+          <a:ln/>
+        </p:spPr>
+        <p:txBody>
+          <a:bodyPr wrap="square" lIns="0" tIns="0" rIns="0" bIns="0" rtlCol="0" anchor="ctr"/>
+          <a:lstStyle/>
+          <a:p>
+            <a:pPr indent="0" marL="0">
+              <a:buNone/>
+            </a:pPr>
+            <a:r>
+              <a:rPr lang="en-US" sz="2400" dirty="0">
+                <a:solidFill>
+                  <a:srgbClr val="A3C1AD"/>
                 </a:solidFill>
                 <a:latin typeface="Georgia" pitchFamily="34" charset="0"/>
                 <a:ea typeface="Georgia" pitchFamily="34" charset="-122"/>
                 <a:cs typeface="Georgia" pitchFamily="34" charset="-120"/>
               </a:rPr>
-              <a:t>Self-band first</a:t>
-            </a:r>
-            <a:endParaRPr lang="en-US" sz="2000" dirty="0"/>
-          </a:p>
-        </p:txBody>
-      </p:sp>
-      <p:sp>
-        <p:nvSpPr>
-          <p:cNvPr id="7" name="Text 5"/>
-          <p:cNvSpPr/>
-          <p:nvPr/>
-        </p:nvSpPr>
-        <p:spPr>
-          <a:xfrm>
-            <a:off x="4114800" y="1828800"/>
-            <a:ext cx="7223760" cy="1005840"/>
-          </a:xfrm>
-          <a:prstGeom prst="rect">
-            <a:avLst/>
-          </a:prstGeom>
-          <a:noFill/>
-          <a:ln/>
-        </p:spPr>
-        <p:txBody>
-          <a:bodyPr wrap="square" lIns="0" tIns="0" rIns="0" bIns="0" rtlCol="0" anchor="t"/>
-          <a:lstStyle/>
-          <a:p>
-            <a:pPr indent="0" marL="0">
-              <a:lnSpc>
-                <a:spcPts val="2300"/>
-              </a:lnSpc>
-              <a:buNone/>
-            </a:pPr>
-            <a:r>
-              <a:rPr lang="en-US" sz="1650" dirty="0">
-                <a:solidFill>
-                  <a:srgbClr val="24313F"/>
-                </a:solidFill>
-                <a:latin typeface="Georgia" pitchFamily="34" charset="0"/>
-                <a:ea typeface="Georgia" pitchFamily="34" charset="-122"/>
-                <a:cs typeface="Georgia" pitchFamily="34" charset="-120"/>
-              </a:rPr>
-              <a:t>Each student bands their own portfolio against the C1 criteria before the mark; the gap is the conversation.</a:t>
-            </a:r>
-            <a:endParaRPr lang="en-US" sz="1650" dirty="0"/>
-          </a:p>
-        </p:txBody>
-      </p:sp>
-      <p:sp>
-        <p:nvSpPr>
-          <p:cNvPr id="8" name="Shape 6"/>
-          <p:cNvSpPr/>
-          <p:nvPr/>
-        </p:nvSpPr>
-        <p:spPr>
-          <a:xfrm>
-            <a:off x="822960" y="2926080"/>
-            <a:ext cx="10543032" cy="0"/>
+              <a:t>Hall</a:t>
+            </a:r>
+            <a:endParaRPr lang="en-US" sz="2400" dirty="0"/>
+          </a:p>
+        </p:txBody>
+      </p:sp>
+      <p:sp>
+        <p:nvSpPr>
+          <p:cNvPr id="7" name="Shape 5"/>
+          <p:cNvSpPr/>
+          <p:nvPr/>
+        </p:nvSpPr>
+        <p:spPr>
+          <a:xfrm>
+            <a:off x="822960" y="2606040"/>
+            <a:ext cx="3246120" cy="0"/>
           </a:xfrm>
           <a:prstGeom prst="line">
             <a:avLst/>
@@ -2568,14 +2773,14 @@
       </p:sp>
       <p:sp>
         <p:nvSpPr>
-          <p:cNvPr id="9" name="Text 7"/>
-          <p:cNvSpPr/>
-          <p:nvPr/>
-        </p:nvSpPr>
-        <p:spPr>
-          <a:xfrm>
-            <a:off x="822960" y="3063240"/>
-            <a:ext cx="3108960" cy="822960"/>
+          <p:cNvPr id="8" name="Text 6"/>
+          <p:cNvSpPr/>
+          <p:nvPr/>
+        </p:nvSpPr>
+        <p:spPr>
+          <a:xfrm>
+            <a:off x="822960" y="2788920"/>
+            <a:ext cx="3246120" cy="2194560"/>
           </a:xfrm>
           <a:prstGeom prst="rect">
             <a:avLst/>
@@ -2588,75 +2793,75 @@
           <a:lstStyle/>
           <a:p>
             <a:pPr indent="0" marL="0">
-              <a:buNone/>
-            </a:pPr>
-            <a:r>
-              <a:rPr lang="en-US" sz="2000" dirty="0">
-                <a:solidFill>
-                  <a:srgbClr val="4A6B5D"/>
+              <a:lnSpc>
+                <a:spcPts val="2100"/>
+              </a:lnSpc>
+              <a:buNone/>
+            </a:pPr>
+            <a:r>
+              <a:rPr lang="en-US" sz="1500" dirty="0">
+                <a:solidFill>
+                  <a:srgbClr val="24313F"/>
                 </a:solidFill>
                 <a:latin typeface="Georgia" pitchFamily="34" charset="0"/>
                 <a:ea typeface="Georgia" pitchFamily="34" charset="-122"/>
                 <a:cs typeface="Georgia" pitchFamily="34" charset="-120"/>
               </a:rPr>
-              <a:t>One target (LB4)</a:t>
-            </a:r>
-            <a:endParaRPr lang="en-US" sz="2000" dirty="0"/>
-          </a:p>
-        </p:txBody>
-      </p:sp>
-      <p:sp>
-        <p:nvSpPr>
-          <p:cNvPr id="10" name="Text 8"/>
-          <p:cNvSpPr/>
-          <p:nvPr/>
-        </p:nvSpPr>
-        <p:spPr>
-          <a:xfrm>
-            <a:off x="4114800" y="3063240"/>
-            <a:ext cx="7223760" cy="1005840"/>
-          </a:xfrm>
-          <a:prstGeom prst="rect">
-            <a:avLst/>
-          </a:prstGeom>
-          <a:noFill/>
-          <a:ln/>
-        </p:spPr>
-        <p:txBody>
-          <a:bodyPr wrap="square" lIns="0" tIns="0" rIns="0" bIns="0" rtlCol="0" anchor="t"/>
-          <a:lstStyle/>
-          <a:p>
-            <a:pPr indent="0" marL="0">
-              <a:lnSpc>
-                <a:spcPts val="2300"/>
-              </a:lnSpc>
-              <a:buNone/>
-            </a:pPr>
-            <a:r>
-              <a:rPr lang="en-US" sz="1650" dirty="0">
-                <a:solidFill>
-                  <a:srgbClr val="24313F"/>
+              <a:t>Meaning is finished in the audience: dominant, negotiated, oppositional. You met this at L11; it is the floor of audience theory.</a:t>
+            </a:r>
+            <a:endParaRPr lang="en-US" sz="1500" dirty="0"/>
+          </a:p>
+        </p:txBody>
+      </p:sp>
+      <p:sp>
+        <p:nvSpPr>
+          <p:cNvPr id="9" name="Text 7"/>
+          <p:cNvSpPr/>
+          <p:nvPr/>
+        </p:nvSpPr>
+        <p:spPr>
+          <a:xfrm>
+            <a:off x="4471416" y="2057400"/>
+            <a:ext cx="3246120" cy="502920"/>
+          </a:xfrm>
+          <a:prstGeom prst="rect">
+            <a:avLst/>
+          </a:prstGeom>
+          <a:noFill/>
+          <a:ln/>
+        </p:spPr>
+        <p:txBody>
+          <a:bodyPr wrap="square" lIns="0" tIns="0" rIns="0" bIns="0" rtlCol="0" anchor="ctr"/>
+          <a:lstStyle/>
+          <a:p>
+            <a:pPr indent="0" marL="0">
+              <a:buNone/>
+            </a:pPr>
+            <a:r>
+              <a:rPr lang="en-US" sz="2400" dirty="0">
+                <a:solidFill>
+                  <a:srgbClr val="A3C1AD"/>
                 </a:solidFill>
                 <a:latin typeface="Georgia" pitchFamily="34" charset="0"/>
                 <a:ea typeface="Georgia" pitchFamily="34" charset="-122"/>
                 <a:cs typeface="Georgia" pitchFamily="34" charset="-120"/>
               </a:rPr>
-              <a:t>Specific, evidenced, achievable in S2: hold focus in low light beats get better at filming.</a:t>
-            </a:r>
-            <a:endParaRPr lang="en-US" sz="1650" dirty="0"/>
-          </a:p>
-        </p:txBody>
-      </p:sp>
-      <p:sp>
-        <p:nvSpPr>
-          <p:cNvPr id="11" name="Shape 9"/>
-          <p:cNvSpPr/>
-          <p:nvPr/>
-        </p:nvSpPr>
-        <p:spPr>
-          <a:xfrm>
-            <a:off x="822960" y="4160520"/>
-            <a:ext cx="10543032" cy="0"/>
+              <a:t>Jenkins</a:t>
+            </a:r>
+            <a:endParaRPr lang="en-US" sz="2400" dirty="0"/>
+          </a:p>
+        </p:txBody>
+      </p:sp>
+      <p:sp>
+        <p:nvSpPr>
+          <p:cNvPr id="10" name="Shape 8"/>
+          <p:cNvSpPr/>
+          <p:nvPr/>
+        </p:nvSpPr>
+        <p:spPr>
+          <a:xfrm>
+            <a:off x="4471416" y="2606040"/>
+            <a:ext cx="3246120" cy="0"/>
           </a:xfrm>
           <a:prstGeom prst="line">
             <a:avLst/>
@@ -2672,14 +2877,14 @@
       </p:sp>
       <p:sp>
         <p:nvSpPr>
-          <p:cNvPr id="12" name="Text 10"/>
-          <p:cNvSpPr/>
-          <p:nvPr/>
-        </p:nvSpPr>
-        <p:spPr>
-          <a:xfrm>
-            <a:off x="822960" y="4297680"/>
-            <a:ext cx="3108960" cy="822960"/>
+          <p:cNvPr id="11" name="Text 9"/>
+          <p:cNvSpPr/>
+          <p:nvPr/>
+        </p:nvSpPr>
+        <p:spPr>
+          <a:xfrm>
+            <a:off x="4471416" y="2788920"/>
+            <a:ext cx="3246120" cy="2194560"/>
           </a:xfrm>
           <a:prstGeom prst="rect">
             <a:avLst/>
@@ -2692,75 +2897,75 @@
           <a:lstStyle/>
           <a:p>
             <a:pPr indent="0" marL="0">
-              <a:buNone/>
-            </a:pPr>
-            <a:r>
-              <a:rPr lang="en-US" sz="2000" dirty="0">
-                <a:solidFill>
-                  <a:srgbClr val="4A6B5D"/>
+              <a:lnSpc>
+                <a:spcPts val="2100"/>
+              </a:lnSpc>
+              <a:buNone/>
+            </a:pPr>
+            <a:r>
+              <a:rPr lang="en-US" sz="1500" dirty="0">
+                <a:solidFill>
+                  <a:srgbClr val="24313F"/>
                 </a:solidFill>
                 <a:latin typeface="Georgia" pitchFamily="34" charset="0"/>
                 <a:ea typeface="Georgia" pitchFamily="34" charset="-122"/>
                 <a:cs typeface="Georgia" pitchFamily="34" charset="-120"/>
               </a:rPr>
-              <a:t>A4 announced</a:t>
-            </a:r>
-            <a:endParaRPr lang="en-US" sz="2000" dirty="0"/>
-          </a:p>
-        </p:txBody>
-      </p:sp>
-      <p:sp>
-        <p:nvSpPr>
-          <p:cNvPr id="13" name="Text 11"/>
-          <p:cNvSpPr/>
-          <p:nvPr/>
-        </p:nvSpPr>
-        <p:spPr>
-          <a:xfrm>
-            <a:off x="4114800" y="4297680"/>
-            <a:ext cx="7223760" cy="1005840"/>
-          </a:xfrm>
-          <a:prstGeom prst="rect">
-            <a:avLst/>
-          </a:prstGeom>
-          <a:noFill/>
-          <a:ln/>
-        </p:spPr>
-        <p:txBody>
-          <a:bodyPr wrap="square" lIns="0" tIns="0" rIns="0" bIns="0" rtlCol="0" anchor="t"/>
-          <a:lstStyle/>
-          <a:p>
-            <a:pPr indent="0" marL="0">
-              <a:lnSpc>
-                <a:spcPts val="2300"/>
-              </a:lnSpc>
-              <a:buNone/>
-            </a:pPr>
-            <a:r>
-              <a:rPr lang="en-US" sz="1650" dirty="0">
-                <a:solidFill>
-                  <a:srgbClr val="24313F"/>
+              <a:t>Participatory culture: fans poach, remix and build on texts. The audience is a workshop, not a hall.</a:t>
+            </a:r>
+            <a:endParaRPr lang="en-US" sz="1500" dirty="0"/>
+          </a:p>
+        </p:txBody>
+      </p:sp>
+      <p:sp>
+        <p:nvSpPr>
+          <p:cNvPr id="12" name="Text 10"/>
+          <p:cNvSpPr/>
+          <p:nvPr/>
+        </p:nvSpPr>
+        <p:spPr>
+          <a:xfrm>
+            <a:off x="8119872" y="2057400"/>
+            <a:ext cx="3246120" cy="502920"/>
+          </a:xfrm>
+          <a:prstGeom prst="rect">
+            <a:avLst/>
+          </a:prstGeom>
+          <a:noFill/>
+          <a:ln/>
+        </p:spPr>
+        <p:txBody>
+          <a:bodyPr wrap="square" lIns="0" tIns="0" rIns="0" bIns="0" rtlCol="0" anchor="ctr"/>
+          <a:lstStyle/>
+          <a:p>
+            <a:pPr indent="0" marL="0">
+              <a:buNone/>
+            </a:pPr>
+            <a:r>
+              <a:rPr lang="en-US" sz="2400" dirty="0">
+                <a:solidFill>
+                  <a:srgbClr val="A3C1AD"/>
                 </a:solidFill>
                 <a:latin typeface="Georgia" pitchFamily="34" charset="0"/>
                 <a:ea typeface="Georgia" pitchFamily="34" charset="-122"/>
                 <a:cs typeface="Georgia" pitchFamily="34" charset="-120"/>
               </a:rPr>
-              <a:t>Wednesday 16 December, Component 2 Section A. Today is the last session that clears the notice window.</a:t>
-            </a:r>
-            <a:endParaRPr lang="en-US" sz="1650" dirty="0"/>
-          </a:p>
-        </p:txBody>
-      </p:sp>
-      <p:sp>
-        <p:nvSpPr>
-          <p:cNvPr id="14" name="Shape 12"/>
-          <p:cNvSpPr/>
-          <p:nvPr/>
-        </p:nvSpPr>
-        <p:spPr>
-          <a:xfrm>
-            <a:off x="822960" y="5394960"/>
-            <a:ext cx="10543032" cy="0"/>
+              <a:t>Shirky</a:t>
+            </a:r>
+            <a:endParaRPr lang="en-US" sz="2400" dirty="0"/>
+          </a:p>
+        </p:txBody>
+      </p:sp>
+      <p:sp>
+        <p:nvSpPr>
+          <p:cNvPr id="13" name="Shape 11"/>
+          <p:cNvSpPr/>
+          <p:nvPr/>
+        </p:nvSpPr>
+        <p:spPr>
+          <a:xfrm>
+            <a:off x="8119872" y="2606040"/>
+            <a:ext cx="3246120" cy="0"/>
           </a:xfrm>
           <a:prstGeom prst="line">
             <a:avLst/>
@@ -2776,7 +2981,111 @@
       </p:sp>
       <p:sp>
         <p:nvSpPr>
+          <p:cNvPr id="14" name="Text 12"/>
+          <p:cNvSpPr/>
+          <p:nvPr/>
+        </p:nvSpPr>
+        <p:spPr>
+          <a:xfrm>
+            <a:off x="8119872" y="2788920"/>
+            <a:ext cx="3246120" cy="2194560"/>
+          </a:xfrm>
+          <a:prstGeom prst="rect">
+            <a:avLst/>
+          </a:prstGeom>
+          <a:noFill/>
+          <a:ln/>
+        </p:spPr>
+        <p:txBody>
+          <a:bodyPr wrap="square" lIns="0" tIns="0" rIns="0" bIns="0" rtlCol="0" anchor="t"/>
+          <a:lstStyle/>
+          <a:p>
+            <a:pPr indent="0" marL="0">
+              <a:lnSpc>
+                <a:spcPts val="2100"/>
+              </a:lnSpc>
+              <a:buNone/>
+            </a:pPr>
+            <a:r>
+              <a:rPr lang="en-US" sz="1500" dirty="0">
+                <a:solidFill>
+                  <a:srgbClr val="24313F"/>
+                </a:solidFill>
+                <a:latin typeface="Georgia" pitchFamily="34" charset="0"/>
+                <a:ea typeface="Georgia" pitchFamily="34" charset="-122"/>
+                <a:cs typeface="Georgia" pitchFamily="34" charset="-120"/>
+              </a:rPr>
+              <a:t>Audiences produce: publishing is now a button, so the line between audience and maker is a choice, not a wall.</a:t>
+            </a:r>
+            <a:endParaRPr lang="en-US" sz="1500" dirty="0"/>
+          </a:p>
+        </p:txBody>
+      </p:sp>
+      <p:sp>
+        <p:nvSpPr>
           <p:cNvPr id="15" name="Shape 13"/>
+          <p:cNvSpPr/>
+          <p:nvPr/>
+        </p:nvSpPr>
+        <p:spPr>
+          <a:xfrm>
+            <a:off x="822960" y="5257800"/>
+            <a:ext cx="914400" cy="0"/>
+          </a:xfrm>
+          <a:prstGeom prst="line">
+            <a:avLst/>
+          </a:prstGeom>
+          <a:noFill/>
+          <a:ln w="31750">
+            <a:solidFill>
+              <a:srgbClr val="8C3A38"/>
+            </a:solidFill>
+            <a:prstDash val="solid"/>
+          </a:ln>
+        </p:spPr>
+      </p:sp>
+      <p:sp>
+        <p:nvSpPr>
+          <p:cNvPr id="16" name="Text 14"/>
+          <p:cNvSpPr/>
+          <p:nvPr/>
+        </p:nvSpPr>
+        <p:spPr>
+          <a:xfrm>
+            <a:off x="822960" y="5440680"/>
+            <a:ext cx="10543032" cy="411480"/>
+          </a:xfrm>
+          <a:prstGeom prst="rect">
+            <a:avLst/>
+          </a:prstGeom>
+          <a:noFill/>
+          <a:ln/>
+        </p:spPr>
+        <p:txBody>
+          <a:bodyPr wrap="square" lIns="0" tIns="0" rIns="0" bIns="0" rtlCol="0" anchor="ctr"/>
+          <a:lstStyle/>
+          <a:p>
+            <a:pPr indent="0" marL="0">
+              <a:buNone/>
+            </a:pPr>
+            <a:r>
+              <a:rPr lang="en-US" sz="1500" i="1" dirty="0">
+                <a:solidFill>
+                  <a:srgbClr val="4A6B5D"/>
+                </a:solidFill>
+                <a:latin typeface="Georgia" pitchFamily="34" charset="0"/>
+                <a:ea typeface="Georgia" pitchFamily="34" charset="-122"/>
+                <a:cs typeface="Georgia" pitchFamily="34" charset="-120"/>
+              </a:rPr>
+              <a:t>Your C1 blog is the proof of the claim: an audience member who published. Say so in the CCR.</a:t>
+            </a:r>
+            <a:endParaRPr lang="en-US" sz="1500" dirty="0"/>
+          </a:p>
+        </p:txBody>
+      </p:sp>
+      <p:sp>
+        <p:nvSpPr>
+          <p:cNvPr id="17" name="Shape 15"/>
           <p:cNvSpPr/>
           <p:nvPr/>
         </p:nvSpPr>
@@ -2799,7 +3108,7 @@
       </p:sp>
       <p:sp>
         <p:nvSpPr>
-          <p:cNvPr id="16" name="Text 14"/>
+          <p:cNvPr id="18" name="Text 16"/>
           <p:cNvSpPr/>
           <p:nvPr/>
         </p:nvSpPr>
@@ -2838,7 +3147,7 @@
       </p:sp>
       <p:sp>
         <p:nvSpPr>
-          <p:cNvPr id="17" name="Text 15"/>
+          <p:cNvPr id="19" name="Text 17"/>
           <p:cNvSpPr/>
           <p:nvPr/>
         </p:nvSpPr>
@@ -2886,6 +3195,1124 @@
 <file path=ppt/slides/slide12.xml><?xml version="1.0" encoding="utf-8"?>
 <p:sld xmlns:a="http://schemas.openxmlformats.org/drawingml/2006/main" xmlns:r="http://schemas.openxmlformats.org/officeDocument/2006/relationships" xmlns:p="http://schemas.openxmlformats.org/presentationml/2006/main">
   <p:cSld name="Slide 12">
+    <p:bg>
+      <p:bgPr>
+        <a:solidFill>
+          <a:srgbClr val="FAF8F1"/>
+        </a:solidFill>
+      </p:bgPr>
+    </p:bg>
+    <p:spTree>
+      <p:nvGrpSpPr>
+        <p:cNvPr id="1" name=""/>
+        <p:cNvGrpSpPr/>
+        <p:nvPr/>
+      </p:nvGrpSpPr>
+      <p:grpSpPr>
+        <a:xfrm>
+          <a:off x="0" y="0"/>
+          <a:ext cx="0" cy="0"/>
+          <a:chOff x="0" y="0"/>
+          <a:chExt cx="0" cy="0"/>
+        </a:xfrm>
+      </p:grpSpPr>
+      <p:sp>
+        <p:nvSpPr>
+          <p:cNvPr id="2" name="Text 0"/>
+          <p:cNvSpPr/>
+          <p:nvPr/>
+        </p:nvSpPr>
+        <p:spPr>
+          <a:xfrm>
+            <a:off x="822960" y="457200"/>
+            <a:ext cx="6400800" cy="274320"/>
+          </a:xfrm>
+          <a:prstGeom prst="rect">
+            <a:avLst/>
+          </a:prstGeom>
+          <a:noFill/>
+          <a:ln/>
+        </p:spPr>
+        <p:txBody>
+          <a:bodyPr wrap="square" lIns="0" tIns="0" rIns="0" bIns="0" rtlCol="0" anchor="ctr"/>
+          <a:lstStyle/>
+          <a:p>
+            <a:pPr algn="l" indent="0" marL="0">
+              <a:buNone/>
+            </a:pPr>
+            <a:r>
+              <a:rPr lang="en-US" sz="1100" b="1" spc="250" kern="0" dirty="0">
+                <a:solidFill>
+                  <a:srgbClr val="4A6B5D"/>
+                </a:solidFill>
+                <a:latin typeface="Arial" pitchFamily="34" charset="0"/>
+                <a:ea typeface="Arial" pitchFamily="34" charset="-122"/>
+                <a:cs typeface="Arial" pitchFamily="34" charset="-120"/>
+              </a:rPr>
+              <a:t>THE LAST HELP WINDOW</a:t>
+            </a:r>
+            <a:endParaRPr lang="en-US" sz="1100" dirty="0"/>
+          </a:p>
+        </p:txBody>
+      </p:sp>
+      <p:sp>
+        <p:nvSpPr>
+          <p:cNvPr id="3" name="Text 1"/>
+          <p:cNvSpPr/>
+          <p:nvPr/>
+        </p:nvSpPr>
+        <p:spPr>
+          <a:xfrm>
+            <a:off x="6793992" y="457200"/>
+            <a:ext cx="4572000" cy="274320"/>
+          </a:xfrm>
+          <a:prstGeom prst="rect">
+            <a:avLst/>
+          </a:prstGeom>
+          <a:noFill/>
+          <a:ln/>
+        </p:spPr>
+        <p:txBody>
+          <a:bodyPr wrap="square" lIns="0" tIns="0" rIns="0" bIns="0" rtlCol="0" anchor="ctr"/>
+          <a:lstStyle/>
+          <a:p>
+            <a:pPr algn="r" indent="0" marL="0">
+              <a:buNone/>
+            </a:pPr>
+            <a:r>
+              <a:rPr lang="en-US" sz="1100" b="1" spc="250" kern="0" dirty="0">
+                <a:solidFill>
+                  <a:srgbClr val="7A7F72"/>
+                </a:solidFill>
+                <a:latin typeface="Arial" pitchFamily="34" charset="0"/>
+                <a:ea typeface="Arial" pitchFamily="34" charset="-122"/>
+                <a:cs typeface="Arial" pitchFamily="34" charset="-120"/>
+              </a:rPr>
+              <a:t>TRIAGE ORDER, NOT HAND-RAISING</a:t>
+            </a:r>
+            <a:endParaRPr lang="en-US" sz="1100" dirty="0"/>
+          </a:p>
+        </p:txBody>
+      </p:sp>
+      <p:sp>
+        <p:nvSpPr>
+          <p:cNvPr id="4" name="Shape 2"/>
+          <p:cNvSpPr/>
+          <p:nvPr/>
+        </p:nvSpPr>
+        <p:spPr>
+          <a:xfrm>
+            <a:off x="822960" y="786384"/>
+            <a:ext cx="10543032" cy="0"/>
+          </a:xfrm>
+          <a:prstGeom prst="line">
+            <a:avLst/>
+          </a:prstGeom>
+          <a:noFill/>
+          <a:ln w="9525">
+            <a:solidFill>
+              <a:srgbClr val="D9D4C4"/>
+            </a:solidFill>
+            <a:prstDash val="solid"/>
+          </a:ln>
+        </p:spPr>
+      </p:sp>
+      <p:sp>
+        <p:nvSpPr>
+          <p:cNvPr id="5" name="Text 3"/>
+          <p:cNvSpPr/>
+          <p:nvPr/>
+        </p:nvSpPr>
+        <p:spPr>
+          <a:xfrm>
+            <a:off x="822960" y="1280160"/>
+            <a:ext cx="10543032" cy="914400"/>
+          </a:xfrm>
+          <a:prstGeom prst="rect">
+            <a:avLst/>
+          </a:prstGeom>
+          <a:noFill/>
+          <a:ln/>
+        </p:spPr>
+        <p:txBody>
+          <a:bodyPr wrap="square" lIns="0" tIns="0" rIns="0" bIns="0" rtlCol="0" anchor="ctr"/>
+          <a:lstStyle/>
+          <a:p>
+            <a:pPr indent="0" marL="0">
+              <a:buNone/>
+            </a:pPr>
+            <a:r>
+              <a:rPr lang="en-US" sz="3800" dirty="0">
+                <a:solidFill>
+                  <a:srgbClr val="24313F"/>
+                </a:solidFill>
+                <a:latin typeface="Georgia" pitchFamily="34" charset="0"/>
+                <a:ea typeface="Georgia" pitchFamily="34" charset="-122"/>
+                <a:cs typeface="Georgia" pitchFamily="34" charset="-120"/>
+              </a:rPr>
+              <a:t>CCR surgery, by triage</a:t>
+            </a:r>
+            <a:endParaRPr lang="en-US" sz="3800" dirty="0"/>
+          </a:p>
+        </p:txBody>
+      </p:sp>
+      <p:sp>
+        <p:nvSpPr>
+          <p:cNvPr id="6" name="Shape 4"/>
+          <p:cNvSpPr/>
+          <p:nvPr/>
+        </p:nvSpPr>
+        <p:spPr>
+          <a:xfrm>
+            <a:off x="822960" y="2514600"/>
+            <a:ext cx="914400" cy="0"/>
+          </a:xfrm>
+          <a:prstGeom prst="line">
+            <a:avLst/>
+          </a:prstGeom>
+          <a:noFill/>
+          <a:ln w="31750">
+            <a:solidFill>
+              <a:srgbClr val="8C3A38"/>
+            </a:solidFill>
+            <a:prstDash val="solid"/>
+          </a:ln>
+        </p:spPr>
+      </p:sp>
+      <p:sp>
+        <p:nvSpPr>
+          <p:cNvPr id="7" name="Text 5"/>
+          <p:cNvSpPr/>
+          <p:nvPr/>
+        </p:nvSpPr>
+        <p:spPr>
+          <a:xfrm>
+            <a:off x="822960" y="2743200"/>
+            <a:ext cx="9875520" cy="2011680"/>
+          </a:xfrm>
+          <a:prstGeom prst="rect">
+            <a:avLst/>
+          </a:prstGeom>
+          <a:noFill/>
+          <a:ln/>
+        </p:spPr>
+        <p:txBody>
+          <a:bodyPr wrap="square" lIns="0" tIns="0" rIns="0" bIns="0" rtlCol="0" anchor="t"/>
+          <a:lstStyle/>
+          <a:p>
+            <a:pPr indent="0" marL="0">
+              <a:lnSpc>
+                <a:spcPts val="2800"/>
+              </a:lnSpc>
+              <a:buNone/>
+            </a:pPr>
+            <a:r>
+              <a:rPr lang="en-US" sz="2000" dirty="0">
+                <a:solidFill>
+                  <a:srgbClr val="24313F"/>
+                </a:solidFill>
+                <a:latin typeface="Georgia" pitchFamily="34" charset="0"/>
+                <a:ea typeface="Georgia" pitchFamily="34" charset="-122"/>
+                <a:cs typeface="Georgia" pitchFamily="34" charset="-120"/>
+              </a:rPr>
+              <a:t>The double is the last room where help is available before submission. The queue is ordered by CS11 severity, not by who raises a hand: every student is seen, and the strongest drafts get peer support instead of teacher time. Each visit ends with one fix executed, not promised. Friday is logistics, not heroics.</a:t>
+            </a:r>
+            <a:endParaRPr lang="en-US" sz="2000" dirty="0"/>
+          </a:p>
+        </p:txBody>
+      </p:sp>
+      <p:sp>
+        <p:nvSpPr>
+          <p:cNvPr id="8" name="Shape 6"/>
+          <p:cNvSpPr/>
+          <p:nvPr/>
+        </p:nvSpPr>
+        <p:spPr>
+          <a:xfrm>
+            <a:off x="822960" y="6382512"/>
+            <a:ext cx="10543032" cy="0"/>
+          </a:xfrm>
+          <a:prstGeom prst="line">
+            <a:avLst/>
+          </a:prstGeom>
+          <a:noFill/>
+          <a:ln w="9525">
+            <a:solidFill>
+              <a:srgbClr val="D9D4C4"/>
+            </a:solidFill>
+            <a:prstDash val="solid"/>
+          </a:ln>
+        </p:spPr>
+      </p:sp>
+      <p:sp>
+        <p:nvSpPr>
+          <p:cNvPr id="9" name="Text 7"/>
+          <p:cNvSpPr/>
+          <p:nvPr/>
+        </p:nvSpPr>
+        <p:spPr>
+          <a:xfrm>
+            <a:off x="822960" y="6419088"/>
+            <a:ext cx="7315200" cy="274320"/>
+          </a:xfrm>
+          <a:prstGeom prst="rect">
+            <a:avLst/>
+          </a:prstGeom>
+          <a:noFill/>
+          <a:ln/>
+        </p:spPr>
+        <p:txBody>
+          <a:bodyPr wrap="square" lIns="0" tIns="0" rIns="0" bIns="0" rtlCol="0" anchor="ctr"/>
+          <a:lstStyle/>
+          <a:p>
+            <a:pPr indent="0" marL="0">
+              <a:buNone/>
+            </a:pPr>
+            <a:r>
+              <a:rPr lang="en-US" sz="900" spc="150" kern="0" dirty="0">
+                <a:solidFill>
+                  <a:srgbClr val="7A7F72"/>
+                </a:solidFill>
+                <a:latin typeface="Arial" pitchFamily="34" charset="0"/>
+                <a:ea typeface="Arial" pitchFamily="34" charset="-122"/>
+                <a:cs typeface="Arial" pitchFamily="34" charset="-120"/>
+              </a:rPr>
+              <a:t>MEDIA STUDIES 9607 · SEMESTER I</a:t>
+            </a:r>
+            <a:endParaRPr lang="en-US" sz="900" dirty="0"/>
+          </a:p>
+        </p:txBody>
+      </p:sp>
+      <p:sp>
+        <p:nvSpPr>
+          <p:cNvPr id="10" name="Text 8"/>
+          <p:cNvSpPr/>
+          <p:nvPr/>
+        </p:nvSpPr>
+        <p:spPr>
+          <a:xfrm>
+            <a:off x="10268712" y="6355080"/>
+            <a:ext cx="1097280" cy="365760"/>
+          </a:xfrm>
+          <a:prstGeom prst="rect">
+            <a:avLst/>
+          </a:prstGeom>
+          <a:noFill/>
+          <a:ln/>
+        </p:spPr>
+        <p:txBody>
+          <a:bodyPr wrap="square" lIns="0" tIns="0" rIns="0" bIns="0" rtlCol="0" anchor="ctr"/>
+          <a:lstStyle/>
+          <a:p>
+            <a:pPr algn="r" indent="0" marL="0">
+              <a:buNone/>
+            </a:pPr>
+            <a:r>
+              <a:rPr lang="en-US" sz="1600" dirty="0">
+                <a:solidFill>
+                  <a:srgbClr val="A3C1AD"/>
+                </a:solidFill>
+                <a:latin typeface="Georgia" pitchFamily="34" charset="0"/>
+                <a:ea typeface="Georgia" pitchFamily="34" charset="-122"/>
+                <a:cs typeface="Georgia" pitchFamily="34" charset="-120"/>
+              </a:rPr>
+              <a:t>07</a:t>
+            </a:r>
+            <a:endParaRPr lang="en-US" sz="1600" dirty="0"/>
+          </a:p>
+        </p:txBody>
+      </p:sp>
+    </p:spTree>
+  </p:cSld>
+  <p:clrMapOvr>
+    <a:masterClrMapping/>
+  </p:clrMapOvr>
+</p:sld>
+</file>
+
+<file path=ppt/slides/slide13.xml><?xml version="1.0" encoding="utf-8"?>
+<p:sld xmlns:a="http://schemas.openxmlformats.org/drawingml/2006/main" xmlns:r="http://schemas.openxmlformats.org/officeDocument/2006/relationships" xmlns:p="http://schemas.openxmlformats.org/presentationml/2006/main">
+  <p:cSld name="Slide 13">
+    <p:bg>
+      <p:bgPr>
+        <a:solidFill>
+          <a:srgbClr val="E8EFE7"/>
+        </a:solidFill>
+      </p:bgPr>
+    </p:bg>
+    <p:spTree>
+      <p:nvGrpSpPr>
+        <p:cNvPr id="1" name=""/>
+        <p:cNvGrpSpPr/>
+        <p:nvPr/>
+      </p:nvGrpSpPr>
+      <p:grpSpPr>
+        <a:xfrm>
+          <a:off x="0" y="0"/>
+          <a:ext cx="0" cy="0"/>
+          <a:chOff x="0" y="0"/>
+          <a:chExt cx="0" cy="0"/>
+        </a:xfrm>
+      </p:grpSpPr>
+      <p:sp>
+        <p:nvSpPr>
+          <p:cNvPr id="2" name="Text 0"/>
+          <p:cNvSpPr/>
+          <p:nvPr/>
+        </p:nvSpPr>
+        <p:spPr>
+          <a:xfrm>
+            <a:off x="822960" y="1554480"/>
+            <a:ext cx="7315200" cy="274320"/>
+          </a:xfrm>
+          <a:prstGeom prst="rect">
+            <a:avLst/>
+          </a:prstGeom>
+          <a:noFill/>
+          <a:ln/>
+        </p:spPr>
+        <p:txBody>
+          <a:bodyPr wrap="square" lIns="0" tIns="0" rIns="0" bIns="0" rtlCol="0" anchor="ctr"/>
+          <a:lstStyle/>
+          <a:p>
+            <a:pPr algn="l" indent="0" marL="0">
+              <a:buNone/>
+            </a:pPr>
+            <a:r>
+              <a:rPr lang="en-US" sz="1100" b="1" spc="250" kern="0" dirty="0">
+                <a:solidFill>
+                  <a:srgbClr val="4A6B5D"/>
+                </a:solidFill>
+                <a:latin typeface="Arial" pitchFamily="34" charset="0"/>
+                <a:ea typeface="Arial" pitchFamily="34" charset="-122"/>
+                <a:cs typeface="Arial" pitchFamily="34" charset="-120"/>
+              </a:rPr>
+              <a:t>FRIDAY 27 NOVEMBER</a:t>
+            </a:r>
+            <a:endParaRPr lang="en-US" sz="1100" dirty="0"/>
+          </a:p>
+        </p:txBody>
+      </p:sp>
+      <p:sp>
+        <p:nvSpPr>
+          <p:cNvPr id="3" name="Text 1"/>
+          <p:cNvSpPr/>
+          <p:nvPr/>
+        </p:nvSpPr>
+        <p:spPr>
+          <a:xfrm>
+            <a:off x="822960" y="2103120"/>
+            <a:ext cx="10424160" cy="2194560"/>
+          </a:xfrm>
+          <a:prstGeom prst="rect">
+            <a:avLst/>
+          </a:prstGeom>
+          <a:noFill/>
+          <a:ln/>
+        </p:spPr>
+        <p:txBody>
+          <a:bodyPr wrap="square" lIns="0" tIns="0" rIns="0" bIns="0" rtlCol="0" anchor="ctr"/>
+          <a:lstStyle/>
+          <a:p>
+            <a:pPr indent="0" marL="0">
+              <a:lnSpc>
+                <a:spcPts val="6000"/>
+              </a:lnSpc>
+              <a:buNone/>
+            </a:pPr>
+            <a:r>
+              <a:rPr lang="en-US" sz="5400" dirty="0">
+                <a:solidFill>
+                  <a:srgbClr val="24313F"/>
+                </a:solidFill>
+                <a:latin typeface="Georgia" pitchFamily="34" charset="0"/>
+                <a:ea typeface="Georgia" pitchFamily="34" charset="-122"/>
+                <a:cs typeface="Georgia" pitchFamily="34" charset="-120"/>
+              </a:rPr>
+              <a:t>It goes in.</a:t>
+            </a:r>
+            <a:endParaRPr lang="en-US" sz="5400" dirty="0"/>
+          </a:p>
+          <a:p>
+            <a:pPr indent="0" marL="0">
+              <a:lnSpc>
+                <a:spcPts val="6000"/>
+              </a:lnSpc>
+              <a:buNone/>
+            </a:pPr>
+            <a:r>
+              <a:rPr lang="en-US" sz="5400" dirty="0">
+                <a:solidFill>
+                  <a:srgbClr val="24313F"/>
+                </a:solidFill>
+                <a:latin typeface="Georgia" pitchFamily="34" charset="0"/>
+                <a:ea typeface="Georgia" pitchFamily="34" charset="-122"/>
+                <a:cs typeface="Georgia" pitchFamily="34" charset="-120"/>
+              </a:rPr>
+              <a:t>No edits after.</a:t>
+            </a:r>
+            <a:endParaRPr lang="en-US" sz="5400" dirty="0"/>
+          </a:p>
+        </p:txBody>
+      </p:sp>
+      <p:sp>
+        <p:nvSpPr>
+          <p:cNvPr id="4" name="Shape 2"/>
+          <p:cNvSpPr/>
+          <p:nvPr/>
+        </p:nvSpPr>
+        <p:spPr>
+          <a:xfrm>
+            <a:off x="822960" y="4663440"/>
+            <a:ext cx="914400" cy="0"/>
+          </a:xfrm>
+          <a:prstGeom prst="line">
+            <a:avLst/>
+          </a:prstGeom>
+          <a:noFill/>
+          <a:ln w="31750">
+            <a:solidFill>
+              <a:srgbClr val="8C3A38"/>
+            </a:solidFill>
+            <a:prstDash val="solid"/>
+          </a:ln>
+        </p:spPr>
+      </p:sp>
+      <p:sp>
+        <p:nvSpPr>
+          <p:cNvPr id="5" name="Text 3"/>
+          <p:cNvSpPr/>
+          <p:nvPr/>
+        </p:nvSpPr>
+        <p:spPr>
+          <a:xfrm>
+            <a:off x="822960" y="4846320"/>
+            <a:ext cx="10241280" cy="457200"/>
+          </a:xfrm>
+          <a:prstGeom prst="rect">
+            <a:avLst/>
+          </a:prstGeom>
+          <a:noFill/>
+          <a:ln/>
+        </p:spPr>
+        <p:txBody>
+          <a:bodyPr wrap="square" lIns="0" tIns="0" rIns="0" bIns="0" rtlCol="0" anchor="ctr"/>
+          <a:lstStyle/>
+          <a:p>
+            <a:pPr indent="0" marL="0">
+              <a:buNone/>
+            </a:pPr>
+            <a:r>
+              <a:rPr lang="en-US" sz="1350" spc="100" kern="0" dirty="0">
+                <a:solidFill>
+                  <a:srgbClr val="4A6B5D"/>
+                </a:solidFill>
+                <a:latin typeface="Arial" pitchFamily="34" charset="0"/>
+                <a:ea typeface="Arial" pitchFamily="34" charset="-122"/>
+                <a:cs typeface="Arial" pitchFamily="34" charset="-120"/>
+              </a:rPr>
+              <a:t>Product exported and playable, CCR posted, blog complete and dated, URLs logged. A3 in Friday 27 November. No edits after is in the register, and it is absolute.</a:t>
+            </a:r>
+            <a:endParaRPr lang="en-US" sz="1350" dirty="0"/>
+          </a:p>
+        </p:txBody>
+      </p:sp>
+    </p:spTree>
+  </p:cSld>
+  <p:clrMapOvr>
+    <a:masterClrMapping/>
+  </p:clrMapOvr>
+</p:sld>
+</file>
+
+<file path=ppt/slides/slide14.xml><?xml version="1.0" encoding="utf-8"?>
+<p:sld xmlns:a="http://schemas.openxmlformats.org/drawingml/2006/main" xmlns:r="http://schemas.openxmlformats.org/officeDocument/2006/relationships" xmlns:p="http://schemas.openxmlformats.org/presentationml/2006/main">
+  <p:cSld name="Slide 14">
+    <p:bg>
+      <p:bgPr>
+        <a:solidFill>
+          <a:srgbClr val="FAF8F1"/>
+        </a:solidFill>
+      </p:bgPr>
+    </p:bg>
+    <p:spTree>
+      <p:nvGrpSpPr>
+        <p:cNvPr id="1" name=""/>
+        <p:cNvGrpSpPr/>
+        <p:nvPr/>
+      </p:nvGrpSpPr>
+      <p:grpSpPr>
+        <a:xfrm>
+          <a:off x="0" y="0"/>
+          <a:ext cx="0" cy="0"/>
+          <a:chOff x="0" y="0"/>
+          <a:chExt cx="0" cy="0"/>
+        </a:xfrm>
+      </p:grpSpPr>
+      <p:sp>
+        <p:nvSpPr>
+          <p:cNvPr id="2" name="Text 0"/>
+          <p:cNvSpPr/>
+          <p:nvPr/>
+        </p:nvSpPr>
+        <p:spPr>
+          <a:xfrm>
+            <a:off x="822960" y="457200"/>
+            <a:ext cx="6400800" cy="274320"/>
+          </a:xfrm>
+          <a:prstGeom prst="rect">
+            <a:avLst/>
+          </a:prstGeom>
+          <a:noFill/>
+          <a:ln/>
+        </p:spPr>
+        <p:txBody>
+          <a:bodyPr wrap="square" lIns="0" tIns="0" rIns="0" bIns="0" rtlCol="0" anchor="ctr"/>
+          <a:lstStyle/>
+          <a:p>
+            <a:pPr algn="l" indent="0" marL="0">
+              <a:buNone/>
+            </a:pPr>
+            <a:r>
+              <a:rPr lang="en-US" sz="1100" b="1" spc="250" kern="0" dirty="0">
+                <a:solidFill>
+                  <a:srgbClr val="4A6B5D"/>
+                </a:solidFill>
+                <a:latin typeface="Arial" pitchFamily="34" charset="0"/>
+                <a:ea typeface="Arial" pitchFamily="34" charset="-122"/>
+                <a:cs typeface="Arial" pitchFamily="34" charset="-120"/>
+              </a:rPr>
+              <a:t>THE RETURN, AND THE TARGET</a:t>
+            </a:r>
+            <a:endParaRPr lang="en-US" sz="1100" dirty="0"/>
+          </a:p>
+        </p:txBody>
+      </p:sp>
+      <p:sp>
+        <p:nvSpPr>
+          <p:cNvPr id="3" name="Text 1"/>
+          <p:cNvSpPr/>
+          <p:nvPr/>
+        </p:nvSpPr>
+        <p:spPr>
+          <a:xfrm>
+            <a:off x="6793992" y="457200"/>
+            <a:ext cx="4572000" cy="274320"/>
+          </a:xfrm>
+          <a:prstGeom prst="rect">
+            <a:avLst/>
+          </a:prstGeom>
+          <a:noFill/>
+          <a:ln/>
+        </p:spPr>
+        <p:txBody>
+          <a:bodyPr wrap="square" lIns="0" tIns="0" rIns="0" bIns="0" rtlCol="0" anchor="ctr"/>
+          <a:lstStyle/>
+          <a:p>
+            <a:pPr algn="r" indent="0" marL="0">
+              <a:buNone/>
+            </a:pPr>
+            <a:r>
+              <a:rPr lang="en-US" sz="1100" b="1" spc="250" kern="0" dirty="0">
+                <a:solidFill>
+                  <a:srgbClr val="7A7F72"/>
+                </a:solidFill>
+                <a:latin typeface="Arial" pitchFamily="34" charset="0"/>
+                <a:ea typeface="Arial" pitchFamily="34" charset="-122"/>
+                <a:cs typeface="Arial" pitchFamily="34" charset="-120"/>
+              </a:rPr>
+              <a:t>SELF-BAND BEFORE THE MARK</a:t>
+            </a:r>
+            <a:endParaRPr lang="en-US" sz="1100" dirty="0"/>
+          </a:p>
+        </p:txBody>
+      </p:sp>
+      <p:sp>
+        <p:nvSpPr>
+          <p:cNvPr id="4" name="Shape 2"/>
+          <p:cNvSpPr/>
+          <p:nvPr/>
+        </p:nvSpPr>
+        <p:spPr>
+          <a:xfrm>
+            <a:off x="822960" y="786384"/>
+            <a:ext cx="10543032" cy="0"/>
+          </a:xfrm>
+          <a:prstGeom prst="line">
+            <a:avLst/>
+          </a:prstGeom>
+          <a:noFill/>
+          <a:ln w="9525">
+            <a:solidFill>
+              <a:srgbClr val="D9D4C4"/>
+            </a:solidFill>
+            <a:prstDash val="solid"/>
+          </a:ln>
+        </p:spPr>
+      </p:sp>
+      <p:sp>
+        <p:nvSpPr>
+          <p:cNvPr id="5" name="Text 3"/>
+          <p:cNvSpPr/>
+          <p:nvPr/>
+        </p:nvSpPr>
+        <p:spPr>
+          <a:xfrm>
+            <a:off x="822960" y="1005840"/>
+            <a:ext cx="10543032" cy="731520"/>
+          </a:xfrm>
+          <a:prstGeom prst="rect">
+            <a:avLst/>
+          </a:prstGeom>
+          <a:noFill/>
+          <a:ln/>
+        </p:spPr>
+        <p:txBody>
+          <a:bodyPr wrap="square" lIns="0" tIns="0" rIns="0" bIns="0" rtlCol="0" anchor="ctr"/>
+          <a:lstStyle/>
+          <a:p>
+            <a:pPr indent="0" marL="0">
+              <a:buNone/>
+            </a:pPr>
+            <a:r>
+              <a:rPr lang="en-US" sz="3400" dirty="0">
+                <a:solidFill>
+                  <a:srgbClr val="24313F"/>
+                </a:solidFill>
+                <a:latin typeface="Georgia" pitchFamily="34" charset="0"/>
+                <a:ea typeface="Georgia" pitchFamily="34" charset="-122"/>
+                <a:cs typeface="Georgia" pitchFamily="34" charset="-120"/>
+              </a:rPr>
+              <a:t>A3 back, one target forward</a:t>
+            </a:r>
+            <a:endParaRPr lang="en-US" sz="3400" dirty="0"/>
+          </a:p>
+        </p:txBody>
+      </p:sp>
+      <p:sp>
+        <p:nvSpPr>
+          <p:cNvPr id="6" name="Text 4"/>
+          <p:cNvSpPr/>
+          <p:nvPr/>
+        </p:nvSpPr>
+        <p:spPr>
+          <a:xfrm>
+            <a:off x="822960" y="1828800"/>
+            <a:ext cx="3108960" cy="822960"/>
+          </a:xfrm>
+          <a:prstGeom prst="rect">
+            <a:avLst/>
+          </a:prstGeom>
+          <a:noFill/>
+          <a:ln/>
+        </p:spPr>
+        <p:txBody>
+          <a:bodyPr wrap="square" lIns="0" tIns="0" rIns="0" bIns="0" rtlCol="0" anchor="t"/>
+          <a:lstStyle/>
+          <a:p>
+            <a:pPr indent="0" marL="0">
+              <a:buNone/>
+            </a:pPr>
+            <a:r>
+              <a:rPr lang="en-US" sz="2000" dirty="0">
+                <a:solidFill>
+                  <a:srgbClr val="4A6B5D"/>
+                </a:solidFill>
+                <a:latin typeface="Georgia" pitchFamily="34" charset="0"/>
+                <a:ea typeface="Georgia" pitchFamily="34" charset="-122"/>
+                <a:cs typeface="Georgia" pitchFamily="34" charset="-120"/>
+              </a:rPr>
+              <a:t>Self-band first</a:t>
+            </a:r>
+            <a:endParaRPr lang="en-US" sz="2000" dirty="0"/>
+          </a:p>
+        </p:txBody>
+      </p:sp>
+      <p:sp>
+        <p:nvSpPr>
+          <p:cNvPr id="7" name="Text 5"/>
+          <p:cNvSpPr/>
+          <p:nvPr/>
+        </p:nvSpPr>
+        <p:spPr>
+          <a:xfrm>
+            <a:off x="4114800" y="1828800"/>
+            <a:ext cx="7223760" cy="1005840"/>
+          </a:xfrm>
+          <a:prstGeom prst="rect">
+            <a:avLst/>
+          </a:prstGeom>
+          <a:noFill/>
+          <a:ln/>
+        </p:spPr>
+        <p:txBody>
+          <a:bodyPr wrap="square" lIns="0" tIns="0" rIns="0" bIns="0" rtlCol="0" anchor="t"/>
+          <a:lstStyle/>
+          <a:p>
+            <a:pPr indent="0" marL="0">
+              <a:lnSpc>
+                <a:spcPts val="2300"/>
+              </a:lnSpc>
+              <a:buNone/>
+            </a:pPr>
+            <a:r>
+              <a:rPr lang="en-US" sz="1650" dirty="0">
+                <a:solidFill>
+                  <a:srgbClr val="24313F"/>
+                </a:solidFill>
+                <a:latin typeface="Georgia" pitchFamily="34" charset="0"/>
+                <a:ea typeface="Georgia" pitchFamily="34" charset="-122"/>
+                <a:cs typeface="Georgia" pitchFamily="34" charset="-120"/>
+              </a:rPr>
+              <a:t>Each student bands their own portfolio against the C1 criteria before the mark; the gap is the conversation.</a:t>
+            </a:r>
+            <a:endParaRPr lang="en-US" sz="1650" dirty="0"/>
+          </a:p>
+        </p:txBody>
+      </p:sp>
+      <p:sp>
+        <p:nvSpPr>
+          <p:cNvPr id="8" name="Shape 6"/>
+          <p:cNvSpPr/>
+          <p:nvPr/>
+        </p:nvSpPr>
+        <p:spPr>
+          <a:xfrm>
+            <a:off x="822960" y="2926080"/>
+            <a:ext cx="10543032" cy="0"/>
+          </a:xfrm>
+          <a:prstGeom prst="line">
+            <a:avLst/>
+          </a:prstGeom>
+          <a:noFill/>
+          <a:ln w="9525">
+            <a:solidFill>
+              <a:srgbClr val="D9D4C4"/>
+            </a:solidFill>
+            <a:prstDash val="solid"/>
+          </a:ln>
+        </p:spPr>
+      </p:sp>
+      <p:sp>
+        <p:nvSpPr>
+          <p:cNvPr id="9" name="Text 7"/>
+          <p:cNvSpPr/>
+          <p:nvPr/>
+        </p:nvSpPr>
+        <p:spPr>
+          <a:xfrm>
+            <a:off x="822960" y="3063240"/>
+            <a:ext cx="3108960" cy="822960"/>
+          </a:xfrm>
+          <a:prstGeom prst="rect">
+            <a:avLst/>
+          </a:prstGeom>
+          <a:noFill/>
+          <a:ln/>
+        </p:spPr>
+        <p:txBody>
+          <a:bodyPr wrap="square" lIns="0" tIns="0" rIns="0" bIns="0" rtlCol="0" anchor="t"/>
+          <a:lstStyle/>
+          <a:p>
+            <a:pPr indent="0" marL="0">
+              <a:buNone/>
+            </a:pPr>
+            <a:r>
+              <a:rPr lang="en-US" sz="2000" dirty="0">
+                <a:solidFill>
+                  <a:srgbClr val="4A6B5D"/>
+                </a:solidFill>
+                <a:latin typeface="Georgia" pitchFamily="34" charset="0"/>
+                <a:ea typeface="Georgia" pitchFamily="34" charset="-122"/>
+                <a:cs typeface="Georgia" pitchFamily="34" charset="-120"/>
+              </a:rPr>
+              <a:t>One target (LB4)</a:t>
+            </a:r>
+            <a:endParaRPr lang="en-US" sz="2000" dirty="0"/>
+          </a:p>
+        </p:txBody>
+      </p:sp>
+      <p:sp>
+        <p:nvSpPr>
+          <p:cNvPr id="10" name="Text 8"/>
+          <p:cNvSpPr/>
+          <p:nvPr/>
+        </p:nvSpPr>
+        <p:spPr>
+          <a:xfrm>
+            <a:off x="4114800" y="3063240"/>
+            <a:ext cx="7223760" cy="1005840"/>
+          </a:xfrm>
+          <a:prstGeom prst="rect">
+            <a:avLst/>
+          </a:prstGeom>
+          <a:noFill/>
+          <a:ln/>
+        </p:spPr>
+        <p:txBody>
+          <a:bodyPr wrap="square" lIns="0" tIns="0" rIns="0" bIns="0" rtlCol="0" anchor="t"/>
+          <a:lstStyle/>
+          <a:p>
+            <a:pPr indent="0" marL="0">
+              <a:lnSpc>
+                <a:spcPts val="2300"/>
+              </a:lnSpc>
+              <a:buNone/>
+            </a:pPr>
+            <a:r>
+              <a:rPr lang="en-US" sz="1650" dirty="0">
+                <a:solidFill>
+                  <a:srgbClr val="24313F"/>
+                </a:solidFill>
+                <a:latin typeface="Georgia" pitchFamily="34" charset="0"/>
+                <a:ea typeface="Georgia" pitchFamily="34" charset="-122"/>
+                <a:cs typeface="Georgia" pitchFamily="34" charset="-120"/>
+              </a:rPr>
+              <a:t>Specific, evidenced, achievable in S2: hold focus in low light beats get better at filming.</a:t>
+            </a:r>
+            <a:endParaRPr lang="en-US" sz="1650" dirty="0"/>
+          </a:p>
+        </p:txBody>
+      </p:sp>
+      <p:sp>
+        <p:nvSpPr>
+          <p:cNvPr id="11" name="Shape 9"/>
+          <p:cNvSpPr/>
+          <p:nvPr/>
+        </p:nvSpPr>
+        <p:spPr>
+          <a:xfrm>
+            <a:off x="822960" y="4160520"/>
+            <a:ext cx="10543032" cy="0"/>
+          </a:xfrm>
+          <a:prstGeom prst="line">
+            <a:avLst/>
+          </a:prstGeom>
+          <a:noFill/>
+          <a:ln w="9525">
+            <a:solidFill>
+              <a:srgbClr val="D9D4C4"/>
+            </a:solidFill>
+            <a:prstDash val="solid"/>
+          </a:ln>
+        </p:spPr>
+      </p:sp>
+      <p:sp>
+        <p:nvSpPr>
+          <p:cNvPr id="12" name="Text 10"/>
+          <p:cNvSpPr/>
+          <p:nvPr/>
+        </p:nvSpPr>
+        <p:spPr>
+          <a:xfrm>
+            <a:off x="822960" y="4297680"/>
+            <a:ext cx="3108960" cy="822960"/>
+          </a:xfrm>
+          <a:prstGeom prst="rect">
+            <a:avLst/>
+          </a:prstGeom>
+          <a:noFill/>
+          <a:ln/>
+        </p:spPr>
+        <p:txBody>
+          <a:bodyPr wrap="square" lIns="0" tIns="0" rIns="0" bIns="0" rtlCol="0" anchor="t"/>
+          <a:lstStyle/>
+          <a:p>
+            <a:pPr indent="0" marL="0">
+              <a:buNone/>
+            </a:pPr>
+            <a:r>
+              <a:rPr lang="en-US" sz="2000" dirty="0">
+                <a:solidFill>
+                  <a:srgbClr val="4A6B5D"/>
+                </a:solidFill>
+                <a:latin typeface="Georgia" pitchFamily="34" charset="0"/>
+                <a:ea typeface="Georgia" pitchFamily="34" charset="-122"/>
+                <a:cs typeface="Georgia" pitchFamily="34" charset="-120"/>
+              </a:rPr>
+              <a:t>A4 announced</a:t>
+            </a:r>
+            <a:endParaRPr lang="en-US" sz="2000" dirty="0"/>
+          </a:p>
+        </p:txBody>
+      </p:sp>
+      <p:sp>
+        <p:nvSpPr>
+          <p:cNvPr id="13" name="Text 11"/>
+          <p:cNvSpPr/>
+          <p:nvPr/>
+        </p:nvSpPr>
+        <p:spPr>
+          <a:xfrm>
+            <a:off x="4114800" y="4297680"/>
+            <a:ext cx="7223760" cy="1005840"/>
+          </a:xfrm>
+          <a:prstGeom prst="rect">
+            <a:avLst/>
+          </a:prstGeom>
+          <a:noFill/>
+          <a:ln/>
+        </p:spPr>
+        <p:txBody>
+          <a:bodyPr wrap="square" lIns="0" tIns="0" rIns="0" bIns="0" rtlCol="0" anchor="t"/>
+          <a:lstStyle/>
+          <a:p>
+            <a:pPr indent="0" marL="0">
+              <a:lnSpc>
+                <a:spcPts val="2300"/>
+              </a:lnSpc>
+              <a:buNone/>
+            </a:pPr>
+            <a:r>
+              <a:rPr lang="en-US" sz="1650" dirty="0">
+                <a:solidFill>
+                  <a:srgbClr val="24313F"/>
+                </a:solidFill>
+                <a:latin typeface="Georgia" pitchFamily="34" charset="0"/>
+                <a:ea typeface="Georgia" pitchFamily="34" charset="-122"/>
+                <a:cs typeface="Georgia" pitchFamily="34" charset="-120"/>
+              </a:rPr>
+              <a:t>Wednesday 16 December, Component 2 Section A. Today is the last session that clears the notice window.</a:t>
+            </a:r>
+            <a:endParaRPr lang="en-US" sz="1650" dirty="0"/>
+          </a:p>
+        </p:txBody>
+      </p:sp>
+      <p:sp>
+        <p:nvSpPr>
+          <p:cNvPr id="14" name="Shape 12"/>
+          <p:cNvSpPr/>
+          <p:nvPr/>
+        </p:nvSpPr>
+        <p:spPr>
+          <a:xfrm>
+            <a:off x="822960" y="5394960"/>
+            <a:ext cx="10543032" cy="0"/>
+          </a:xfrm>
+          <a:prstGeom prst="line">
+            <a:avLst/>
+          </a:prstGeom>
+          <a:noFill/>
+          <a:ln w="9525">
+            <a:solidFill>
+              <a:srgbClr val="D9D4C4"/>
+            </a:solidFill>
+            <a:prstDash val="solid"/>
+          </a:ln>
+        </p:spPr>
+      </p:sp>
+      <p:sp>
+        <p:nvSpPr>
+          <p:cNvPr id="15" name="Shape 13"/>
+          <p:cNvSpPr/>
+          <p:nvPr/>
+        </p:nvSpPr>
+        <p:spPr>
+          <a:xfrm>
+            <a:off x="822960" y="6382512"/>
+            <a:ext cx="10543032" cy="0"/>
+          </a:xfrm>
+          <a:prstGeom prst="line">
+            <a:avLst/>
+          </a:prstGeom>
+          <a:noFill/>
+          <a:ln w="9525">
+            <a:solidFill>
+              <a:srgbClr val="D9D4C4"/>
+            </a:solidFill>
+            <a:prstDash val="solid"/>
+          </a:ln>
+        </p:spPr>
+      </p:sp>
+      <p:sp>
+        <p:nvSpPr>
+          <p:cNvPr id="16" name="Text 14"/>
+          <p:cNvSpPr/>
+          <p:nvPr/>
+        </p:nvSpPr>
+        <p:spPr>
+          <a:xfrm>
+            <a:off x="822960" y="6419088"/>
+            <a:ext cx="7315200" cy="274320"/>
+          </a:xfrm>
+          <a:prstGeom prst="rect">
+            <a:avLst/>
+          </a:prstGeom>
+          <a:noFill/>
+          <a:ln/>
+        </p:spPr>
+        <p:txBody>
+          <a:bodyPr wrap="square" lIns="0" tIns="0" rIns="0" bIns="0" rtlCol="0" anchor="ctr"/>
+          <a:lstStyle/>
+          <a:p>
+            <a:pPr indent="0" marL="0">
+              <a:buNone/>
+            </a:pPr>
+            <a:r>
+              <a:rPr lang="en-US" sz="900" spc="150" kern="0" dirty="0">
+                <a:solidFill>
+                  <a:srgbClr val="7A7F72"/>
+                </a:solidFill>
+                <a:latin typeface="Arial" pitchFamily="34" charset="0"/>
+                <a:ea typeface="Arial" pitchFamily="34" charset="-122"/>
+                <a:cs typeface="Arial" pitchFamily="34" charset="-120"/>
+              </a:rPr>
+              <a:t>MEDIA STUDIES 9607 · SEMESTER I</a:t>
+            </a:r>
+            <a:endParaRPr lang="en-US" sz="900" dirty="0"/>
+          </a:p>
+        </p:txBody>
+      </p:sp>
+      <p:sp>
+        <p:nvSpPr>
+          <p:cNvPr id="17" name="Text 15"/>
+          <p:cNvSpPr/>
+          <p:nvPr/>
+        </p:nvSpPr>
+        <p:spPr>
+          <a:xfrm>
+            <a:off x="10268712" y="6355080"/>
+            <a:ext cx="1097280" cy="365760"/>
+          </a:xfrm>
+          <a:prstGeom prst="rect">
+            <a:avLst/>
+          </a:prstGeom>
+          <a:noFill/>
+          <a:ln/>
+        </p:spPr>
+        <p:txBody>
+          <a:bodyPr wrap="square" lIns="0" tIns="0" rIns="0" bIns="0" rtlCol="0" anchor="ctr"/>
+          <a:lstStyle/>
+          <a:p>
+            <a:pPr algn="r" indent="0" marL="0">
+              <a:buNone/>
+            </a:pPr>
+            <a:r>
+              <a:rPr lang="en-US" sz="1600" dirty="0">
+                <a:solidFill>
+                  <a:srgbClr val="A3C1AD"/>
+                </a:solidFill>
+                <a:latin typeface="Georgia" pitchFamily="34" charset="0"/>
+                <a:ea typeface="Georgia" pitchFamily="34" charset="-122"/>
+                <a:cs typeface="Georgia" pitchFamily="34" charset="-120"/>
+              </a:rPr>
+              <a:t>08</a:t>
+            </a:r>
+            <a:endParaRPr lang="en-US" sz="1600" dirty="0"/>
+          </a:p>
+        </p:txBody>
+      </p:sp>
+    </p:spTree>
+  </p:cSld>
+  <p:clrMapOvr>
+    <a:masterClrMapping/>
+  </p:clrMapOvr>
+</p:sld>
+</file>
+
+<file path=ppt/slides/slide15.xml><?xml version="1.0" encoding="utf-8"?>
+<p:sld xmlns:a="http://schemas.openxmlformats.org/drawingml/2006/main" xmlns:r="http://schemas.openxmlformats.org/officeDocument/2006/relationships" xmlns:p="http://schemas.openxmlformats.org/presentationml/2006/main">
+  <p:cSld name="Slide 15">
     <p:bg>
       <p:bgPr>
         <a:solidFill>
@@ -3165,7 +4592,7 @@
                 <a:ea typeface="Georgia" pitchFamily="34" charset="-122"/>
                 <a:cs typeface="Georgia" pitchFamily="34" charset="-120"/>
               </a:rPr>
-              <a:t>07</a:t>
+              <a:t>09</a:t>
             </a:r>
             <a:endParaRPr lang="en-US" sz="1600" dirty="0"/>
           </a:p>
@@ -3507,8 +4934,8 @@
         </p:nvSpPr>
         <p:spPr>
           <a:xfrm>
-            <a:off x="822960" y="1005840"/>
-            <a:ext cx="10543032" cy="731520"/>
+            <a:off x="822960" y="914400"/>
+            <a:ext cx="10543032" cy="548640"/>
           </a:xfrm>
           <a:prstGeom prst="rect">
             <a:avLst/>
@@ -3524,7 +4951,7 @@
               <a:buNone/>
             </a:pPr>
             <a:r>
-              <a:rPr lang="en-US" sz="3800" dirty="0">
+              <a:rPr lang="en-US" sz="3000" dirty="0">
                 <a:solidFill>
                   <a:srgbClr val="24313F"/>
                 </a:solidFill>
@@ -3534,64 +4961,27 @@
               </a:rPr>
               <a:t>Mass, niche, target</a:t>
             </a:r>
-            <a:endParaRPr lang="en-US" sz="3800" dirty="0"/>
-          </a:p>
-        </p:txBody>
-      </p:sp>
-      <p:sp>
-        <p:nvSpPr>
-          <p:cNvPr id="6" name="Text 4"/>
-          <p:cNvSpPr/>
-          <p:nvPr/>
-        </p:nvSpPr>
-        <p:spPr>
-          <a:xfrm>
-            <a:off x="822960" y="2057400"/>
-            <a:ext cx="3246120" cy="502920"/>
-          </a:xfrm>
-          <a:prstGeom prst="rect">
-            <a:avLst/>
-          </a:prstGeom>
-          <a:noFill/>
-          <a:ln/>
-        </p:spPr>
-        <p:txBody>
-          <a:bodyPr wrap="square" lIns="0" tIns="0" rIns="0" bIns="0" rtlCol="0" anchor="ctr"/>
-          <a:lstStyle/>
-          <a:p>
-            <a:pPr indent="0" marL="0">
-              <a:buNone/>
-            </a:pPr>
-            <a:r>
-              <a:rPr lang="en-US" sz="2600" dirty="0">
-                <a:solidFill>
-                  <a:srgbClr val="A3C1AD"/>
-                </a:solidFill>
-                <a:latin typeface="Georgia" pitchFamily="34" charset="0"/>
-                <a:ea typeface="Georgia" pitchFamily="34" charset="-122"/>
-                <a:cs typeface="Georgia" pitchFamily="34" charset="-120"/>
-              </a:rPr>
-              <a:t>Mass</a:t>
-            </a:r>
-            <a:endParaRPr lang="en-US" sz="2600" dirty="0"/>
-          </a:p>
-        </p:txBody>
-      </p:sp>
-      <p:sp>
-        <p:nvSpPr>
-          <p:cNvPr id="7" name="Shape 5"/>
-          <p:cNvSpPr/>
-          <p:nvPr/>
-        </p:nvSpPr>
-        <p:spPr>
-          <a:xfrm>
-            <a:off x="822960" y="2606040"/>
-            <a:ext cx="3246120" cy="0"/>
-          </a:xfrm>
-          <a:prstGeom prst="line">
-            <a:avLst/>
-          </a:prstGeom>
-          <a:noFill/>
+            <a:endParaRPr lang="en-US" sz="3000" dirty="0"/>
+          </a:p>
+        </p:txBody>
+      </p:sp>
+      <p:sp>
+        <p:nvSpPr>
+          <p:cNvPr id="6" name="Shape 4"/>
+          <p:cNvSpPr/>
+          <p:nvPr/>
+        </p:nvSpPr>
+        <p:spPr>
+          <a:xfrm>
+            <a:off x="822960" y="1554480"/>
+            <a:ext cx="3246120" cy="2011680"/>
+          </a:xfrm>
+          <a:prstGeom prst="rect">
+            <a:avLst/>
+          </a:prstGeom>
+          <a:solidFill>
+            <a:srgbClr val="FAF8F1"/>
+          </a:solidFill>
           <a:ln w="9525">
             <a:solidFill>
               <a:srgbClr val="D9D4C4"/>
@@ -3600,96 +4990,78 @@
           </a:ln>
         </p:spPr>
       </p:sp>
-      <p:sp>
-        <p:nvSpPr>
-          <p:cNvPr id="8" name="Text 6"/>
-          <p:cNvSpPr/>
-          <p:nvPr/>
-        </p:nvSpPr>
-        <p:spPr>
-          <a:xfrm>
-            <a:off x="822960" y="2788920"/>
-            <a:ext cx="3246120" cy="2011680"/>
-          </a:xfrm>
-          <a:prstGeom prst="rect">
-            <a:avLst/>
-          </a:prstGeom>
-          <a:noFill/>
-          <a:ln/>
-        </p:spPr>
-        <p:txBody>
-          <a:bodyPr wrap="square" lIns="0" tIns="0" rIns="0" bIns="0" rtlCol="0" anchor="t"/>
-          <a:lstStyle/>
-          <a:p>
-            <a:pPr indent="0" marL="0">
-              <a:lnSpc>
-                <a:spcPts val="2200"/>
-              </a:lnSpc>
-              <a:buNone/>
-            </a:pPr>
-            <a:r>
-              <a:rPr lang="en-US" sz="1600" dirty="0">
-                <a:solidFill>
-                  <a:srgbClr val="24313F"/>
+      <p:pic>
+        <p:nvPicPr>
+          <p:cNvPr id="7" name="Image 0" descr="/Users/dogan/Documents/Vaults/Courses/wiki/classes/media-studies/decks/_build/img/halftime-dod.jpg">    </p:cNvPr>
+          <p:cNvPicPr>
+            <a:picLocks noChangeAspect="1"/>
+          </p:cNvPicPr>
+          <p:nvPr/>
+        </p:nvPicPr>
+        <p:blipFill>
+          <a:blip r:embed="rId1"/>
+          <a:stretch>
+            <a:fillRect/>
+          </a:stretch>
+        </p:blipFill>
+        <p:spPr>
+          <a:xfrm>
+            <a:off x="1129284" y="1682496"/>
+            <a:ext cx="2633472" cy="1755648"/>
+          </a:xfrm>
+          <a:prstGeom prst="rect">
+            <a:avLst/>
+          </a:prstGeom>
+        </p:spPr>
+      </p:pic>
+      <p:sp>
+        <p:nvSpPr>
+          <p:cNvPr id="8" name="Text 5"/>
+          <p:cNvSpPr/>
+          <p:nvPr/>
+        </p:nvSpPr>
+        <p:spPr>
+          <a:xfrm>
+            <a:off x="822960" y="3657600"/>
+            <a:ext cx="3246120" cy="457200"/>
+          </a:xfrm>
+          <a:prstGeom prst="rect">
+            <a:avLst/>
+          </a:prstGeom>
+          <a:noFill/>
+          <a:ln/>
+        </p:spPr>
+        <p:txBody>
+          <a:bodyPr wrap="square" lIns="0" tIns="0" rIns="0" bIns="0" rtlCol="0" anchor="ctr"/>
+          <a:lstStyle/>
+          <a:p>
+            <a:pPr indent="0" marL="0">
+              <a:buNone/>
+            </a:pPr>
+            <a:r>
+              <a:rPr lang="en-US" sz="2400" dirty="0">
+                <a:solidFill>
+                  <a:srgbClr val="A3C1AD"/>
                 </a:solidFill>
                 <a:latin typeface="Georgia" pitchFamily="34" charset="0"/>
                 <a:ea typeface="Georgia" pitchFamily="34" charset="-122"/>
                 <a:cs typeface="Georgia" pitchFamily="34" charset="-120"/>
               </a:rPr>
-              <a:t>Aimed at everyone at once: the gala, the blockbuster, the front page.</a:t>
-            </a:r>
-            <a:endParaRPr lang="en-US" sz="1600" dirty="0"/>
-          </a:p>
-        </p:txBody>
-      </p:sp>
-      <p:sp>
-        <p:nvSpPr>
-          <p:cNvPr id="9" name="Text 7"/>
-          <p:cNvSpPr/>
-          <p:nvPr/>
-        </p:nvSpPr>
-        <p:spPr>
-          <a:xfrm>
-            <a:off x="4471416" y="2057400"/>
-            <a:ext cx="3246120" cy="502920"/>
-          </a:xfrm>
-          <a:prstGeom prst="rect">
-            <a:avLst/>
-          </a:prstGeom>
-          <a:noFill/>
-          <a:ln/>
-        </p:spPr>
-        <p:txBody>
-          <a:bodyPr wrap="square" lIns="0" tIns="0" rIns="0" bIns="0" rtlCol="0" anchor="ctr"/>
-          <a:lstStyle/>
-          <a:p>
-            <a:pPr indent="0" marL="0">
-              <a:buNone/>
-            </a:pPr>
-            <a:r>
-              <a:rPr lang="en-US" sz="2600" dirty="0">
-                <a:solidFill>
-                  <a:srgbClr val="A3C1AD"/>
-                </a:solidFill>
-                <a:latin typeface="Georgia" pitchFamily="34" charset="0"/>
-                <a:ea typeface="Georgia" pitchFamily="34" charset="-122"/>
-                <a:cs typeface="Georgia" pitchFamily="34" charset="-120"/>
-              </a:rPr>
-              <a:t>Niche</a:t>
-            </a:r>
-            <a:endParaRPr lang="en-US" sz="2600" dirty="0"/>
-          </a:p>
-        </p:txBody>
-      </p:sp>
-      <p:sp>
-        <p:nvSpPr>
-          <p:cNvPr id="10" name="Shape 8"/>
-          <p:cNvSpPr/>
-          <p:nvPr/>
-        </p:nvSpPr>
-        <p:spPr>
-          <a:xfrm>
-            <a:off x="4471416" y="2606040"/>
+              <a:t>Mass</a:t>
+            </a:r>
+            <a:endParaRPr lang="en-US" sz="2400" dirty="0"/>
+          </a:p>
+        </p:txBody>
+      </p:sp>
+      <p:sp>
+        <p:nvSpPr>
+          <p:cNvPr id="9" name="Shape 6"/>
+          <p:cNvSpPr/>
+          <p:nvPr/>
+        </p:nvSpPr>
+        <p:spPr>
+          <a:xfrm>
+            <a:off x="822960" y="4160520"/>
             <a:ext cx="3246120" cy="0"/>
           </a:xfrm>
           <a:prstGeom prst="line">
@@ -3706,14 +5078,14 @@
       </p:sp>
       <p:sp>
         <p:nvSpPr>
-          <p:cNvPr id="11" name="Text 9"/>
-          <p:cNvSpPr/>
-          <p:nvPr/>
-        </p:nvSpPr>
-        <p:spPr>
-          <a:xfrm>
-            <a:off x="4471416" y="2788920"/>
-            <a:ext cx="3246120" cy="2011680"/>
+          <p:cNvPr id="10" name="Text 7"/>
+          <p:cNvSpPr/>
+          <p:nvPr/>
+        </p:nvSpPr>
+        <p:spPr>
+          <a:xfrm>
+            <a:off x="822960" y="4297680"/>
+            <a:ext cx="3246120" cy="1280160"/>
           </a:xfrm>
           <a:prstGeom prst="rect">
             <a:avLst/>
@@ -3727,12 +5099,12 @@
           <a:p>
             <a:pPr indent="0" marL="0">
               <a:lnSpc>
-                <a:spcPts val="2200"/>
+                <a:spcPts val="2000"/>
               </a:lnSpc>
               <a:buNone/>
             </a:pPr>
             <a:r>
-              <a:rPr lang="en-US" sz="1600" dirty="0">
+              <a:rPr lang="en-US" sz="1450" dirty="0">
                 <a:solidFill>
                   <a:srgbClr val="24313F"/>
                 </a:solidFill>
@@ -3740,66 +5112,29 @@
                 <a:ea typeface="Georgia" pitchFamily="34" charset="-122"/>
                 <a:cs typeface="Georgia" pitchFamily="34" charset="-120"/>
               </a:rPr>
-              <a:t>Aimed at a defined interest group: the specialist channel, the fan community.</a:t>
-            </a:r>
-            <a:endParaRPr lang="en-US" sz="1600" dirty="0"/>
-          </a:p>
-        </p:txBody>
-      </p:sp>
-      <p:sp>
-        <p:nvSpPr>
-          <p:cNvPr id="12" name="Text 10"/>
-          <p:cNvSpPr/>
-          <p:nvPr/>
-        </p:nvSpPr>
-        <p:spPr>
-          <a:xfrm>
-            <a:off x="8119872" y="2057400"/>
-            <a:ext cx="3246120" cy="502920"/>
-          </a:xfrm>
-          <a:prstGeom prst="rect">
-            <a:avLst/>
-          </a:prstGeom>
-          <a:noFill/>
-          <a:ln/>
-        </p:spPr>
-        <p:txBody>
-          <a:bodyPr wrap="square" lIns="0" tIns="0" rIns="0" bIns="0" rtlCol="0" anchor="ctr"/>
-          <a:lstStyle/>
-          <a:p>
-            <a:pPr indent="0" marL="0">
-              <a:buNone/>
-            </a:pPr>
-            <a:r>
-              <a:rPr lang="en-US" sz="2600" dirty="0">
-                <a:solidFill>
-                  <a:srgbClr val="A3C1AD"/>
-                </a:solidFill>
-                <a:latin typeface="Georgia" pitchFamily="34" charset="0"/>
-                <a:ea typeface="Georgia" pitchFamily="34" charset="-122"/>
-                <a:cs typeface="Georgia" pitchFamily="34" charset="-120"/>
-              </a:rPr>
-              <a:t>Target</a:t>
-            </a:r>
-            <a:endParaRPr lang="en-US" sz="2600" dirty="0"/>
-          </a:p>
-        </p:txBody>
-      </p:sp>
-      <p:sp>
-        <p:nvSpPr>
-          <p:cNvPr id="13" name="Shape 11"/>
-          <p:cNvSpPr/>
-          <p:nvPr/>
-        </p:nvSpPr>
-        <p:spPr>
-          <a:xfrm>
-            <a:off x="8119872" y="2606040"/>
-            <a:ext cx="3246120" cy="0"/>
-          </a:xfrm>
-          <a:prstGeom prst="line">
-            <a:avLst/>
-          </a:prstGeom>
-          <a:noFill/>
+              <a:t>A Super Bowl half-time show: aimed at everyone at once, priced accordingly.</a:t>
+            </a:r>
+            <a:endParaRPr lang="en-US" sz="1450" dirty="0"/>
+          </a:p>
+        </p:txBody>
+      </p:sp>
+      <p:sp>
+        <p:nvSpPr>
+          <p:cNvPr id="11" name="Shape 8"/>
+          <p:cNvSpPr/>
+          <p:nvPr/>
+        </p:nvSpPr>
+        <p:spPr>
+          <a:xfrm>
+            <a:off x="4471416" y="1554480"/>
+            <a:ext cx="3246120" cy="2011680"/>
+          </a:xfrm>
+          <a:prstGeom prst="rect">
+            <a:avLst/>
+          </a:prstGeom>
+          <a:solidFill>
+            <a:srgbClr val="FAF8F1"/>
+          </a:solidFill>
           <a:ln w="9525">
             <a:solidFill>
               <a:srgbClr val="D9D4C4"/>
@@ -3808,100 +5143,79 @@
           </a:ln>
         </p:spPr>
       </p:sp>
-      <p:sp>
-        <p:nvSpPr>
-          <p:cNvPr id="14" name="Text 12"/>
-          <p:cNvSpPr/>
-          <p:nvPr/>
-        </p:nvSpPr>
-        <p:spPr>
-          <a:xfrm>
-            <a:off x="8119872" y="2788920"/>
-            <a:ext cx="3246120" cy="2011680"/>
-          </a:xfrm>
-          <a:prstGeom prst="rect">
-            <a:avLst/>
-          </a:prstGeom>
-          <a:noFill/>
-          <a:ln/>
-        </p:spPr>
-        <p:txBody>
-          <a:bodyPr wrap="square" lIns="0" tIns="0" rIns="0" bIns="0" rtlCol="0" anchor="t"/>
-          <a:lstStyle/>
-          <a:p>
-            <a:pPr indent="0" marL="0">
-              <a:lnSpc>
-                <a:spcPts val="2200"/>
-              </a:lnSpc>
-              <a:buNone/>
-            </a:pPr>
-            <a:r>
-              <a:rPr lang="en-US" sz="1600" dirty="0">
-                <a:solidFill>
-                  <a:srgbClr val="24313F"/>
+      <p:pic>
+        <p:nvPicPr>
+          <p:cNvPr id="12" name="Image 1" descr="/Users/dogan/Documents/Vaults/Courses/wiki/classes/media-studies/decks/_build/img/yt-restoration.jpg">    </p:cNvPr>
+          <p:cNvPicPr>
+            <a:picLocks noChangeAspect="1"/>
+          </p:cNvPicPr>
+          <p:nvPr/>
+        </p:nvPicPr>
+        <p:blipFill>
+          <a:blip r:embed="rId2"/>
+          <a:stretch>
+            <a:fillRect/>
+          </a:stretch>
+        </p:blipFill>
+        <p:spPr>
+          <a:xfrm>
+            <a:off x="4599432" y="1719358"/>
+            <a:ext cx="2990088" cy="1681924"/>
+          </a:xfrm>
+          <a:prstGeom prst="rect">
+            <a:avLst/>
+          </a:prstGeom>
+        </p:spPr>
+      </p:pic>
+      <p:sp>
+        <p:nvSpPr>
+          <p:cNvPr id="13" name="Text 9"/>
+          <p:cNvSpPr/>
+          <p:nvPr/>
+        </p:nvSpPr>
+        <p:spPr>
+          <a:xfrm>
+            <a:off x="4471416" y="3657600"/>
+            <a:ext cx="3246120" cy="457200"/>
+          </a:xfrm>
+          <a:prstGeom prst="rect">
+            <a:avLst/>
+          </a:prstGeom>
+          <a:noFill/>
+          <a:ln/>
+        </p:spPr>
+        <p:txBody>
+          <a:bodyPr wrap="square" lIns="0" tIns="0" rIns="0" bIns="0" rtlCol="0" anchor="ctr"/>
+          <a:lstStyle/>
+          <a:p>
+            <a:pPr indent="0" marL="0">
+              <a:buNone/>
+            </a:pPr>
+            <a:r>
+              <a:rPr lang="en-US" sz="2400" dirty="0">
+                <a:solidFill>
+                  <a:srgbClr val="A3C1AD"/>
                 </a:solidFill>
                 <a:latin typeface="Georgia" pitchFamily="34" charset="0"/>
                 <a:ea typeface="Georgia" pitchFamily="34" charset="-122"/>
                 <a:cs typeface="Georgia" pitchFamily="34" charset="-120"/>
               </a:rPr>
-              <a:t>Aimed at a precise profile: age, taste, platform, spending. What advertisers pay for.</a:t>
-            </a:r>
-            <a:endParaRPr lang="en-US" sz="1600" dirty="0"/>
-          </a:p>
-        </p:txBody>
-      </p:sp>
-      <p:sp>
-        <p:nvSpPr>
-          <p:cNvPr id="15" name="Text 13"/>
-          <p:cNvSpPr/>
-          <p:nvPr/>
-        </p:nvSpPr>
-        <p:spPr>
-          <a:xfrm>
-            <a:off x="822960" y="5303520"/>
-            <a:ext cx="10543032" cy="685800"/>
-          </a:xfrm>
-          <a:prstGeom prst="rect">
-            <a:avLst/>
-          </a:prstGeom>
-          <a:noFill/>
-          <a:ln/>
-        </p:spPr>
-        <p:txBody>
-          <a:bodyPr wrap="square" lIns="0" tIns="0" rIns="0" bIns="0" rtlCol="0" anchor="t"/>
-          <a:lstStyle/>
-          <a:p>
-            <a:pPr indent="0" marL="0">
-              <a:lnSpc>
-                <a:spcPts val="1700"/>
-              </a:lnSpc>
-              <a:buNone/>
-            </a:pPr>
-            <a:r>
-              <a:rPr lang="en-US" sz="1250" i="1" dirty="0">
-                <a:solidFill>
-                  <a:srgbClr val="7A7F72"/>
-                </a:solidFill>
-                <a:latin typeface="Arial" pitchFamily="34" charset="0"/>
-                <a:ea typeface="Arial" pitchFamily="34" charset="-122"/>
-                <a:cs typeface="Arial" pitchFamily="34" charset="-120"/>
-              </a:rPr>
-              <a:t>Opened as Four Corners: mass, niche, target, undecided; commit by moving, one corner defends. Demographics vs psychographics: who they are, versus what they want.</a:t>
-            </a:r>
-            <a:endParaRPr lang="en-US" sz="1250" dirty="0"/>
-          </a:p>
-        </p:txBody>
-      </p:sp>
-      <p:sp>
-        <p:nvSpPr>
-          <p:cNvPr id="16" name="Shape 14"/>
-          <p:cNvSpPr/>
-          <p:nvPr/>
-        </p:nvSpPr>
-        <p:spPr>
-          <a:xfrm>
-            <a:off x="822960" y="6382512"/>
-            <a:ext cx="10543032" cy="0"/>
+              <a:t>Niche</a:t>
+            </a:r>
+            <a:endParaRPr lang="en-US" sz="2400" dirty="0"/>
+          </a:p>
+        </p:txBody>
+      </p:sp>
+      <p:sp>
+        <p:nvSpPr>
+          <p:cNvPr id="14" name="Shape 10"/>
+          <p:cNvSpPr/>
+          <p:nvPr/>
+        </p:nvSpPr>
+        <p:spPr>
+          <a:xfrm>
+            <a:off x="4471416" y="4160520"/>
+            <a:ext cx="3246120" cy="0"/>
           </a:xfrm>
           <a:prstGeom prst="line">
             <a:avLst/>
@@ -3917,14 +5231,105 @@
       </p:sp>
       <p:sp>
         <p:nvSpPr>
-          <p:cNvPr id="17" name="Text 15"/>
-          <p:cNvSpPr/>
-          <p:nvPr/>
-        </p:nvSpPr>
-        <p:spPr>
-          <a:xfrm>
-            <a:off x="822960" y="6419088"/>
-            <a:ext cx="7315200" cy="274320"/>
+          <p:cNvPr id="15" name="Text 11"/>
+          <p:cNvSpPr/>
+          <p:nvPr/>
+        </p:nvSpPr>
+        <p:spPr>
+          <a:xfrm>
+            <a:off x="4471416" y="4297680"/>
+            <a:ext cx="3246120" cy="1280160"/>
+          </a:xfrm>
+          <a:prstGeom prst="rect">
+            <a:avLst/>
+          </a:prstGeom>
+          <a:noFill/>
+          <a:ln/>
+        </p:spPr>
+        <p:txBody>
+          <a:bodyPr wrap="square" lIns="0" tIns="0" rIns="0" bIns="0" rtlCol="0" anchor="t"/>
+          <a:lstStyle/>
+          <a:p>
+            <a:pPr indent="0" marL="0">
+              <a:lnSpc>
+                <a:spcPts val="2000"/>
+              </a:lnSpc>
+              <a:buNone/>
+            </a:pPr>
+            <a:r>
+              <a:rPr lang="en-US" sz="1450" dirty="0">
+                <a:solidFill>
+                  <a:srgbClr val="24313F"/>
+                </a:solidFill>
+                <a:latin typeface="Georgia" pitchFamily="34" charset="0"/>
+                <a:ea typeface="Georgia" pitchFamily="34" charset="-122"/>
+                <a:cs typeface="Georgia" pitchFamily="34" charset="-120"/>
+              </a:rPr>
+              <a:t>A restoration channel: a defined interest group that finds the text itself.</a:t>
+            </a:r>
+            <a:endParaRPr lang="en-US" sz="1450" dirty="0"/>
+          </a:p>
+        </p:txBody>
+      </p:sp>
+      <p:sp>
+        <p:nvSpPr>
+          <p:cNvPr id="16" name="Shape 12"/>
+          <p:cNvSpPr/>
+          <p:nvPr/>
+        </p:nvSpPr>
+        <p:spPr>
+          <a:xfrm>
+            <a:off x="8119872" y="1554480"/>
+            <a:ext cx="3246120" cy="2011680"/>
+          </a:xfrm>
+          <a:prstGeom prst="rect">
+            <a:avLst/>
+          </a:prstGeom>
+          <a:solidFill>
+            <a:srgbClr val="FAF8F1"/>
+          </a:solidFill>
+          <a:ln w="9525">
+            <a:solidFill>
+              <a:srgbClr val="D9D4C4"/>
+            </a:solidFill>
+            <a:prstDash val="solid"/>
+          </a:ln>
+        </p:spPr>
+      </p:sp>
+      <p:pic>
+        <p:nvPicPr>
+          <p:cNvPr id="17" name="Image 2" descr="/Users/dogan/Documents/Vaults/Courses/wiki/classes/media-studies/decks/_build/img/yt-kpop.jpg">    </p:cNvPr>
+          <p:cNvPicPr>
+            <a:picLocks noChangeAspect="1"/>
+          </p:cNvPicPr>
+          <p:nvPr/>
+        </p:nvPicPr>
+        <p:blipFill>
+          <a:blip r:embed="rId3"/>
+          <a:stretch>
+            <a:fillRect/>
+          </a:stretch>
+        </p:blipFill>
+        <p:spPr>
+          <a:xfrm>
+            <a:off x="8247888" y="1719358"/>
+            <a:ext cx="2990088" cy="1681924"/>
+          </a:xfrm>
+          <a:prstGeom prst="rect">
+            <a:avLst/>
+          </a:prstGeom>
+        </p:spPr>
+      </p:pic>
+      <p:sp>
+        <p:nvSpPr>
+          <p:cNvPr id="18" name="Text 13"/>
+          <p:cNvSpPr/>
+          <p:nvPr/>
+        </p:nvSpPr>
+        <p:spPr>
+          <a:xfrm>
+            <a:off x="8119872" y="3657600"/>
+            <a:ext cx="3246120" cy="457200"/>
           </a:xfrm>
           <a:prstGeom prst="rect">
             <a:avLst/>
@@ -3940,7 +5345,114 @@
               <a:buNone/>
             </a:pPr>
             <a:r>
-              <a:rPr lang="en-US" sz="900" spc="150" kern="0" dirty="0">
+              <a:rPr lang="en-US" sz="2400" dirty="0">
+                <a:solidFill>
+                  <a:srgbClr val="A3C1AD"/>
+                </a:solidFill>
+                <a:latin typeface="Georgia" pitchFamily="34" charset="0"/>
+                <a:ea typeface="Georgia" pitchFamily="34" charset="-122"/>
+                <a:cs typeface="Georgia" pitchFamily="34" charset="-120"/>
+              </a:rPr>
+              <a:t>Target</a:t>
+            </a:r>
+            <a:endParaRPr lang="en-US" sz="2400" dirty="0"/>
+          </a:p>
+        </p:txBody>
+      </p:sp>
+      <p:sp>
+        <p:nvSpPr>
+          <p:cNvPr id="19" name="Shape 14"/>
+          <p:cNvSpPr/>
+          <p:nvPr/>
+        </p:nvSpPr>
+        <p:spPr>
+          <a:xfrm>
+            <a:off x="8119872" y="4160520"/>
+            <a:ext cx="3246120" cy="0"/>
+          </a:xfrm>
+          <a:prstGeom prst="line">
+            <a:avLst/>
+          </a:prstGeom>
+          <a:noFill/>
+          <a:ln w="9525">
+            <a:solidFill>
+              <a:srgbClr val="D9D4C4"/>
+            </a:solidFill>
+            <a:prstDash val="solid"/>
+          </a:ln>
+        </p:spPr>
+      </p:sp>
+      <p:sp>
+        <p:nvSpPr>
+          <p:cNvPr id="20" name="Text 15"/>
+          <p:cNvSpPr/>
+          <p:nvPr/>
+        </p:nvSpPr>
+        <p:spPr>
+          <a:xfrm>
+            <a:off x="8119872" y="4297680"/>
+            <a:ext cx="3246120" cy="1280160"/>
+          </a:xfrm>
+          <a:prstGeom prst="rect">
+            <a:avLst/>
+          </a:prstGeom>
+          <a:noFill/>
+          <a:ln/>
+        </p:spPr>
+        <p:txBody>
+          <a:bodyPr wrap="square" lIns="0" tIns="0" rIns="0" bIns="0" rtlCol="0" anchor="t"/>
+          <a:lstStyle/>
+          <a:p>
+            <a:pPr indent="0" marL="0">
+              <a:lnSpc>
+                <a:spcPts val="2000"/>
+              </a:lnSpc>
+              <a:buNone/>
+            </a:pPr>
+            <a:r>
+              <a:rPr lang="en-US" sz="1450" dirty="0">
+                <a:solidFill>
+                  <a:srgbClr val="24313F"/>
+                </a:solidFill>
+                <a:latin typeface="Georgia" pitchFamily="34" charset="0"/>
+                <a:ea typeface="Georgia" pitchFamily="34" charset="-122"/>
+                <a:cs typeface="Georgia" pitchFamily="34" charset="-120"/>
+              </a:rPr>
+              <a:t>A comeback teaser: a precise profile of age, taste and platform. What advertisers pay for.</a:t>
+            </a:r>
+            <a:endParaRPr lang="en-US" sz="1450" dirty="0"/>
+          </a:p>
+        </p:txBody>
+      </p:sp>
+      <p:sp>
+        <p:nvSpPr>
+          <p:cNvPr id="21" name="Text 16"/>
+          <p:cNvSpPr/>
+          <p:nvPr/>
+        </p:nvSpPr>
+        <p:spPr>
+          <a:xfrm>
+            <a:off x="822960" y="5715000"/>
+            <a:ext cx="10543032" cy="548640"/>
+          </a:xfrm>
+          <a:prstGeom prst="rect">
+            <a:avLst/>
+          </a:prstGeom>
+          <a:noFill/>
+          <a:ln/>
+        </p:spPr>
+        <p:txBody>
+          <a:bodyPr wrap="square" lIns="0" tIns="0" rIns="0" bIns="0" rtlCol="0" anchor="t"/>
+          <a:lstStyle/>
+          <a:p>
+            <a:pPr indent="0" marL="0">
+              <a:lnSpc>
+                <a:spcPts val="1600"/>
+              </a:lnSpc>
+              <a:buNone/>
+            </a:pPr>
+            <a:r>
+              <a:rPr lang="en-US" sz="1200" i="1" dirty="0">
                 <a:solidFill>
                   <a:srgbClr val="7A7F72"/>
                 </a:solidFill>
@@ -3948,6 +5460,68 @@
                 <a:ea typeface="Arial" pitchFamily="34" charset="-122"/>
                 <a:cs typeface="Arial" pitchFamily="34" charset="-120"/>
               </a:rPr>
+              <a:t>Opened as Four Corners: mass, niche, target, undecided; commit by moving, one corner defends. Demographics vs psychographics: who they are, versus what they want.</a:t>
+            </a:r>
+            <a:endParaRPr lang="en-US" sz="1200" dirty="0"/>
+          </a:p>
+        </p:txBody>
+      </p:sp>
+      <p:sp>
+        <p:nvSpPr>
+          <p:cNvPr id="22" name="Shape 17"/>
+          <p:cNvSpPr/>
+          <p:nvPr/>
+        </p:nvSpPr>
+        <p:spPr>
+          <a:xfrm>
+            <a:off x="822960" y="6382512"/>
+            <a:ext cx="10543032" cy="0"/>
+          </a:xfrm>
+          <a:prstGeom prst="line">
+            <a:avLst/>
+          </a:prstGeom>
+          <a:noFill/>
+          <a:ln w="9525">
+            <a:solidFill>
+              <a:srgbClr val="D9D4C4"/>
+            </a:solidFill>
+            <a:prstDash val="solid"/>
+          </a:ln>
+        </p:spPr>
+      </p:sp>
+      <p:sp>
+        <p:nvSpPr>
+          <p:cNvPr id="23" name="Text 18"/>
+          <p:cNvSpPr/>
+          <p:nvPr/>
+        </p:nvSpPr>
+        <p:spPr>
+          <a:xfrm>
+            <a:off x="822960" y="6419088"/>
+            <a:ext cx="7315200" cy="274320"/>
+          </a:xfrm>
+          <a:prstGeom prst="rect">
+            <a:avLst/>
+          </a:prstGeom>
+          <a:noFill/>
+          <a:ln/>
+        </p:spPr>
+        <p:txBody>
+          <a:bodyPr wrap="square" lIns="0" tIns="0" rIns="0" bIns="0" rtlCol="0" anchor="ctr"/>
+          <a:lstStyle/>
+          <a:p>
+            <a:pPr indent="0" marL="0">
+              <a:buNone/>
+            </a:pPr>
+            <a:r>
+              <a:rPr lang="en-US" sz="900" spc="150" kern="0" dirty="0">
+                <a:solidFill>
+                  <a:srgbClr val="7A7F72"/>
+                </a:solidFill>
+                <a:latin typeface="Arial" pitchFamily="34" charset="0"/>
+                <a:ea typeface="Arial" pitchFamily="34" charset="-122"/>
+                <a:cs typeface="Arial" pitchFamily="34" charset="-120"/>
+              </a:rPr>
               <a:t>MEDIA STUDIES 9607 · SEMESTER I</a:t>
             </a:r>
             <a:endParaRPr lang="en-US" sz="900" dirty="0"/>
@@ -3956,7 +5530,7 @@
       </p:sp>
       <p:sp>
         <p:nvSpPr>
-          <p:cNvPr id="18" name="Text 16"/>
+          <p:cNvPr id="24" name="Text 19"/>
           <p:cNvSpPr/>
           <p:nvPr/>
         </p:nvSpPr>
@@ -4072,7 +5646,7 @@
         </p:nvSpPr>
         <p:spPr>
           <a:xfrm>
-            <a:off x="822960" y="2011680"/>
+            <a:off x="822960" y="1874520"/>
             <a:ext cx="10424160" cy="3291840"/>
           </a:xfrm>
           <a:prstGeom prst="rect">
@@ -4087,12 +5661,12 @@
           <a:p>
             <a:pPr indent="0" marL="0">
               <a:lnSpc>
-                <a:spcPts val="5400"/>
+                <a:spcPts val="4600"/>
               </a:lnSpc>
               <a:buNone/>
             </a:pPr>
             <a:r>
-              <a:rPr lang="en-US" sz="4600" dirty="0">
+              <a:rPr lang="en-US" sz="3600" dirty="0">
                 <a:solidFill>
                   <a:srgbClr val="24313F"/>
                 </a:solidFill>
@@ -4100,9 +5674,9 @@
                 <a:ea typeface="Georgia" pitchFamily="34" charset="-122"/>
                 <a:cs typeface="Georgia" pitchFamily="34" charset="-120"/>
               </a:rPr>
-              <a:t>Not what media do to people, but what people do with the media.</a:t>
-            </a:r>
-            <a:endParaRPr lang="en-US" sz="4600" dirty="0"/>
+              <a:t>less attention to what the media do to people and more to what people do with the media</a:t>
+            </a:r>
+            <a:endParaRPr lang="en-US" sz="3600" dirty="0"/>
           </a:p>
         </p:txBody>
       </p:sp>
@@ -4753,7 +6327,7 @@
                 <a:ea typeface="Arial" pitchFamily="34" charset="-122"/>
                 <a:cs typeface="Arial" pitchFamily="34" charset="-120"/>
               </a:rPr>
-              <a:t>BLUMLER AND KATZ · USES AND GRATIFICATIONS</a:t>
+              <a:t>A REAL WEEK OF WATCHING</a:t>
             </a:r>
             <a:endParaRPr lang="en-US" sz="1100" dirty="0"/>
           </a:p>
@@ -4792,7 +6366,7 @@
                 <a:ea typeface="Arial" pitchFamily="34" charset="-122"/>
                 <a:cs typeface="Arial" pitchFamily="34" charset="-120"/>
               </a:rPr>
-              <a:t>AUDIENCES AS ACTIVE CHOOSERS</a:t>
+              <a:t>MASS IS SMALLER THAN IT SOUNDS</a:t>
             </a:r>
             <a:endParaRPr lang="en-US" sz="1100" dirty="0"/>
           </a:p>
@@ -4829,8 +6403,8 @@
         </p:nvSpPr>
         <p:spPr>
           <a:xfrm>
-            <a:off x="822960" y="932688"/>
-            <a:ext cx="10543032" cy="640080"/>
+            <a:off x="822960" y="914400"/>
+            <a:ext cx="10543032" cy="548640"/>
           </a:xfrm>
           <a:prstGeom prst="rect">
             <a:avLst/>
@@ -4846,7 +6420,7 @@
               <a:buNone/>
             </a:pPr>
             <a:r>
-              <a:rPr lang="en-US" sz="3200" dirty="0">
+              <a:rPr lang="en-US" sz="3000" dirty="0">
                 <a:solidFill>
                   <a:srgbClr val="24313F"/>
                 </a:solidFill>
@@ -4854,9 +6428,9 @@
                 <a:ea typeface="Georgia" pitchFamily="34" charset="-122"/>
                 <a:cs typeface="Georgia" pitchFamily="34" charset="-120"/>
               </a:rPr>
-              <a:t>Four jobs we need media to do</a:t>
-            </a:r>
-            <a:endParaRPr lang="en-US" sz="3200" dirty="0"/>
+              <a:t>The week's biggest audiences</a:t>
+            </a:r>
+            <a:endParaRPr lang="en-US" sz="3000" dirty="0"/>
           </a:p>
         </p:txBody>
       </p:sp>
@@ -4868,8 +6442,8 @@
         </p:nvSpPr>
         <p:spPr>
           <a:xfrm>
-            <a:off x="822960" y="1920240"/>
-            <a:ext cx="914400" cy="548640"/>
+            <a:off x="822960" y="1645920"/>
+            <a:ext cx="3566160" cy="457200"/>
           </a:xfrm>
           <a:prstGeom prst="rect">
             <a:avLst/>
@@ -4885,17 +6459,17 @@
               <a:buNone/>
             </a:pPr>
             <a:r>
-              <a:rPr lang="en-US" sz="3000" dirty="0">
-                <a:solidFill>
-                  <a:srgbClr val="A3C1AD"/>
+              <a:rPr lang="en-US" sz="1450" dirty="0">
+                <a:solidFill>
+                  <a:srgbClr val="24313F"/>
                 </a:solidFill>
                 <a:latin typeface="Georgia" pitchFamily="34" charset="0"/>
                 <a:ea typeface="Georgia" pitchFamily="34" charset="-122"/>
                 <a:cs typeface="Georgia" pitchFamily="34" charset="-120"/>
               </a:rPr>
-              <a:t>01</a:t>
-            </a:r>
-            <a:endParaRPr lang="en-US" sz="3000" dirty="0"/>
+              <a:t>Race Across the World</a:t>
+            </a:r>
+            <a:endParaRPr lang="en-US" sz="1450" dirty="0"/>
           </a:p>
         </p:txBody>
       </p:sp>
@@ -4907,8 +6481,8 @@
         </p:nvSpPr>
         <p:spPr>
           <a:xfrm>
-            <a:off x="1737360" y="1938528"/>
-            <a:ext cx="4082796" cy="457200"/>
+            <a:off x="4434840" y="1645920"/>
+            <a:ext cx="1234440" cy="457200"/>
           </a:xfrm>
           <a:prstGeom prst="rect">
             <a:avLst/>
@@ -4924,49 +6498,242 @@
               <a:buNone/>
             </a:pPr>
             <a:r>
-              <a:rPr lang="en-US" sz="2200" dirty="0">
-                <a:solidFill>
-                  <a:srgbClr val="4A6B5D"/>
+              <a:rPr lang="en-US" sz="1050" dirty="0">
+                <a:solidFill>
+                  <a:srgbClr val="7A7F72"/>
+                </a:solidFill>
+                <a:latin typeface="Arial" pitchFamily="34" charset="0"/>
+                <a:ea typeface="Arial" pitchFamily="34" charset="-122"/>
+                <a:cs typeface="Arial" pitchFamily="34" charset="-120"/>
+              </a:rPr>
+              <a:t>BBC One</a:t>
+            </a:r>
+            <a:endParaRPr lang="en-US" sz="1050" dirty="0"/>
+          </a:p>
+        </p:txBody>
+      </p:sp>
+      <p:sp>
+        <p:nvSpPr>
+          <p:cNvPr id="8" name="Shape 6"/>
+          <p:cNvSpPr/>
+          <p:nvPr/>
+        </p:nvSpPr>
+        <p:spPr>
+          <a:xfrm>
+            <a:off x="5760720" y="1709928"/>
+            <a:ext cx="4756709" cy="329184"/>
+          </a:xfrm>
+          <a:prstGeom prst="rect">
+            <a:avLst/>
+          </a:prstGeom>
+          <a:solidFill>
+            <a:srgbClr val="4A6B5D"/>
+          </a:solidFill>
+          <a:ln/>
+        </p:spPr>
+      </p:sp>
+      <p:sp>
+        <p:nvSpPr>
+          <p:cNvPr id="9" name="Text 7"/>
+          <p:cNvSpPr/>
+          <p:nvPr/>
+        </p:nvSpPr>
+        <p:spPr>
+          <a:xfrm>
+            <a:off x="10563149" y="1645920"/>
+            <a:ext cx="914400" cy="457200"/>
+          </a:xfrm>
+          <a:prstGeom prst="rect">
+            <a:avLst/>
+          </a:prstGeom>
+          <a:noFill/>
+          <a:ln/>
+        </p:spPr>
+        <p:txBody>
+          <a:bodyPr wrap="square" lIns="0" tIns="0" rIns="0" bIns="0" rtlCol="0" anchor="ctr"/>
+          <a:lstStyle/>
+          <a:p>
+            <a:pPr indent="0" marL="0">
+              <a:buNone/>
+            </a:pPr>
+            <a:r>
+              <a:rPr lang="en-US" sz="1100" dirty="0">
+                <a:solidFill>
+                  <a:srgbClr val="7A7F72"/>
+                </a:solidFill>
+                <a:latin typeface="Arial" pitchFamily="34" charset="0"/>
+                <a:ea typeface="Arial" pitchFamily="34" charset="-122"/>
+                <a:cs typeface="Arial" pitchFamily="34" charset="-120"/>
+              </a:rPr>
+              <a:t>5.78m</a:t>
+            </a:r>
+            <a:endParaRPr lang="en-US" sz="1100" dirty="0"/>
+          </a:p>
+        </p:txBody>
+      </p:sp>
+      <p:sp>
+        <p:nvSpPr>
+          <p:cNvPr id="10" name="Text 8"/>
+          <p:cNvSpPr/>
+          <p:nvPr/>
+        </p:nvSpPr>
+        <p:spPr>
+          <a:xfrm>
+            <a:off x="822960" y="2157984"/>
+            <a:ext cx="3566160" cy="457200"/>
+          </a:xfrm>
+          <a:prstGeom prst="rect">
+            <a:avLst/>
+          </a:prstGeom>
+          <a:noFill/>
+          <a:ln/>
+        </p:spPr>
+        <p:txBody>
+          <a:bodyPr wrap="square" lIns="0" tIns="0" rIns="0" bIns="0" rtlCol="0" anchor="ctr"/>
+          <a:lstStyle/>
+          <a:p>
+            <a:pPr indent="0" marL="0">
+              <a:buNone/>
+            </a:pPr>
+            <a:r>
+              <a:rPr lang="en-US" sz="1450" dirty="0">
+                <a:solidFill>
+                  <a:srgbClr val="24313F"/>
                 </a:solidFill>
                 <a:latin typeface="Georgia" pitchFamily="34" charset="0"/>
                 <a:ea typeface="Georgia" pitchFamily="34" charset="-122"/>
                 <a:cs typeface="Georgia" pitchFamily="34" charset="-120"/>
               </a:rPr>
-              <a:t>Diversion</a:t>
-            </a:r>
-            <a:endParaRPr lang="en-US" sz="2200" dirty="0"/>
-          </a:p>
-        </p:txBody>
-      </p:sp>
-      <p:sp>
-        <p:nvSpPr>
-          <p:cNvPr id="8" name="Text 6"/>
-          <p:cNvSpPr/>
-          <p:nvPr/>
-        </p:nvSpPr>
-        <p:spPr>
-          <a:xfrm>
-            <a:off x="1737360" y="2468880"/>
-            <a:ext cx="4082796" cy="1188720"/>
-          </a:xfrm>
-          <a:prstGeom prst="rect">
-            <a:avLst/>
-          </a:prstGeom>
-          <a:noFill/>
-          <a:ln/>
-        </p:spPr>
-        <p:txBody>
-          <a:bodyPr wrap="square" lIns="0" tIns="0" rIns="0" bIns="0" rtlCol="0" anchor="t"/>
-          <a:lstStyle/>
-          <a:p>
-            <a:pPr indent="0" marL="0">
-              <a:lnSpc>
-                <a:spcPts val="2000"/>
-              </a:lnSpc>
-              <a:buNone/>
-            </a:pPr>
-            <a:r>
-              <a:rPr lang="en-US" sz="1500" dirty="0">
+              <a:t>100 Years On Planet Earth</a:t>
+            </a:r>
+            <a:endParaRPr lang="en-US" sz="1450" dirty="0"/>
+          </a:p>
+        </p:txBody>
+      </p:sp>
+      <p:sp>
+        <p:nvSpPr>
+          <p:cNvPr id="11" name="Text 9"/>
+          <p:cNvSpPr/>
+          <p:nvPr/>
+        </p:nvSpPr>
+        <p:spPr>
+          <a:xfrm>
+            <a:off x="4434840" y="2157984"/>
+            <a:ext cx="1234440" cy="457200"/>
+          </a:xfrm>
+          <a:prstGeom prst="rect">
+            <a:avLst/>
+          </a:prstGeom>
+          <a:noFill/>
+          <a:ln/>
+        </p:spPr>
+        <p:txBody>
+          <a:bodyPr wrap="square" lIns="0" tIns="0" rIns="0" bIns="0" rtlCol="0" anchor="ctr"/>
+          <a:lstStyle/>
+          <a:p>
+            <a:pPr indent="0" marL="0">
+              <a:buNone/>
+            </a:pPr>
+            <a:r>
+              <a:rPr lang="en-US" sz="1050" dirty="0">
+                <a:solidFill>
+                  <a:srgbClr val="7A7F72"/>
+                </a:solidFill>
+                <a:latin typeface="Arial" pitchFamily="34" charset="0"/>
+                <a:ea typeface="Arial" pitchFamily="34" charset="-122"/>
+                <a:cs typeface="Arial" pitchFamily="34" charset="-120"/>
+              </a:rPr>
+              <a:t>BBC One</a:t>
+            </a:r>
+            <a:endParaRPr lang="en-US" sz="1050" dirty="0"/>
+          </a:p>
+        </p:txBody>
+      </p:sp>
+      <p:sp>
+        <p:nvSpPr>
+          <p:cNvPr id="12" name="Shape 10"/>
+          <p:cNvSpPr/>
+          <p:nvPr/>
+        </p:nvSpPr>
+        <p:spPr>
+          <a:xfrm>
+            <a:off x="5760720" y="2221992"/>
+            <a:ext cx="3892601" cy="329184"/>
+          </a:xfrm>
+          <a:prstGeom prst="rect">
+            <a:avLst/>
+          </a:prstGeom>
+          <a:solidFill>
+            <a:srgbClr val="4A6B5D"/>
+          </a:solidFill>
+          <a:ln/>
+        </p:spPr>
+      </p:sp>
+      <p:sp>
+        <p:nvSpPr>
+          <p:cNvPr id="13" name="Text 11"/>
+          <p:cNvSpPr/>
+          <p:nvPr/>
+        </p:nvSpPr>
+        <p:spPr>
+          <a:xfrm>
+            <a:off x="9699041" y="2157984"/>
+            <a:ext cx="914400" cy="457200"/>
+          </a:xfrm>
+          <a:prstGeom prst="rect">
+            <a:avLst/>
+          </a:prstGeom>
+          <a:noFill/>
+          <a:ln/>
+        </p:spPr>
+        <p:txBody>
+          <a:bodyPr wrap="square" lIns="0" tIns="0" rIns="0" bIns="0" rtlCol="0" anchor="ctr"/>
+          <a:lstStyle/>
+          <a:p>
+            <a:pPr indent="0" marL="0">
+              <a:buNone/>
+            </a:pPr>
+            <a:r>
+              <a:rPr lang="en-US" sz="1100" dirty="0">
+                <a:solidFill>
+                  <a:srgbClr val="7A7F72"/>
+                </a:solidFill>
+                <a:latin typeface="Arial" pitchFamily="34" charset="0"/>
+                <a:ea typeface="Arial" pitchFamily="34" charset="-122"/>
+                <a:cs typeface="Arial" pitchFamily="34" charset="-120"/>
+              </a:rPr>
+              <a:t>4.73m</a:t>
+            </a:r>
+            <a:endParaRPr lang="en-US" sz="1100" dirty="0"/>
+          </a:p>
+        </p:txBody>
+      </p:sp>
+      <p:sp>
+        <p:nvSpPr>
+          <p:cNvPr id="14" name="Text 12"/>
+          <p:cNvSpPr/>
+          <p:nvPr/>
+        </p:nvSpPr>
+        <p:spPr>
+          <a:xfrm>
+            <a:off x="822960" y="2670048"/>
+            <a:ext cx="3566160" cy="457200"/>
+          </a:xfrm>
+          <a:prstGeom prst="rect">
+            <a:avLst/>
+          </a:prstGeom>
+          <a:noFill/>
+          <a:ln/>
+        </p:spPr>
+        <p:txBody>
+          <a:bodyPr wrap="square" lIns="0" tIns="0" rIns="0" bIns="0" rtlCol="0" anchor="ctr"/>
+          <a:lstStyle/>
+          <a:p>
+            <a:pPr indent="0" marL="0">
+              <a:buNone/>
+            </a:pPr>
+            <a:r>
+              <a:rPr lang="en-US" sz="1450" dirty="0">
                 <a:solidFill>
                   <a:srgbClr val="24313F"/>
                 </a:solidFill>
@@ -4974,22 +6741,22 @@
                 <a:ea typeface="Georgia" pitchFamily="34" charset="-122"/>
                 <a:cs typeface="Georgia" pitchFamily="34" charset="-120"/>
               </a:rPr>
-              <a:t>Escape and release: from routine, from problems, into feeling.</a:t>
-            </a:r>
-            <a:endParaRPr lang="en-US" sz="1500" dirty="0"/>
-          </a:p>
-        </p:txBody>
-      </p:sp>
-      <p:sp>
-        <p:nvSpPr>
-          <p:cNvPr id="9" name="Text 7"/>
-          <p:cNvSpPr/>
-          <p:nvPr/>
-        </p:nvSpPr>
-        <p:spPr>
-          <a:xfrm>
-            <a:off x="6368796" y="1920240"/>
-            <a:ext cx="914400" cy="548640"/>
+              <a:t>Believe Me</a:t>
+            </a:r>
+            <a:endParaRPr lang="en-US" sz="1450" dirty="0"/>
+          </a:p>
+        </p:txBody>
+      </p:sp>
+      <p:sp>
+        <p:nvSpPr>
+          <p:cNvPr id="15" name="Text 13"/>
+          <p:cNvSpPr/>
+          <p:nvPr/>
+        </p:nvSpPr>
+        <p:spPr>
+          <a:xfrm>
+            <a:off x="4434840" y="2670048"/>
+            <a:ext cx="1234440" cy="457200"/>
           </a:xfrm>
           <a:prstGeom prst="rect">
             <a:avLst/>
@@ -5005,30 +6772,128 @@
               <a:buNone/>
             </a:pPr>
             <a:r>
-              <a:rPr lang="en-US" sz="3000" dirty="0">
-                <a:solidFill>
-                  <a:srgbClr val="A3C1AD"/>
+              <a:rPr lang="en-US" sz="1050" dirty="0">
+                <a:solidFill>
+                  <a:srgbClr val="7A7F72"/>
+                </a:solidFill>
+                <a:latin typeface="Arial" pitchFamily="34" charset="0"/>
+                <a:ea typeface="Arial" pitchFamily="34" charset="-122"/>
+                <a:cs typeface="Arial" pitchFamily="34" charset="-120"/>
+              </a:rPr>
+              <a:t>ITV1</a:t>
+            </a:r>
+            <a:endParaRPr lang="en-US" sz="1050" dirty="0"/>
+          </a:p>
+        </p:txBody>
+      </p:sp>
+      <p:sp>
+        <p:nvSpPr>
+          <p:cNvPr id="16" name="Shape 14"/>
+          <p:cNvSpPr/>
+          <p:nvPr/>
+        </p:nvSpPr>
+        <p:spPr>
+          <a:xfrm>
+            <a:off x="5760720" y="2734056"/>
+            <a:ext cx="3365906" cy="329184"/>
+          </a:xfrm>
+          <a:prstGeom prst="rect">
+            <a:avLst/>
+          </a:prstGeom>
+          <a:solidFill>
+            <a:srgbClr val="8C3A38"/>
+          </a:solidFill>
+          <a:ln/>
+        </p:spPr>
+      </p:sp>
+      <p:sp>
+        <p:nvSpPr>
+          <p:cNvPr id="17" name="Text 15"/>
+          <p:cNvSpPr/>
+          <p:nvPr/>
+        </p:nvSpPr>
+        <p:spPr>
+          <a:xfrm>
+            <a:off x="9172346" y="2670048"/>
+            <a:ext cx="914400" cy="457200"/>
+          </a:xfrm>
+          <a:prstGeom prst="rect">
+            <a:avLst/>
+          </a:prstGeom>
+          <a:noFill/>
+          <a:ln/>
+        </p:spPr>
+        <p:txBody>
+          <a:bodyPr wrap="square" lIns="0" tIns="0" rIns="0" bIns="0" rtlCol="0" anchor="ctr"/>
+          <a:lstStyle/>
+          <a:p>
+            <a:pPr indent="0" marL="0">
+              <a:buNone/>
+            </a:pPr>
+            <a:r>
+              <a:rPr lang="en-US" sz="1100" dirty="0">
+                <a:solidFill>
+                  <a:srgbClr val="7A7F72"/>
+                </a:solidFill>
+                <a:latin typeface="Arial" pitchFamily="34" charset="0"/>
+                <a:ea typeface="Arial" pitchFamily="34" charset="-122"/>
+                <a:cs typeface="Arial" pitchFamily="34" charset="-120"/>
+              </a:rPr>
+              <a:t>4.09m</a:t>
+            </a:r>
+            <a:endParaRPr lang="en-US" sz="1100" dirty="0"/>
+          </a:p>
+        </p:txBody>
+      </p:sp>
+      <p:sp>
+        <p:nvSpPr>
+          <p:cNvPr id="18" name="Text 16"/>
+          <p:cNvSpPr/>
+          <p:nvPr/>
+        </p:nvSpPr>
+        <p:spPr>
+          <a:xfrm>
+            <a:off x="822960" y="3182112"/>
+            <a:ext cx="3566160" cy="457200"/>
+          </a:xfrm>
+          <a:prstGeom prst="rect">
+            <a:avLst/>
+          </a:prstGeom>
+          <a:noFill/>
+          <a:ln/>
+        </p:spPr>
+        <p:txBody>
+          <a:bodyPr wrap="square" lIns="0" tIns="0" rIns="0" bIns="0" rtlCol="0" anchor="ctr"/>
+          <a:lstStyle/>
+          <a:p>
+            <a:pPr indent="0" marL="0">
+              <a:buNone/>
+            </a:pPr>
+            <a:r>
+              <a:rPr lang="en-US" sz="1450" dirty="0">
+                <a:solidFill>
+                  <a:srgbClr val="24313F"/>
                 </a:solidFill>
                 <a:latin typeface="Georgia" pitchFamily="34" charset="0"/>
                 <a:ea typeface="Georgia" pitchFamily="34" charset="-122"/>
                 <a:cs typeface="Georgia" pitchFamily="34" charset="-120"/>
               </a:rPr>
-              <a:t>02</a:t>
-            </a:r>
-            <a:endParaRPr lang="en-US" sz="3000" dirty="0"/>
-          </a:p>
-        </p:txBody>
-      </p:sp>
-      <p:sp>
-        <p:nvSpPr>
-          <p:cNvPr id="10" name="Text 8"/>
-          <p:cNvSpPr/>
-          <p:nvPr/>
-        </p:nvSpPr>
-        <p:spPr>
-          <a:xfrm>
-            <a:off x="7283196" y="1938528"/>
-            <a:ext cx="4082796" cy="457200"/>
+              <a:t>Britain's Got Talent</a:t>
+            </a:r>
+            <a:endParaRPr lang="en-US" sz="1450" dirty="0"/>
+          </a:p>
+        </p:txBody>
+      </p:sp>
+      <p:sp>
+        <p:nvSpPr>
+          <p:cNvPr id="19" name="Text 17"/>
+          <p:cNvSpPr/>
+          <p:nvPr/>
+        </p:nvSpPr>
+        <p:spPr>
+          <a:xfrm>
+            <a:off x="4434840" y="3182112"/>
+            <a:ext cx="1234440" cy="457200"/>
           </a:xfrm>
           <a:prstGeom prst="rect">
             <a:avLst/>
@@ -5044,49 +6909,242 @@
               <a:buNone/>
             </a:pPr>
             <a:r>
-              <a:rPr lang="en-US" sz="2200" dirty="0">
-                <a:solidFill>
-                  <a:srgbClr val="4A6B5D"/>
+              <a:rPr lang="en-US" sz="1050" dirty="0">
+                <a:solidFill>
+                  <a:srgbClr val="7A7F72"/>
+                </a:solidFill>
+                <a:latin typeface="Arial" pitchFamily="34" charset="0"/>
+                <a:ea typeface="Arial" pitchFamily="34" charset="-122"/>
+                <a:cs typeface="Arial" pitchFamily="34" charset="-120"/>
+              </a:rPr>
+              <a:t>ITV1</a:t>
+            </a:r>
+            <a:endParaRPr lang="en-US" sz="1050" dirty="0"/>
+          </a:p>
+        </p:txBody>
+      </p:sp>
+      <p:sp>
+        <p:nvSpPr>
+          <p:cNvPr id="20" name="Shape 18"/>
+          <p:cNvSpPr/>
+          <p:nvPr/>
+        </p:nvSpPr>
+        <p:spPr>
+          <a:xfrm>
+            <a:off x="5760720" y="3246120"/>
+            <a:ext cx="3094330" cy="329184"/>
+          </a:xfrm>
+          <a:prstGeom prst="rect">
+            <a:avLst/>
+          </a:prstGeom>
+          <a:solidFill>
+            <a:srgbClr val="8C3A38"/>
+          </a:solidFill>
+          <a:ln/>
+        </p:spPr>
+      </p:sp>
+      <p:sp>
+        <p:nvSpPr>
+          <p:cNvPr id="21" name="Text 19"/>
+          <p:cNvSpPr/>
+          <p:nvPr/>
+        </p:nvSpPr>
+        <p:spPr>
+          <a:xfrm>
+            <a:off x="8900770" y="3182112"/>
+            <a:ext cx="914400" cy="457200"/>
+          </a:xfrm>
+          <a:prstGeom prst="rect">
+            <a:avLst/>
+          </a:prstGeom>
+          <a:noFill/>
+          <a:ln/>
+        </p:spPr>
+        <p:txBody>
+          <a:bodyPr wrap="square" lIns="0" tIns="0" rIns="0" bIns="0" rtlCol="0" anchor="ctr"/>
+          <a:lstStyle/>
+          <a:p>
+            <a:pPr indent="0" marL="0">
+              <a:buNone/>
+            </a:pPr>
+            <a:r>
+              <a:rPr lang="en-US" sz="1100" dirty="0">
+                <a:solidFill>
+                  <a:srgbClr val="7A7F72"/>
+                </a:solidFill>
+                <a:latin typeface="Arial" pitchFamily="34" charset="0"/>
+                <a:ea typeface="Arial" pitchFamily="34" charset="-122"/>
+                <a:cs typeface="Arial" pitchFamily="34" charset="-120"/>
+              </a:rPr>
+              <a:t>3.76m</a:t>
+            </a:r>
+            <a:endParaRPr lang="en-US" sz="1100" dirty="0"/>
+          </a:p>
+        </p:txBody>
+      </p:sp>
+      <p:sp>
+        <p:nvSpPr>
+          <p:cNvPr id="22" name="Text 20"/>
+          <p:cNvSpPr/>
+          <p:nvPr/>
+        </p:nvSpPr>
+        <p:spPr>
+          <a:xfrm>
+            <a:off x="822960" y="3694176"/>
+            <a:ext cx="3566160" cy="457200"/>
+          </a:xfrm>
+          <a:prstGeom prst="rect">
+            <a:avLst/>
+          </a:prstGeom>
+          <a:noFill/>
+          <a:ln/>
+        </p:spPr>
+        <p:txBody>
+          <a:bodyPr wrap="square" lIns="0" tIns="0" rIns="0" bIns="0" rtlCol="0" anchor="ctr"/>
+          <a:lstStyle/>
+          <a:p>
+            <a:pPr indent="0" marL="0">
+              <a:buNone/>
+            </a:pPr>
+            <a:r>
+              <a:rPr lang="en-US" sz="1450" dirty="0">
+                <a:solidFill>
+                  <a:srgbClr val="24313F"/>
                 </a:solidFill>
                 <a:latin typeface="Georgia" pitchFamily="34" charset="0"/>
                 <a:ea typeface="Georgia" pitchFamily="34" charset="-122"/>
                 <a:cs typeface="Georgia" pitchFamily="34" charset="-120"/>
               </a:rPr>
-              <a:t>Personal relationships</a:t>
-            </a:r>
-            <a:endParaRPr lang="en-US" sz="2200" dirty="0"/>
-          </a:p>
-        </p:txBody>
-      </p:sp>
-      <p:sp>
-        <p:nvSpPr>
-          <p:cNvPr id="11" name="Text 9"/>
-          <p:cNvSpPr/>
-          <p:nvPr/>
-        </p:nvSpPr>
-        <p:spPr>
-          <a:xfrm>
-            <a:off x="7283196" y="2468880"/>
-            <a:ext cx="4082796" cy="1188720"/>
-          </a:xfrm>
-          <a:prstGeom prst="rect">
-            <a:avLst/>
-          </a:prstGeom>
-          <a:noFill/>
-          <a:ln/>
-        </p:spPr>
-        <p:txBody>
-          <a:bodyPr wrap="square" lIns="0" tIns="0" rIns="0" bIns="0" rtlCol="0" anchor="t"/>
-          <a:lstStyle/>
-          <a:p>
-            <a:pPr indent="0" marL="0">
-              <a:lnSpc>
-                <a:spcPts val="2000"/>
-              </a:lnSpc>
-              <a:buNone/>
-            </a:pPr>
-            <a:r>
-              <a:rPr lang="en-US" sz="1500" dirty="0">
+              <a:t>Amandaland</a:t>
+            </a:r>
+            <a:endParaRPr lang="en-US" sz="1450" dirty="0"/>
+          </a:p>
+        </p:txBody>
+      </p:sp>
+      <p:sp>
+        <p:nvSpPr>
+          <p:cNvPr id="23" name="Text 21"/>
+          <p:cNvSpPr/>
+          <p:nvPr/>
+        </p:nvSpPr>
+        <p:spPr>
+          <a:xfrm>
+            <a:off x="4434840" y="3694176"/>
+            <a:ext cx="1234440" cy="457200"/>
+          </a:xfrm>
+          <a:prstGeom prst="rect">
+            <a:avLst/>
+          </a:prstGeom>
+          <a:noFill/>
+          <a:ln/>
+        </p:spPr>
+        <p:txBody>
+          <a:bodyPr wrap="square" lIns="0" tIns="0" rIns="0" bIns="0" rtlCol="0" anchor="ctr"/>
+          <a:lstStyle/>
+          <a:p>
+            <a:pPr indent="0" marL="0">
+              <a:buNone/>
+            </a:pPr>
+            <a:r>
+              <a:rPr lang="en-US" sz="1050" dirty="0">
+                <a:solidFill>
+                  <a:srgbClr val="7A7F72"/>
+                </a:solidFill>
+                <a:latin typeface="Arial" pitchFamily="34" charset="0"/>
+                <a:ea typeface="Arial" pitchFamily="34" charset="-122"/>
+                <a:cs typeface="Arial" pitchFamily="34" charset="-120"/>
+              </a:rPr>
+              <a:t>BBC One</a:t>
+            </a:r>
+            <a:endParaRPr lang="en-US" sz="1050" dirty="0"/>
+          </a:p>
+        </p:txBody>
+      </p:sp>
+      <p:sp>
+        <p:nvSpPr>
+          <p:cNvPr id="24" name="Shape 22"/>
+          <p:cNvSpPr/>
+          <p:nvPr/>
+        </p:nvSpPr>
+        <p:spPr>
+          <a:xfrm>
+            <a:off x="5760720" y="3758184"/>
+            <a:ext cx="2979115" cy="329184"/>
+          </a:xfrm>
+          <a:prstGeom prst="rect">
+            <a:avLst/>
+          </a:prstGeom>
+          <a:solidFill>
+            <a:srgbClr val="4A6B5D"/>
+          </a:solidFill>
+          <a:ln/>
+        </p:spPr>
+      </p:sp>
+      <p:sp>
+        <p:nvSpPr>
+          <p:cNvPr id="25" name="Text 23"/>
+          <p:cNvSpPr/>
+          <p:nvPr/>
+        </p:nvSpPr>
+        <p:spPr>
+          <a:xfrm>
+            <a:off x="8785555" y="3694176"/>
+            <a:ext cx="914400" cy="457200"/>
+          </a:xfrm>
+          <a:prstGeom prst="rect">
+            <a:avLst/>
+          </a:prstGeom>
+          <a:noFill/>
+          <a:ln/>
+        </p:spPr>
+        <p:txBody>
+          <a:bodyPr wrap="square" lIns="0" tIns="0" rIns="0" bIns="0" rtlCol="0" anchor="ctr"/>
+          <a:lstStyle/>
+          <a:p>
+            <a:pPr indent="0" marL="0">
+              <a:buNone/>
+            </a:pPr>
+            <a:r>
+              <a:rPr lang="en-US" sz="1100" dirty="0">
+                <a:solidFill>
+                  <a:srgbClr val="7A7F72"/>
+                </a:solidFill>
+                <a:latin typeface="Arial" pitchFamily="34" charset="0"/>
+                <a:ea typeface="Arial" pitchFamily="34" charset="-122"/>
+                <a:cs typeface="Arial" pitchFamily="34" charset="-120"/>
+              </a:rPr>
+              <a:t>3.62m</a:t>
+            </a:r>
+            <a:endParaRPr lang="en-US" sz="1100" dirty="0"/>
+          </a:p>
+        </p:txBody>
+      </p:sp>
+      <p:sp>
+        <p:nvSpPr>
+          <p:cNvPr id="26" name="Text 24"/>
+          <p:cNvSpPr/>
+          <p:nvPr/>
+        </p:nvSpPr>
+        <p:spPr>
+          <a:xfrm>
+            <a:off x="822960" y="4206240"/>
+            <a:ext cx="3566160" cy="457200"/>
+          </a:xfrm>
+          <a:prstGeom prst="rect">
+            <a:avLst/>
+          </a:prstGeom>
+          <a:noFill/>
+          <a:ln/>
+        </p:spPr>
+        <p:txBody>
+          <a:bodyPr wrap="square" lIns="0" tIns="0" rIns="0" bIns="0" rtlCol="0" anchor="ctr"/>
+          <a:lstStyle/>
+          <a:p>
+            <a:pPr indent="0" marL="0">
+              <a:buNone/>
+            </a:pPr>
+            <a:r>
+              <a:rPr lang="en-US" sz="1450" dirty="0">
                 <a:solidFill>
                   <a:srgbClr val="24313F"/>
                 </a:solidFill>
@@ -5094,22 +7152,22 @@
                 <a:ea typeface="Georgia" pitchFamily="34" charset="-122"/>
                 <a:cs typeface="Georgia" pitchFamily="34" charset="-120"/>
               </a:rPr>
-              <a:t>Company and connection: characters as friends, shared talk with real ones.</a:t>
-            </a:r>
-            <a:endParaRPr lang="en-US" sz="1500" dirty="0"/>
-          </a:p>
-        </p:txBody>
-      </p:sp>
-      <p:sp>
-        <p:nvSpPr>
-          <p:cNvPr id="12" name="Text 10"/>
-          <p:cNvSpPr/>
-          <p:nvPr/>
-        </p:nvSpPr>
-        <p:spPr>
-          <a:xfrm>
-            <a:off x="822960" y="4114800"/>
-            <a:ext cx="914400" cy="548640"/>
+              <a:t>The Cage</a:t>
+            </a:r>
+            <a:endParaRPr lang="en-US" sz="1450" dirty="0"/>
+          </a:p>
+        </p:txBody>
+      </p:sp>
+      <p:sp>
+        <p:nvSpPr>
+          <p:cNvPr id="27" name="Text 25"/>
+          <p:cNvSpPr/>
+          <p:nvPr/>
+        </p:nvSpPr>
+        <p:spPr>
+          <a:xfrm>
+            <a:off x="4434840" y="4206240"/>
+            <a:ext cx="1234440" cy="457200"/>
           </a:xfrm>
           <a:prstGeom prst="rect">
             <a:avLst/>
@@ -5125,30 +7183,128 @@
               <a:buNone/>
             </a:pPr>
             <a:r>
-              <a:rPr lang="en-US" sz="3000" dirty="0">
-                <a:solidFill>
-                  <a:srgbClr val="A3C1AD"/>
+              <a:rPr lang="en-US" sz="1050" dirty="0">
+                <a:solidFill>
+                  <a:srgbClr val="7A7F72"/>
+                </a:solidFill>
+                <a:latin typeface="Arial" pitchFamily="34" charset="0"/>
+                <a:ea typeface="Arial" pitchFamily="34" charset="-122"/>
+                <a:cs typeface="Arial" pitchFamily="34" charset="-120"/>
+              </a:rPr>
+              <a:t>BBC One</a:t>
+            </a:r>
+            <a:endParaRPr lang="en-US" sz="1050" dirty="0"/>
+          </a:p>
+        </p:txBody>
+      </p:sp>
+      <p:sp>
+        <p:nvSpPr>
+          <p:cNvPr id="28" name="Shape 26"/>
+          <p:cNvSpPr/>
+          <p:nvPr/>
+        </p:nvSpPr>
+        <p:spPr>
+          <a:xfrm>
+            <a:off x="5760720" y="4270248"/>
+            <a:ext cx="2501798" cy="329184"/>
+          </a:xfrm>
+          <a:prstGeom prst="rect">
+            <a:avLst/>
+          </a:prstGeom>
+          <a:solidFill>
+            <a:srgbClr val="4A6B5D"/>
+          </a:solidFill>
+          <a:ln/>
+        </p:spPr>
+      </p:sp>
+      <p:sp>
+        <p:nvSpPr>
+          <p:cNvPr id="29" name="Text 27"/>
+          <p:cNvSpPr/>
+          <p:nvPr/>
+        </p:nvSpPr>
+        <p:spPr>
+          <a:xfrm>
+            <a:off x="8308238" y="4206240"/>
+            <a:ext cx="914400" cy="457200"/>
+          </a:xfrm>
+          <a:prstGeom prst="rect">
+            <a:avLst/>
+          </a:prstGeom>
+          <a:noFill/>
+          <a:ln/>
+        </p:spPr>
+        <p:txBody>
+          <a:bodyPr wrap="square" lIns="0" tIns="0" rIns="0" bIns="0" rtlCol="0" anchor="ctr"/>
+          <a:lstStyle/>
+          <a:p>
+            <a:pPr indent="0" marL="0">
+              <a:buNone/>
+            </a:pPr>
+            <a:r>
+              <a:rPr lang="en-US" sz="1100" dirty="0">
+                <a:solidFill>
+                  <a:srgbClr val="7A7F72"/>
+                </a:solidFill>
+                <a:latin typeface="Arial" pitchFamily="34" charset="0"/>
+                <a:ea typeface="Arial" pitchFamily="34" charset="-122"/>
+                <a:cs typeface="Arial" pitchFamily="34" charset="-120"/>
+              </a:rPr>
+              <a:t>3.04m</a:t>
+            </a:r>
+            <a:endParaRPr lang="en-US" sz="1100" dirty="0"/>
+          </a:p>
+        </p:txBody>
+      </p:sp>
+      <p:sp>
+        <p:nvSpPr>
+          <p:cNvPr id="30" name="Text 28"/>
+          <p:cNvSpPr/>
+          <p:nvPr/>
+        </p:nvSpPr>
+        <p:spPr>
+          <a:xfrm>
+            <a:off x="822960" y="4718304"/>
+            <a:ext cx="3566160" cy="457200"/>
+          </a:xfrm>
+          <a:prstGeom prst="rect">
+            <a:avLst/>
+          </a:prstGeom>
+          <a:noFill/>
+          <a:ln/>
+        </p:spPr>
+        <p:txBody>
+          <a:bodyPr wrap="square" lIns="0" tIns="0" rIns="0" bIns="0" rtlCol="0" anchor="ctr"/>
+          <a:lstStyle/>
+          <a:p>
+            <a:pPr indent="0" marL="0">
+              <a:buNone/>
+            </a:pPr>
+            <a:r>
+              <a:rPr lang="en-US" sz="1450" dirty="0">
+                <a:solidFill>
+                  <a:srgbClr val="24313F"/>
                 </a:solidFill>
                 <a:latin typeface="Georgia" pitchFamily="34" charset="0"/>
                 <a:ea typeface="Georgia" pitchFamily="34" charset="-122"/>
                 <a:cs typeface="Georgia" pitchFamily="34" charset="-120"/>
               </a:rPr>
-              <a:t>03</a:t>
-            </a:r>
-            <a:endParaRPr lang="en-US" sz="3000" dirty="0"/>
-          </a:p>
-        </p:txBody>
-      </p:sp>
-      <p:sp>
-        <p:nvSpPr>
-          <p:cNvPr id="13" name="Text 11"/>
-          <p:cNvSpPr/>
-          <p:nvPr/>
-        </p:nvSpPr>
-        <p:spPr>
-          <a:xfrm>
-            <a:off x="1737360" y="4133088"/>
-            <a:ext cx="4082796" cy="457200"/>
+              <a:t>Secret Service</a:t>
+            </a:r>
+            <a:endParaRPr lang="en-US" sz="1450" dirty="0"/>
+          </a:p>
+        </p:txBody>
+      </p:sp>
+      <p:sp>
+        <p:nvSpPr>
+          <p:cNvPr id="31" name="Text 29"/>
+          <p:cNvSpPr/>
+          <p:nvPr/>
+        </p:nvSpPr>
+        <p:spPr>
+          <a:xfrm>
+            <a:off x="4434840" y="4718304"/>
+            <a:ext cx="1234440" cy="457200"/>
           </a:xfrm>
           <a:prstGeom prst="rect">
             <a:avLst/>
@@ -5164,30 +7320,112 @@
               <a:buNone/>
             </a:pPr>
             <a:r>
-              <a:rPr lang="en-US" sz="2200" dirty="0">
-                <a:solidFill>
-                  <a:srgbClr val="4A6B5D"/>
-                </a:solidFill>
-                <a:latin typeface="Georgia" pitchFamily="34" charset="0"/>
-                <a:ea typeface="Georgia" pitchFamily="34" charset="-122"/>
-                <a:cs typeface="Georgia" pitchFamily="34" charset="-120"/>
-              </a:rPr>
-              <a:t>Personal identity</a:t>
-            </a:r>
-            <a:endParaRPr lang="en-US" sz="2200" dirty="0"/>
-          </a:p>
-        </p:txBody>
-      </p:sp>
-      <p:sp>
-        <p:nvSpPr>
-          <p:cNvPr id="14" name="Text 12"/>
-          <p:cNvSpPr/>
-          <p:nvPr/>
-        </p:nvSpPr>
-        <p:spPr>
-          <a:xfrm>
-            <a:off x="1737360" y="4663440"/>
-            <a:ext cx="4082796" cy="1188720"/>
+              <a:rPr lang="en-US" sz="1050" dirty="0">
+                <a:solidFill>
+                  <a:srgbClr val="7A7F72"/>
+                </a:solidFill>
+                <a:latin typeface="Arial" pitchFamily="34" charset="0"/>
+                <a:ea typeface="Arial" pitchFamily="34" charset="-122"/>
+                <a:cs typeface="Arial" pitchFamily="34" charset="-120"/>
+              </a:rPr>
+              <a:t>ITV1</a:t>
+            </a:r>
+            <a:endParaRPr lang="en-US" sz="1050" dirty="0"/>
+          </a:p>
+        </p:txBody>
+      </p:sp>
+      <p:sp>
+        <p:nvSpPr>
+          <p:cNvPr id="32" name="Shape 30"/>
+          <p:cNvSpPr/>
+          <p:nvPr/>
+        </p:nvSpPr>
+        <p:spPr>
+          <a:xfrm>
+            <a:off x="5760720" y="4782312"/>
+            <a:ext cx="2501798" cy="329184"/>
+          </a:xfrm>
+          <a:prstGeom prst="rect">
+            <a:avLst/>
+          </a:prstGeom>
+          <a:solidFill>
+            <a:srgbClr val="8C3A38"/>
+          </a:solidFill>
+          <a:ln/>
+        </p:spPr>
+      </p:sp>
+      <p:sp>
+        <p:nvSpPr>
+          <p:cNvPr id="33" name="Text 31"/>
+          <p:cNvSpPr/>
+          <p:nvPr/>
+        </p:nvSpPr>
+        <p:spPr>
+          <a:xfrm>
+            <a:off x="8308238" y="4718304"/>
+            <a:ext cx="914400" cy="457200"/>
+          </a:xfrm>
+          <a:prstGeom prst="rect">
+            <a:avLst/>
+          </a:prstGeom>
+          <a:noFill/>
+          <a:ln/>
+        </p:spPr>
+        <p:txBody>
+          <a:bodyPr wrap="square" lIns="0" tIns="0" rIns="0" bIns="0" rtlCol="0" anchor="ctr"/>
+          <a:lstStyle/>
+          <a:p>
+            <a:pPr indent="0" marL="0">
+              <a:buNone/>
+            </a:pPr>
+            <a:r>
+              <a:rPr lang="en-US" sz="1100" dirty="0">
+                <a:solidFill>
+                  <a:srgbClr val="7A7F72"/>
+                </a:solidFill>
+                <a:latin typeface="Arial" pitchFamily="34" charset="0"/>
+                <a:ea typeface="Arial" pitchFamily="34" charset="-122"/>
+                <a:cs typeface="Arial" pitchFamily="34" charset="-120"/>
+              </a:rPr>
+              <a:t>3.04m</a:t>
+            </a:r>
+            <a:endParaRPr lang="en-US" sz="1100" dirty="0"/>
+          </a:p>
+        </p:txBody>
+      </p:sp>
+      <p:sp>
+        <p:nvSpPr>
+          <p:cNvPr id="34" name="Shape 32"/>
+          <p:cNvSpPr/>
+          <p:nvPr/>
+        </p:nvSpPr>
+        <p:spPr>
+          <a:xfrm>
+            <a:off x="822960" y="5367528"/>
+            <a:ext cx="914400" cy="0"/>
+          </a:xfrm>
+          <a:prstGeom prst="line">
+            <a:avLst/>
+          </a:prstGeom>
+          <a:noFill/>
+          <a:ln w="31750">
+            <a:solidFill>
+              <a:srgbClr val="8C3A38"/>
+            </a:solidFill>
+            <a:prstDash val="solid"/>
+          </a:ln>
+        </p:spPr>
+      </p:sp>
+      <p:sp>
+        <p:nvSpPr>
+          <p:cNvPr id="35" name="Text 33"/>
+          <p:cNvSpPr/>
+          <p:nvPr/>
+        </p:nvSpPr>
+        <p:spPr>
+          <a:xfrm>
+            <a:off x="822960" y="5504688"/>
+            <a:ext cx="10543032" cy="594360"/>
           </a:xfrm>
           <a:prstGeom prst="rect">
             <a:avLst/>
@@ -5201,148 +7439,28 @@
           <a:p>
             <a:pPr indent="0" marL="0">
               <a:lnSpc>
-                <a:spcPts val="2000"/>
+                <a:spcPts val="1600"/>
               </a:lnSpc>
               <a:buNone/>
             </a:pPr>
             <a:r>
-              <a:rPr lang="en-US" sz="1500" dirty="0">
-                <a:solidFill>
-                  <a:srgbClr val="24313F"/>
-                </a:solidFill>
-                <a:latin typeface="Georgia" pitchFamily="34" charset="0"/>
-                <a:ea typeface="Georgia" pitchFamily="34" charset="-122"/>
-                <a:cs typeface="Georgia" pitchFamily="34" charset="-120"/>
-              </a:rPr>
-              <a:t>A mirror: comparing your own life and values against what you watch.</a:t>
-            </a:r>
-            <a:endParaRPr lang="en-US" sz="1500" dirty="0"/>
-          </a:p>
-        </p:txBody>
-      </p:sp>
-      <p:sp>
-        <p:nvSpPr>
-          <p:cNvPr id="15" name="Text 13"/>
-          <p:cNvSpPr/>
-          <p:nvPr/>
-        </p:nvSpPr>
-        <p:spPr>
-          <a:xfrm>
-            <a:off x="6368796" y="4114800"/>
-            <a:ext cx="914400" cy="548640"/>
-          </a:xfrm>
-          <a:prstGeom prst="rect">
-            <a:avLst/>
-          </a:prstGeom>
-          <a:noFill/>
-          <a:ln/>
-        </p:spPr>
-        <p:txBody>
-          <a:bodyPr wrap="square" lIns="0" tIns="0" rIns="0" bIns="0" rtlCol="0" anchor="ctr"/>
-          <a:lstStyle/>
-          <a:p>
-            <a:pPr indent="0" marL="0">
-              <a:buNone/>
-            </a:pPr>
-            <a:r>
-              <a:rPr lang="en-US" sz="3000" dirty="0">
-                <a:solidFill>
-                  <a:srgbClr val="A3C1AD"/>
-                </a:solidFill>
-                <a:latin typeface="Georgia" pitchFamily="34" charset="0"/>
-                <a:ea typeface="Georgia" pitchFamily="34" charset="-122"/>
-                <a:cs typeface="Georgia" pitchFamily="34" charset="-120"/>
-              </a:rPr>
-              <a:t>04</a:t>
-            </a:r>
-            <a:endParaRPr lang="en-US" sz="3000" dirty="0"/>
-          </a:p>
-        </p:txBody>
-      </p:sp>
-      <p:sp>
-        <p:nvSpPr>
-          <p:cNvPr id="16" name="Text 14"/>
-          <p:cNvSpPr/>
-          <p:nvPr/>
-        </p:nvSpPr>
-        <p:spPr>
-          <a:xfrm>
-            <a:off x="7283196" y="4133088"/>
-            <a:ext cx="4082796" cy="457200"/>
-          </a:xfrm>
-          <a:prstGeom prst="rect">
-            <a:avLst/>
-          </a:prstGeom>
-          <a:noFill/>
-          <a:ln/>
-        </p:spPr>
-        <p:txBody>
-          <a:bodyPr wrap="square" lIns="0" tIns="0" rIns="0" bIns="0" rtlCol="0" anchor="ctr"/>
-          <a:lstStyle/>
-          <a:p>
-            <a:pPr indent="0" marL="0">
-              <a:buNone/>
-            </a:pPr>
-            <a:r>
-              <a:rPr lang="en-US" sz="2200" dirty="0">
-                <a:solidFill>
-                  <a:srgbClr val="4A6B5D"/>
-                </a:solidFill>
-                <a:latin typeface="Georgia" pitchFamily="34" charset="0"/>
-                <a:ea typeface="Georgia" pitchFamily="34" charset="-122"/>
-                <a:cs typeface="Georgia" pitchFamily="34" charset="-120"/>
-              </a:rPr>
-              <a:t>Surveillance</a:t>
-            </a:r>
-            <a:endParaRPr lang="en-US" sz="2200" dirty="0"/>
-          </a:p>
-        </p:txBody>
-      </p:sp>
-      <p:sp>
-        <p:nvSpPr>
-          <p:cNvPr id="17" name="Text 15"/>
-          <p:cNvSpPr/>
-          <p:nvPr/>
-        </p:nvSpPr>
-        <p:spPr>
-          <a:xfrm>
-            <a:off x="7283196" y="4663440"/>
-            <a:ext cx="4082796" cy="1188720"/>
-          </a:xfrm>
-          <a:prstGeom prst="rect">
-            <a:avLst/>
-          </a:prstGeom>
-          <a:noFill/>
-          <a:ln/>
-        </p:spPr>
-        <p:txBody>
-          <a:bodyPr wrap="square" lIns="0" tIns="0" rIns="0" bIns="0" rtlCol="0" anchor="t"/>
-          <a:lstStyle/>
-          <a:p>
-            <a:pPr indent="0" marL="0">
-              <a:lnSpc>
-                <a:spcPts val="2000"/>
-              </a:lnSpc>
-              <a:buNone/>
-            </a:pPr>
-            <a:r>
-              <a:rPr lang="en-US" sz="1500" dirty="0">
-                <a:solidFill>
-                  <a:srgbClr val="24313F"/>
-                </a:solidFill>
-                <a:latin typeface="Georgia" pitchFamily="34" charset="0"/>
-                <a:ea typeface="Georgia" pitchFamily="34" charset="-122"/>
-                <a:cs typeface="Georgia" pitchFamily="34" charset="-120"/>
-              </a:rPr>
-              <a:t>Information: knowing what is happening, in the world and your world.</a:t>
-            </a:r>
-            <a:endParaRPr lang="en-US" sz="1500" dirty="0"/>
-          </a:p>
-        </p:txBody>
-      </p:sp>
-      <p:sp>
-        <p:nvSpPr>
-          <p:cNvPr id="18" name="Shape 16"/>
+              <a:rPr lang="en-US" sz="1200" i="1" dirty="0">
+                <a:solidFill>
+                  <a:srgbClr val="7A7F72"/>
+                </a:solidFill>
+                <a:latin typeface="Arial" pitchFamily="34" charset="0"/>
+                <a:ea typeface="Arial" pitchFamily="34" charset="-122"/>
+                <a:cs typeface="Arial" pitchFamily="34" charset="-120"/>
+              </a:rPr>
+              <a:t>Source: BARB, week 4 to 10 May 2026 (as reported by TVZone). The biggest programme of the week reached under a tenth of the country. Mass is relative; everything else on the dial is niche or target.</a:t>
+            </a:r>
+            <a:endParaRPr lang="en-US" sz="1200" dirty="0"/>
+          </a:p>
+        </p:txBody>
+      </p:sp>
+      <p:sp>
+        <p:nvSpPr>
+          <p:cNvPr id="36" name="Shape 34"/>
           <p:cNvSpPr/>
           <p:nvPr/>
         </p:nvSpPr>
@@ -5365,7 +7483,7 @@
       </p:sp>
       <p:sp>
         <p:nvSpPr>
-          <p:cNvPr id="19" name="Text 17"/>
+          <p:cNvPr id="37" name="Text 35"/>
           <p:cNvSpPr/>
           <p:nvPr/>
         </p:nvSpPr>
@@ -5404,7 +7522,7 @@
       </p:sp>
       <p:sp>
         <p:nvSpPr>
-          <p:cNvPr id="20" name="Text 18"/>
+          <p:cNvPr id="38" name="Text 36"/>
           <p:cNvSpPr/>
           <p:nvPr/>
         </p:nvSpPr>
@@ -5452,238 +7570,6 @@
 <file path=ppt/slides/slide7.xml><?xml version="1.0" encoding="utf-8"?>
 <p:sld xmlns:a="http://schemas.openxmlformats.org/drawingml/2006/main" xmlns:r="http://schemas.openxmlformats.org/officeDocument/2006/relationships" xmlns:p="http://schemas.openxmlformats.org/presentationml/2006/main">
   <p:cSld name="Slide 7">
-    <p:spTree>
-      <p:nvGrpSpPr>
-        <p:cNvPr id="1" name=""/>
-        <p:cNvGrpSpPr/>
-        <p:nvPr/>
-      </p:nvGrpSpPr>
-      <p:grpSpPr>
-        <a:xfrm>
-          <a:off x="0" y="0"/>
-          <a:ext cx="0" cy="0"/>
-          <a:chOff x="0" y="0"/>
-          <a:chExt cx="0" cy="0"/>
-        </a:xfrm>
-      </p:grpSpPr>
-      <p:pic>
-        <p:nvPicPr>
-          <p:cNvPr id="2" name="Image 0" descr="/Users/dogan/Documents/Vaults/Courses/wiki/classes/media-studies/decks/_build/img/crops/daumier-drama_a1777.jpg">    </p:cNvPr>
-          <p:cNvPicPr>
-            <a:picLocks noChangeAspect="1"/>
-          </p:cNvPicPr>
-          <p:nvPr/>
-        </p:nvPicPr>
-        <p:blipFill>
-          <a:blip r:embed="rId1"/>
-          <a:stretch>
-            <a:fillRect/>
-          </a:stretch>
-        </p:blipFill>
-        <p:spPr>
-          <a:xfrm>
-            <a:off x="0" y="0"/>
-            <a:ext cx="12188952" cy="6858000"/>
-          </a:xfrm>
-          <a:prstGeom prst="rect">
-            <a:avLst/>
-          </a:prstGeom>
-        </p:spPr>
-      </p:pic>
-      <p:sp>
-        <p:nvSpPr>
-          <p:cNvPr id="3" name="Shape 0"/>
-          <p:cNvSpPr/>
-          <p:nvPr/>
-        </p:nvSpPr>
-        <p:spPr>
-          <a:xfrm>
-            <a:off x="502920" y="502920"/>
-            <a:ext cx="5120640" cy="502920"/>
-          </a:xfrm>
-          <a:prstGeom prst="rect">
-            <a:avLst/>
-          </a:prstGeom>
-          <a:solidFill>
-            <a:srgbClr val="FAF8F1"/>
-          </a:solidFill>
-          <a:ln/>
-        </p:spPr>
-      </p:sp>
-      <p:sp>
-        <p:nvSpPr>
-          <p:cNvPr id="4" name="Text 1"/>
-          <p:cNvSpPr/>
-          <p:nvPr/>
-        </p:nvSpPr>
-        <p:spPr>
-          <a:xfrm>
-            <a:off x="704088" y="521208"/>
-            <a:ext cx="4846320" cy="274320"/>
-          </a:xfrm>
-          <a:prstGeom prst="rect">
-            <a:avLst/>
-          </a:prstGeom>
-          <a:noFill/>
-          <a:ln/>
-        </p:spPr>
-        <p:txBody>
-          <a:bodyPr wrap="square" lIns="0" tIns="0" rIns="0" bIns="0" rtlCol="0" anchor="ctr"/>
-          <a:lstStyle/>
-          <a:p>
-            <a:pPr algn="l" indent="0" marL="0">
-              <a:buNone/>
-            </a:pPr>
-            <a:r>
-              <a:rPr lang="en-US" sz="1100" b="1" spc="250" kern="0" dirty="0">
-                <a:solidFill>
-                  <a:srgbClr val="4A6B5D"/>
-                </a:solidFill>
-                <a:latin typeface="Arial" pitchFamily="34" charset="0"/>
-                <a:ea typeface="Arial" pitchFamily="34" charset="-122"/>
-                <a:cs typeface="Arial" pitchFamily="34" charset="-120"/>
-              </a:rPr>
-              <a:t>THE ACTIVE AUDIENCE</a:t>
-            </a:r>
-            <a:endParaRPr lang="en-US" sz="1100" dirty="0"/>
-          </a:p>
-        </p:txBody>
-      </p:sp>
-      <p:sp>
-        <p:nvSpPr>
-          <p:cNvPr id="5" name="Shape 2"/>
-          <p:cNvSpPr/>
-          <p:nvPr/>
-        </p:nvSpPr>
-        <p:spPr>
-          <a:xfrm>
-            <a:off x="457200" y="5230368"/>
-            <a:ext cx="8778240" cy="1243584"/>
-          </a:xfrm>
-          <a:prstGeom prst="rect">
-            <a:avLst/>
-          </a:prstGeom>
-          <a:solidFill>
-            <a:srgbClr val="FAF8F1"/>
-          </a:solidFill>
-          <a:ln/>
-        </p:spPr>
-      </p:sp>
-      <p:sp>
-        <p:nvSpPr>
-          <p:cNvPr id="6" name="Shape 3"/>
-          <p:cNvSpPr/>
-          <p:nvPr/>
-        </p:nvSpPr>
-        <p:spPr>
-          <a:xfrm>
-            <a:off x="676656" y="5468112"/>
-            <a:ext cx="731520" cy="0"/>
-          </a:xfrm>
-          <a:prstGeom prst="line">
-            <a:avLst/>
-          </a:prstGeom>
-          <a:noFill/>
-          <a:ln w="28575">
-            <a:solidFill>
-              <a:srgbClr val="8C3A38"/>
-            </a:solidFill>
-            <a:prstDash val="solid"/>
-          </a:ln>
-        </p:spPr>
-      </p:sp>
-      <p:sp>
-        <p:nvSpPr>
-          <p:cNvPr id="7" name="Text 4"/>
-          <p:cNvSpPr/>
-          <p:nvPr/>
-        </p:nvSpPr>
-        <p:spPr>
-          <a:xfrm>
-            <a:off x="676656" y="5541264"/>
-            <a:ext cx="8339328" cy="585216"/>
-          </a:xfrm>
-          <a:prstGeom prst="rect">
-            <a:avLst/>
-          </a:prstGeom>
-          <a:noFill/>
-          <a:ln/>
-        </p:spPr>
-        <p:txBody>
-          <a:bodyPr wrap="square" lIns="0" tIns="0" rIns="0" bIns="0" rtlCol="0" anchor="t"/>
-          <a:lstStyle/>
-          <a:p>
-            <a:pPr indent="0" marL="0">
-              <a:lnSpc>
-                <a:spcPts val="2200"/>
-              </a:lnSpc>
-              <a:buNone/>
-            </a:pPr>
-            <a:r>
-              <a:rPr lang="en-US" sz="1800" dirty="0">
-                <a:solidFill>
-                  <a:srgbClr val="24313F"/>
-                </a:solidFill>
-                <a:latin typeface="Georgia" pitchFamily="34" charset="0"/>
-                <a:ea typeface="Georgia" pitchFamily="34" charset="-122"/>
-                <a:cs typeface="Georgia" pitchFamily="34" charset="-120"/>
-              </a:rPr>
-              <a:t>Leaning in, gripped, doing work: an audience is never a blank surface being written on.</a:t>
-            </a:r>
-            <a:endParaRPr lang="en-US" sz="1800" dirty="0"/>
-          </a:p>
-        </p:txBody>
-      </p:sp>
-      <p:sp>
-        <p:nvSpPr>
-          <p:cNvPr id="8" name="Text 5"/>
-          <p:cNvSpPr/>
-          <p:nvPr/>
-        </p:nvSpPr>
-        <p:spPr>
-          <a:xfrm>
-            <a:off x="676656" y="6181344"/>
-            <a:ext cx="8339328" cy="256032"/>
-          </a:xfrm>
-          <a:prstGeom prst="rect">
-            <a:avLst/>
-          </a:prstGeom>
-          <a:noFill/>
-          <a:ln/>
-        </p:spPr>
-        <p:txBody>
-          <a:bodyPr wrap="square" lIns="0" tIns="0" rIns="0" bIns="0" rtlCol="0" anchor="ctr"/>
-          <a:lstStyle/>
-          <a:p>
-            <a:pPr indent="0" marL="0">
-              <a:buNone/>
-            </a:pPr>
-            <a:r>
-              <a:rPr lang="en-US" sz="950" spc="50" kern="0" dirty="0">
-                <a:solidFill>
-                  <a:srgbClr val="7A7F72"/>
-                </a:solidFill>
-                <a:latin typeface="Arial" pitchFamily="34" charset="0"/>
-                <a:ea typeface="Arial" pitchFamily="34" charset="-122"/>
-                <a:cs typeface="Arial" pitchFamily="34" charset="-120"/>
-              </a:rPr>
-              <a:t>Honore Daumier, The Drama, c. 1860</a:t>
-            </a:r>
-            <a:endParaRPr lang="en-US" sz="950" dirty="0"/>
-          </a:p>
-        </p:txBody>
-      </p:sp>
-    </p:spTree>
-  </p:cSld>
-  <p:clrMapOvr>
-    <a:masterClrMapping/>
-  </p:clrMapOvr>
-</p:sld>
-</file>
-
-<file path=ppt/slides/slide8.xml><?xml version="1.0" encoding="utf-8"?>
-<p:sld xmlns:a="http://schemas.openxmlformats.org/drawingml/2006/main" xmlns:r="http://schemas.openxmlformats.org/officeDocument/2006/relationships" xmlns:p="http://schemas.openxmlformats.org/presentationml/2006/main">
-  <p:cSld name="Slide 8">
     <p:bg>
       <p:bgPr>
         <a:solidFill>
@@ -5705,9 +7591,174 @@
           <a:chExt cx="0" cy="0"/>
         </a:xfrm>
       </p:grpSpPr>
+      <p:sp>
+        <p:nvSpPr>
+          <p:cNvPr id="2" name="Text 0"/>
+          <p:cNvSpPr/>
+          <p:nvPr/>
+        </p:nvSpPr>
+        <p:spPr>
+          <a:xfrm>
+            <a:off x="822960" y="457200"/>
+            <a:ext cx="6400800" cy="274320"/>
+          </a:xfrm>
+          <a:prstGeom prst="rect">
+            <a:avLst/>
+          </a:prstGeom>
+          <a:noFill/>
+          <a:ln/>
+        </p:spPr>
+        <p:txBody>
+          <a:bodyPr wrap="square" lIns="0" tIns="0" rIns="0" bIns="0" rtlCol="0" anchor="ctr"/>
+          <a:lstStyle/>
+          <a:p>
+            <a:pPr algn="l" indent="0" marL="0">
+              <a:buNone/>
+            </a:pPr>
+            <a:r>
+              <a:rPr lang="en-US" sz="1100" b="1" spc="250" kern="0" dirty="0">
+                <a:solidFill>
+                  <a:srgbClr val="4A6B5D"/>
+                </a:solidFill>
+                <a:latin typeface="Arial" pitchFamily="34" charset="0"/>
+                <a:ea typeface="Arial" pitchFamily="34" charset="-122"/>
+                <a:cs typeface="Arial" pitchFamily="34" charset="-120"/>
+              </a:rPr>
+              <a:t>BLUMLER AND KATZ · USES AND GRATIFICATIONS</a:t>
+            </a:r>
+            <a:endParaRPr lang="en-US" sz="1100" dirty="0"/>
+          </a:p>
+        </p:txBody>
+      </p:sp>
+      <p:sp>
+        <p:nvSpPr>
+          <p:cNvPr id="3" name="Text 1"/>
+          <p:cNvSpPr/>
+          <p:nvPr/>
+        </p:nvSpPr>
+        <p:spPr>
+          <a:xfrm>
+            <a:off x="6793992" y="457200"/>
+            <a:ext cx="4572000" cy="274320"/>
+          </a:xfrm>
+          <a:prstGeom prst="rect">
+            <a:avLst/>
+          </a:prstGeom>
+          <a:noFill/>
+          <a:ln/>
+        </p:spPr>
+        <p:txBody>
+          <a:bodyPr wrap="square" lIns="0" tIns="0" rIns="0" bIns="0" rtlCol="0" anchor="ctr"/>
+          <a:lstStyle/>
+          <a:p>
+            <a:pPr algn="r" indent="0" marL="0">
+              <a:buNone/>
+            </a:pPr>
+            <a:r>
+              <a:rPr lang="en-US" sz="1100" b="1" spc="250" kern="0" dirty="0">
+                <a:solidFill>
+                  <a:srgbClr val="7A7F72"/>
+                </a:solidFill>
+                <a:latin typeface="Arial" pitchFamily="34" charset="0"/>
+                <a:ea typeface="Arial" pitchFamily="34" charset="-122"/>
+                <a:cs typeface="Arial" pitchFamily="34" charset="-120"/>
+              </a:rPr>
+              <a:t>AUDIENCES AS ACTIVE CHOOSERS</a:t>
+            </a:r>
+            <a:endParaRPr lang="en-US" sz="1100" dirty="0"/>
+          </a:p>
+        </p:txBody>
+      </p:sp>
+      <p:sp>
+        <p:nvSpPr>
+          <p:cNvPr id="4" name="Shape 2"/>
+          <p:cNvSpPr/>
+          <p:nvPr/>
+        </p:nvSpPr>
+        <p:spPr>
+          <a:xfrm>
+            <a:off x="822960" y="786384"/>
+            <a:ext cx="10543032" cy="0"/>
+          </a:xfrm>
+          <a:prstGeom prst="line">
+            <a:avLst/>
+          </a:prstGeom>
+          <a:noFill/>
+          <a:ln w="9525">
+            <a:solidFill>
+              <a:srgbClr val="D9D4C4"/>
+            </a:solidFill>
+            <a:prstDash val="solid"/>
+          </a:ln>
+        </p:spPr>
+      </p:sp>
+      <p:sp>
+        <p:nvSpPr>
+          <p:cNvPr id="5" name="Text 3"/>
+          <p:cNvSpPr/>
+          <p:nvPr/>
+        </p:nvSpPr>
+        <p:spPr>
+          <a:xfrm>
+            <a:off x="822960" y="914400"/>
+            <a:ext cx="10543032" cy="548640"/>
+          </a:xfrm>
+          <a:prstGeom prst="rect">
+            <a:avLst/>
+          </a:prstGeom>
+          <a:noFill/>
+          <a:ln/>
+        </p:spPr>
+        <p:txBody>
+          <a:bodyPr wrap="square" lIns="0" tIns="0" rIns="0" bIns="0" rtlCol="0" anchor="ctr"/>
+          <a:lstStyle/>
+          <a:p>
+            <a:pPr indent="0" marL="0">
+              <a:buNone/>
+            </a:pPr>
+            <a:r>
+              <a:rPr lang="en-US" sz="3000" dirty="0">
+                <a:solidFill>
+                  <a:srgbClr val="24313F"/>
+                </a:solidFill>
+                <a:latin typeface="Georgia" pitchFamily="34" charset="0"/>
+                <a:ea typeface="Georgia" pitchFamily="34" charset="-122"/>
+                <a:cs typeface="Georgia" pitchFamily="34" charset="-120"/>
+              </a:rPr>
+              <a:t>Four jobs we need media to do</a:t>
+            </a:r>
+            <a:endParaRPr lang="en-US" sz="3000" dirty="0"/>
+          </a:p>
+        </p:txBody>
+      </p:sp>
+      <p:sp>
+        <p:nvSpPr>
+          <p:cNvPr id="6" name="Shape 4"/>
+          <p:cNvSpPr/>
+          <p:nvPr/>
+        </p:nvSpPr>
+        <p:spPr>
+          <a:xfrm>
+            <a:off x="822960" y="1600200"/>
+            <a:ext cx="2377440" cy="2084832"/>
+          </a:xfrm>
+          <a:prstGeom prst="rect">
+            <a:avLst/>
+          </a:prstGeom>
+          <a:solidFill>
+            <a:srgbClr val="FAF8F1"/>
+          </a:solidFill>
+          <a:ln w="9525">
+            <a:solidFill>
+              <a:srgbClr val="D9D4C4"/>
+            </a:solidFill>
+            <a:prstDash val="solid"/>
+          </a:ln>
+        </p:spPr>
+      </p:sp>
       <p:pic>
         <p:nvPicPr>
-          <p:cNvPr id="2" name="Image 0" descr="/Users/dogan/Documents/Vaults/Courses/wiki/classes/media-studies/decks/_build/img/crops/manet-good-beer_a664.jpg">    </p:cNvPr>
+          <p:cNvPr id="7" name="Image 0" descr="/Users/dogan/Documents/Vaults/Courses/wiki/classes/media-studies/decks/_build/img/grat-diversion.jpg">    </p:cNvPr>
           <p:cNvPicPr>
             <a:picLocks noChangeAspect="1"/>
           </p:cNvPicPr>
@@ -5721,8 +7772,8 @@
         </p:blipFill>
         <p:spPr>
           <a:xfrm>
-            <a:off x="7635240" y="0"/>
-            <a:ext cx="4553712" cy="6858000"/>
+            <a:off x="914400" y="2025396"/>
+            <a:ext cx="2194560" cy="1234440"/>
           </a:xfrm>
           <a:prstGeom prst="rect">
             <a:avLst/>
@@ -5731,14 +7782,95 @@
       </p:pic>
       <p:sp>
         <p:nvSpPr>
-          <p:cNvPr id="3" name="Text 0"/>
-          <p:cNvSpPr/>
-          <p:nvPr/>
-        </p:nvSpPr>
-        <p:spPr>
-          <a:xfrm>
-            <a:off x="7818120" y="6126480"/>
-            <a:ext cx="4187952" cy="365760"/>
+          <p:cNvPr id="8" name="Text 5"/>
+          <p:cNvSpPr/>
+          <p:nvPr/>
+        </p:nvSpPr>
+        <p:spPr>
+          <a:xfrm>
+            <a:off x="3337560" y="1691640"/>
+            <a:ext cx="2482596" cy="457200"/>
+          </a:xfrm>
+          <a:prstGeom prst="rect">
+            <a:avLst/>
+          </a:prstGeom>
+          <a:noFill/>
+          <a:ln/>
+        </p:spPr>
+        <p:txBody>
+          <a:bodyPr wrap="square" lIns="0" tIns="0" rIns="0" bIns="0" rtlCol="0" anchor="ctr"/>
+          <a:lstStyle/>
+          <a:p>
+            <a:pPr indent="0" marL="0">
+              <a:buNone/>
+            </a:pPr>
+            <a:r>
+              <a:rPr lang="en-US" sz="1900" dirty="0">
+                <a:solidFill>
+                  <a:srgbClr val="4A6B5D"/>
+                </a:solidFill>
+                <a:latin typeface="Georgia" pitchFamily="34" charset="0"/>
+                <a:ea typeface="Georgia" pitchFamily="34" charset="-122"/>
+                <a:cs typeface="Georgia" pitchFamily="34" charset="-120"/>
+              </a:rPr>
+              <a:t>Diversion</a:t>
+            </a:r>
+            <a:endParaRPr lang="en-US" sz="1900" dirty="0"/>
+          </a:p>
+        </p:txBody>
+      </p:sp>
+      <p:sp>
+        <p:nvSpPr>
+          <p:cNvPr id="9" name="Text 6"/>
+          <p:cNvSpPr/>
+          <p:nvPr/>
+        </p:nvSpPr>
+        <p:spPr>
+          <a:xfrm>
+            <a:off x="3337560" y="2167128"/>
+            <a:ext cx="2482596" cy="1417320"/>
+          </a:xfrm>
+          <a:prstGeom prst="rect">
+            <a:avLst/>
+          </a:prstGeom>
+          <a:noFill/>
+          <a:ln/>
+        </p:spPr>
+        <p:txBody>
+          <a:bodyPr wrap="square" lIns="0" tIns="0" rIns="0" bIns="0" rtlCol="0" anchor="t"/>
+          <a:lstStyle/>
+          <a:p>
+            <a:pPr indent="0" marL="0">
+              <a:lnSpc>
+                <a:spcPts val="1800"/>
+              </a:lnSpc>
+              <a:buNone/>
+            </a:pPr>
+            <a:r>
+              <a:rPr lang="en-US" sz="1350" dirty="0">
+                <a:solidFill>
+                  <a:srgbClr val="24313F"/>
+                </a:solidFill>
+                <a:latin typeface="Georgia" pitchFamily="34" charset="0"/>
+                <a:ea typeface="Georgia" pitchFamily="34" charset="-122"/>
+                <a:cs typeface="Georgia" pitchFamily="34" charset="-120"/>
+              </a:rPr>
+              <a:t>Escape and release: from routine, from problems, into feeling.</a:t>
+            </a:r>
+            <a:endParaRPr lang="en-US" sz="1350" dirty="0"/>
+          </a:p>
+        </p:txBody>
+      </p:sp>
+      <p:sp>
+        <p:nvSpPr>
+          <p:cNvPr id="10" name="Shape 7"/>
+          <p:cNvSpPr/>
+          <p:nvPr/>
+        </p:nvSpPr>
+        <p:spPr>
+          <a:xfrm>
+            <a:off x="6368796" y="1600200"/>
+            <a:ext cx="2377440" cy="2084832"/>
           </a:xfrm>
           <a:prstGeom prst="rect">
             <a:avLst/>
@@ -5746,84 +7878,6 @@
           <a:solidFill>
             <a:srgbClr val="FAF8F1"/>
           </a:solidFill>
-          <a:ln/>
-        </p:spPr>
-        <p:txBody>
-          <a:bodyPr wrap="square" lIns="0" tIns="0" rIns="0" bIns="0" rtlCol="0" anchor="ctr"/>
-          <a:lstStyle/>
-          <a:p>
-            <a:pPr indent="0" marL="0">
-              <a:buNone/>
-            </a:pPr>
-            <a:r>
-              <a:rPr lang="en-US" sz="950" spc="50" kern="0" dirty="0">
-                <a:solidFill>
-                  <a:srgbClr val="7A7F72"/>
-                </a:solidFill>
-                <a:latin typeface="Arial" pitchFamily="34" charset="0"/>
-                <a:ea typeface="Arial" pitchFamily="34" charset="-122"/>
-                <a:cs typeface="Arial" pitchFamily="34" charset="-120"/>
-              </a:rPr>
-              <a:t>Edouard Manet, A Good Glass of Beer, 1873</a:t>
-            </a:r>
-            <a:endParaRPr lang="en-US" sz="950" dirty="0"/>
-          </a:p>
-        </p:txBody>
-      </p:sp>
-      <p:sp>
-        <p:nvSpPr>
-          <p:cNvPr id="4" name="Text 1"/>
-          <p:cNvSpPr/>
-          <p:nvPr/>
-        </p:nvSpPr>
-        <p:spPr>
-          <a:xfrm>
-            <a:off x="822960" y="685800"/>
-            <a:ext cx="5486400" cy="274320"/>
-          </a:xfrm>
-          <a:prstGeom prst="rect">
-            <a:avLst/>
-          </a:prstGeom>
-          <a:noFill/>
-          <a:ln/>
-        </p:spPr>
-        <p:txBody>
-          <a:bodyPr wrap="square" lIns="0" tIns="0" rIns="0" bIns="0" rtlCol="0" anchor="ctr"/>
-          <a:lstStyle/>
-          <a:p>
-            <a:pPr algn="l" indent="0" marL="0">
-              <a:buNone/>
-            </a:pPr>
-            <a:r>
-              <a:rPr lang="en-US" sz="1100" b="1" spc="250" kern="0" dirty="0">
-                <a:solidFill>
-                  <a:srgbClr val="4A6B5D"/>
-                </a:solidFill>
-                <a:latin typeface="Arial" pitchFamily="34" charset="0"/>
-                <a:ea typeface="Arial" pitchFamily="34" charset="-122"/>
-                <a:cs typeface="Arial" pitchFamily="34" charset="-120"/>
-              </a:rPr>
-              <a:t>THE HONEST MAP</a:t>
-            </a:r>
-            <a:endParaRPr lang="en-US" sz="1100" dirty="0"/>
-          </a:p>
-        </p:txBody>
-      </p:sp>
-      <p:sp>
-        <p:nvSpPr>
-          <p:cNvPr id="5" name="Shape 2"/>
-          <p:cNvSpPr/>
-          <p:nvPr/>
-        </p:nvSpPr>
-        <p:spPr>
-          <a:xfrm>
-            <a:off x="822960" y="1051560"/>
-            <a:ext cx="6492240" cy="0"/>
-          </a:xfrm>
-          <a:prstGeom prst="line">
-            <a:avLst/>
-          </a:prstGeom>
-          <a:noFill/>
           <a:ln w="9525">
             <a:solidFill>
               <a:srgbClr val="D9D4C4"/>
@@ -5832,55 +7886,98 @@
           </a:ln>
         </p:spPr>
       </p:sp>
-      <p:sp>
-        <p:nvSpPr>
-          <p:cNvPr id="6" name="Text 3"/>
-          <p:cNvSpPr/>
-          <p:nvPr/>
-        </p:nvSpPr>
-        <p:spPr>
-          <a:xfrm>
-            <a:off x="822960" y="1234440"/>
-            <a:ext cx="6492240" cy="1371600"/>
-          </a:xfrm>
-          <a:prstGeom prst="rect">
-            <a:avLst/>
-          </a:prstGeom>
-          <a:noFill/>
-          <a:ln/>
-        </p:spPr>
-        <p:txBody>
-          <a:bodyPr wrap="square" lIns="0" tIns="0" rIns="0" bIns="0" rtlCol="0" anchor="t"/>
-          <a:lstStyle/>
-          <a:p>
-            <a:pPr indent="0" marL="0">
-              <a:lnSpc>
-                <a:spcPts val="4200"/>
-              </a:lnSpc>
-              <a:buNone/>
-            </a:pPr>
-            <a:r>
-              <a:rPr lang="en-US" sz="4000" dirty="0">
-                <a:solidFill>
-                  <a:srgbClr val="24313F"/>
+      <p:pic>
+        <p:nvPicPr>
+          <p:cNvPr id="11" name="Image 1" descr="/Users/dogan/Documents/Vaults/Courses/wiki/classes/media-studies/decks/_build/img/grat-relation.jpg">    </p:cNvPr>
+          <p:cNvPicPr>
+            <a:picLocks noChangeAspect="1"/>
+          </p:cNvPicPr>
+          <p:nvPr/>
+        </p:nvPicPr>
+        <p:blipFill>
+          <a:blip r:embed="rId2"/>
+          <a:stretch>
+            <a:fillRect/>
+          </a:stretch>
+        </p:blipFill>
+        <p:spPr>
+          <a:xfrm>
+            <a:off x="6460236" y="1910639"/>
+            <a:ext cx="2194560" cy="1463954"/>
+          </a:xfrm>
+          <a:prstGeom prst="rect">
+            <a:avLst/>
+          </a:prstGeom>
+        </p:spPr>
+      </p:pic>
+      <p:sp>
+        <p:nvSpPr>
+          <p:cNvPr id="12" name="Text 8"/>
+          <p:cNvSpPr/>
+          <p:nvPr/>
+        </p:nvSpPr>
+        <p:spPr>
+          <a:xfrm>
+            <a:off x="8883396" y="1691640"/>
+            <a:ext cx="2482596" cy="457200"/>
+          </a:xfrm>
+          <a:prstGeom prst="rect">
+            <a:avLst/>
+          </a:prstGeom>
+          <a:noFill/>
+          <a:ln/>
+        </p:spPr>
+        <p:txBody>
+          <a:bodyPr wrap="square" lIns="0" tIns="0" rIns="0" bIns="0" rtlCol="0" anchor="ctr"/>
+          <a:lstStyle/>
+          <a:p>
+            <a:pPr indent="0" marL="0">
+              <a:buNone/>
+            </a:pPr>
+            <a:r>
+              <a:rPr lang="en-US" sz="1900" dirty="0">
+                <a:solidFill>
+                  <a:srgbClr val="4A6B5D"/>
                 </a:solidFill>
                 <a:latin typeface="Georgia" pitchFamily="34" charset="0"/>
                 <a:ea typeface="Georgia" pitchFamily="34" charset="-122"/>
                 <a:cs typeface="Georgia" pitchFamily="34" charset="-120"/>
               </a:rPr>
-              <a:t>Gratification,</a:t>
-            </a:r>
-            <a:endParaRPr lang="en-US" sz="4000" dirty="0"/>
-          </a:p>
+              <a:t>Personal relationships</a:t>
+            </a:r>
+            <a:endParaRPr lang="en-US" sz="1900" dirty="0"/>
+          </a:p>
+        </p:txBody>
+      </p:sp>
+      <p:sp>
+        <p:nvSpPr>
+          <p:cNvPr id="13" name="Text 9"/>
+          <p:cNvSpPr/>
+          <p:nvPr/>
+        </p:nvSpPr>
+        <p:spPr>
+          <a:xfrm>
+            <a:off x="8883396" y="2167128"/>
+            <a:ext cx="2482596" cy="1417320"/>
+          </a:xfrm>
+          <a:prstGeom prst="rect">
+            <a:avLst/>
+          </a:prstGeom>
+          <a:noFill/>
+          <a:ln/>
+        </p:spPr>
+        <p:txBody>
+          <a:bodyPr wrap="square" lIns="0" tIns="0" rIns="0" bIns="0" rtlCol="0" anchor="t"/>
+          <a:lstStyle/>
           <a:p>
             <a:pPr indent="0" marL="0">
               <a:lnSpc>
-                <a:spcPts val="4200"/>
+                <a:spcPts val="1800"/>
               </a:lnSpc>
               <a:buNone/>
             </a:pPr>
             <a:r>
-              <a:rPr lang="en-US" sz="4000" dirty="0">
+              <a:rPr lang="en-US" sz="1350" dirty="0">
                 <a:solidFill>
                   <a:srgbClr val="24313F"/>
                 </a:solidFill>
@@ -5888,69 +7985,29 @@
                 <a:ea typeface="Georgia" pitchFamily="34" charset="-122"/>
                 <a:cs typeface="Georgia" pitchFamily="34" charset="-120"/>
               </a:rPr>
-              <a:t>personified</a:t>
-            </a:r>
-            <a:endParaRPr lang="en-US" sz="4000" dirty="0"/>
-          </a:p>
-        </p:txBody>
-      </p:sp>
-      <p:sp>
-        <p:nvSpPr>
-          <p:cNvPr id="7" name="Text 4"/>
-          <p:cNvSpPr/>
-          <p:nvPr/>
-        </p:nvSpPr>
-        <p:spPr>
-          <a:xfrm>
-            <a:off x="822960" y="2743200"/>
-            <a:ext cx="6583680" cy="2926080"/>
-          </a:xfrm>
-          <a:prstGeom prst="rect">
-            <a:avLst/>
-          </a:prstGeom>
-          <a:noFill/>
-          <a:ln/>
-        </p:spPr>
-        <p:txBody>
-          <a:bodyPr wrap="square" lIns="0" tIns="0" rIns="0" bIns="0" rtlCol="0" anchor="t"/>
-          <a:lstStyle/>
-          <a:p>
-            <a:pPr indent="0" marL="0">
-              <a:lnSpc>
-                <a:spcPts val="2300"/>
-              </a:lnSpc>
-              <a:buNone/>
-            </a:pPr>
-            <a:r>
-              <a:rPr lang="en-US" sz="1650" dirty="0">
-                <a:solidFill>
-                  <a:srgbClr val="24313F"/>
-                </a:solidFill>
-                <a:latin typeface="Georgia" pitchFamily="34" charset="0"/>
-                <a:ea typeface="Georgia" pitchFamily="34" charset="-122"/>
-                <a:cs typeface="Georgia" pitchFamily="34" charset="-120"/>
-              </a:rPr>
-              <a:t>A man, a beer, an evening off. Diversion, painted in 1873. Map your real weekly media use onto the four gratifications, the L01 log with a theory attached. The honesty rule is absolute: the comfort re-watch and the 2 a.m. scroll are data, not confessions. Which gratification does your own C1 product serve, and how would you know?</a:t>
-            </a:r>
-            <a:endParaRPr lang="en-US" sz="1650" dirty="0"/>
-          </a:p>
-        </p:txBody>
-      </p:sp>
-      <p:sp>
-        <p:nvSpPr>
-          <p:cNvPr id="8" name="Shape 5"/>
-          <p:cNvSpPr/>
-          <p:nvPr/>
-        </p:nvSpPr>
-        <p:spPr>
-          <a:xfrm>
-            <a:off x="822960" y="6382512"/>
-            <a:ext cx="10543032" cy="0"/>
-          </a:xfrm>
-          <a:prstGeom prst="line">
-            <a:avLst/>
-          </a:prstGeom>
-          <a:noFill/>
+              <a:t>Company and connection: characters as friends, shared talk with real ones.</a:t>
+            </a:r>
+            <a:endParaRPr lang="en-US" sz="1350" dirty="0"/>
+          </a:p>
+        </p:txBody>
+      </p:sp>
+      <p:sp>
+        <p:nvSpPr>
+          <p:cNvPr id="14" name="Shape 10"/>
+          <p:cNvSpPr/>
+          <p:nvPr/>
+        </p:nvSpPr>
+        <p:spPr>
+          <a:xfrm>
+            <a:off x="822960" y="3977640"/>
+            <a:ext cx="2377440" cy="2084832"/>
+          </a:xfrm>
+          <a:prstGeom prst="rect">
+            <a:avLst/>
+          </a:prstGeom>
+          <a:solidFill>
+            <a:srgbClr val="FAF8F1"/>
+          </a:solidFill>
           <a:ln w="9525">
             <a:solidFill>
               <a:srgbClr val="D9D4C4"/>
@@ -5959,9 +8016,267 @@
           </a:ln>
         </p:spPr>
       </p:sp>
-      <p:sp>
-        <p:nvSpPr>
-          <p:cNvPr id="9" name="Text 6"/>
+      <p:pic>
+        <p:nvPicPr>
+          <p:cNvPr id="15" name="Image 2" descr="/Users/dogan/Documents/Vaults/Courses/wiki/classes/media-studies/decks/_build/img/grat-identity.jpg">    </p:cNvPr>
+          <p:cNvPicPr>
+            <a:picLocks noChangeAspect="1"/>
+          </p:cNvPicPr>
+          <p:nvPr/>
+        </p:nvPicPr>
+        <p:blipFill>
+          <a:blip r:embed="rId3"/>
+          <a:stretch>
+            <a:fillRect/>
+          </a:stretch>
+        </p:blipFill>
+        <p:spPr>
+          <a:xfrm>
+            <a:off x="914400" y="4236415"/>
+            <a:ext cx="2194560" cy="1567282"/>
+          </a:xfrm>
+          <a:prstGeom prst="rect">
+            <a:avLst/>
+          </a:prstGeom>
+        </p:spPr>
+      </p:pic>
+      <p:sp>
+        <p:nvSpPr>
+          <p:cNvPr id="16" name="Text 11"/>
+          <p:cNvSpPr/>
+          <p:nvPr/>
+        </p:nvSpPr>
+        <p:spPr>
+          <a:xfrm>
+            <a:off x="3337560" y="4069080"/>
+            <a:ext cx="2482596" cy="457200"/>
+          </a:xfrm>
+          <a:prstGeom prst="rect">
+            <a:avLst/>
+          </a:prstGeom>
+          <a:noFill/>
+          <a:ln/>
+        </p:spPr>
+        <p:txBody>
+          <a:bodyPr wrap="square" lIns="0" tIns="0" rIns="0" bIns="0" rtlCol="0" anchor="ctr"/>
+          <a:lstStyle/>
+          <a:p>
+            <a:pPr indent="0" marL="0">
+              <a:buNone/>
+            </a:pPr>
+            <a:r>
+              <a:rPr lang="en-US" sz="1900" dirty="0">
+                <a:solidFill>
+                  <a:srgbClr val="4A6B5D"/>
+                </a:solidFill>
+                <a:latin typeface="Georgia" pitchFamily="34" charset="0"/>
+                <a:ea typeface="Georgia" pitchFamily="34" charset="-122"/>
+                <a:cs typeface="Georgia" pitchFamily="34" charset="-120"/>
+              </a:rPr>
+              <a:t>Personal identity</a:t>
+            </a:r>
+            <a:endParaRPr lang="en-US" sz="1900" dirty="0"/>
+          </a:p>
+        </p:txBody>
+      </p:sp>
+      <p:sp>
+        <p:nvSpPr>
+          <p:cNvPr id="17" name="Text 12"/>
+          <p:cNvSpPr/>
+          <p:nvPr/>
+        </p:nvSpPr>
+        <p:spPr>
+          <a:xfrm>
+            <a:off x="3337560" y="4544568"/>
+            <a:ext cx="2482596" cy="1417320"/>
+          </a:xfrm>
+          <a:prstGeom prst="rect">
+            <a:avLst/>
+          </a:prstGeom>
+          <a:noFill/>
+          <a:ln/>
+        </p:spPr>
+        <p:txBody>
+          <a:bodyPr wrap="square" lIns="0" tIns="0" rIns="0" bIns="0" rtlCol="0" anchor="t"/>
+          <a:lstStyle/>
+          <a:p>
+            <a:pPr indent="0" marL="0">
+              <a:lnSpc>
+                <a:spcPts val="1800"/>
+              </a:lnSpc>
+              <a:buNone/>
+            </a:pPr>
+            <a:r>
+              <a:rPr lang="en-US" sz="1350" dirty="0">
+                <a:solidFill>
+                  <a:srgbClr val="24313F"/>
+                </a:solidFill>
+                <a:latin typeface="Georgia" pitchFamily="34" charset="0"/>
+                <a:ea typeface="Georgia" pitchFamily="34" charset="-122"/>
+                <a:cs typeface="Georgia" pitchFamily="34" charset="-120"/>
+              </a:rPr>
+              <a:t>A mirror: comparing your own life and values against what you watch.</a:t>
+            </a:r>
+            <a:endParaRPr lang="en-US" sz="1350" dirty="0"/>
+          </a:p>
+        </p:txBody>
+      </p:sp>
+      <p:sp>
+        <p:nvSpPr>
+          <p:cNvPr id="18" name="Shape 13"/>
+          <p:cNvSpPr/>
+          <p:nvPr/>
+        </p:nvSpPr>
+        <p:spPr>
+          <a:xfrm>
+            <a:off x="6368796" y="3977640"/>
+            <a:ext cx="2377440" cy="2084832"/>
+          </a:xfrm>
+          <a:prstGeom prst="rect">
+            <a:avLst/>
+          </a:prstGeom>
+          <a:solidFill>
+            <a:srgbClr val="FAF8F1"/>
+          </a:solidFill>
+          <a:ln w="9525">
+            <a:solidFill>
+              <a:srgbClr val="D9D4C4"/>
+            </a:solidFill>
+            <a:prstDash val="solid"/>
+          </a:ln>
+        </p:spPr>
+      </p:sp>
+      <p:pic>
+        <p:nvPicPr>
+          <p:cNvPr id="19" name="Image 3" descr="/Users/dogan/Documents/Vaults/Courses/wiki/classes/media-studies/decks/_build/img/grat-surveil.jpg">    </p:cNvPr>
+          <p:cNvPicPr>
+            <a:picLocks noChangeAspect="1"/>
+          </p:cNvPicPr>
+          <p:nvPr/>
+        </p:nvPicPr>
+        <p:blipFill>
+          <a:blip r:embed="rId4"/>
+          <a:stretch>
+            <a:fillRect/>
+          </a:stretch>
+        </p:blipFill>
+        <p:spPr>
+          <a:xfrm>
+            <a:off x="6460236" y="4288079"/>
+            <a:ext cx="2194560" cy="1463954"/>
+          </a:xfrm>
+          <a:prstGeom prst="rect">
+            <a:avLst/>
+          </a:prstGeom>
+        </p:spPr>
+      </p:pic>
+      <p:sp>
+        <p:nvSpPr>
+          <p:cNvPr id="20" name="Text 14"/>
+          <p:cNvSpPr/>
+          <p:nvPr/>
+        </p:nvSpPr>
+        <p:spPr>
+          <a:xfrm>
+            <a:off x="8883396" y="4069080"/>
+            <a:ext cx="2482596" cy="457200"/>
+          </a:xfrm>
+          <a:prstGeom prst="rect">
+            <a:avLst/>
+          </a:prstGeom>
+          <a:noFill/>
+          <a:ln/>
+        </p:spPr>
+        <p:txBody>
+          <a:bodyPr wrap="square" lIns="0" tIns="0" rIns="0" bIns="0" rtlCol="0" anchor="ctr"/>
+          <a:lstStyle/>
+          <a:p>
+            <a:pPr indent="0" marL="0">
+              <a:buNone/>
+            </a:pPr>
+            <a:r>
+              <a:rPr lang="en-US" sz="1900" dirty="0">
+                <a:solidFill>
+                  <a:srgbClr val="4A6B5D"/>
+                </a:solidFill>
+                <a:latin typeface="Georgia" pitchFamily="34" charset="0"/>
+                <a:ea typeface="Georgia" pitchFamily="34" charset="-122"/>
+                <a:cs typeface="Georgia" pitchFamily="34" charset="-120"/>
+              </a:rPr>
+              <a:t>Surveillance</a:t>
+            </a:r>
+            <a:endParaRPr lang="en-US" sz="1900" dirty="0"/>
+          </a:p>
+        </p:txBody>
+      </p:sp>
+      <p:sp>
+        <p:nvSpPr>
+          <p:cNvPr id="21" name="Text 15"/>
+          <p:cNvSpPr/>
+          <p:nvPr/>
+        </p:nvSpPr>
+        <p:spPr>
+          <a:xfrm>
+            <a:off x="8883396" y="4544568"/>
+            <a:ext cx="2482596" cy="1417320"/>
+          </a:xfrm>
+          <a:prstGeom prst="rect">
+            <a:avLst/>
+          </a:prstGeom>
+          <a:noFill/>
+          <a:ln/>
+        </p:spPr>
+        <p:txBody>
+          <a:bodyPr wrap="square" lIns="0" tIns="0" rIns="0" bIns="0" rtlCol="0" anchor="t"/>
+          <a:lstStyle/>
+          <a:p>
+            <a:pPr indent="0" marL="0">
+              <a:lnSpc>
+                <a:spcPts val="1800"/>
+              </a:lnSpc>
+              <a:buNone/>
+            </a:pPr>
+            <a:r>
+              <a:rPr lang="en-US" sz="1350" dirty="0">
+                <a:solidFill>
+                  <a:srgbClr val="24313F"/>
+                </a:solidFill>
+                <a:latin typeface="Georgia" pitchFamily="34" charset="0"/>
+                <a:ea typeface="Georgia" pitchFamily="34" charset="-122"/>
+                <a:cs typeface="Georgia" pitchFamily="34" charset="-120"/>
+              </a:rPr>
+              <a:t>Information: knowing what is happening, in the world and your world.</a:t>
+            </a:r>
+            <a:endParaRPr lang="en-US" sz="1350" dirty="0"/>
+          </a:p>
+        </p:txBody>
+      </p:sp>
+      <p:sp>
+        <p:nvSpPr>
+          <p:cNvPr id="22" name="Shape 16"/>
+          <p:cNvSpPr/>
+          <p:nvPr/>
+        </p:nvSpPr>
+        <p:spPr>
+          <a:xfrm>
+            <a:off x="822960" y="6382512"/>
+            <a:ext cx="10543032" cy="0"/>
+          </a:xfrm>
+          <a:prstGeom prst="line">
+            <a:avLst/>
+          </a:prstGeom>
+          <a:noFill/>
+          <a:ln w="9525">
+            <a:solidFill>
+              <a:srgbClr val="D9D4C4"/>
+            </a:solidFill>
+            <a:prstDash val="solid"/>
+          </a:ln>
+        </p:spPr>
+      </p:sp>
+      <p:sp>
+        <p:nvSpPr>
+          <p:cNvPr id="23" name="Text 17"/>
           <p:cNvSpPr/>
           <p:nvPr/>
         </p:nvSpPr>
@@ -6000,7 +8315,7 @@
       </p:sp>
       <p:sp>
         <p:nvSpPr>
-          <p:cNvPr id="10" name="Text 7"/>
+          <p:cNvPr id="24" name="Text 18"/>
           <p:cNvSpPr/>
           <p:nvPr/>
         </p:nvSpPr>
@@ -6034,6 +8349,238 @@
               <a:t>04</a:t>
             </a:r>
             <a:endParaRPr lang="en-US" sz="1600" dirty="0"/>
+          </a:p>
+        </p:txBody>
+      </p:sp>
+    </p:spTree>
+  </p:cSld>
+  <p:clrMapOvr>
+    <a:masterClrMapping/>
+  </p:clrMapOvr>
+</p:sld>
+</file>
+
+<file path=ppt/slides/slide8.xml><?xml version="1.0" encoding="utf-8"?>
+<p:sld xmlns:a="http://schemas.openxmlformats.org/drawingml/2006/main" xmlns:r="http://schemas.openxmlformats.org/officeDocument/2006/relationships" xmlns:p="http://schemas.openxmlformats.org/presentationml/2006/main">
+  <p:cSld name="Slide 8">
+    <p:spTree>
+      <p:nvGrpSpPr>
+        <p:cNvPr id="1" name=""/>
+        <p:cNvGrpSpPr/>
+        <p:nvPr/>
+      </p:nvGrpSpPr>
+      <p:grpSpPr>
+        <a:xfrm>
+          <a:off x="0" y="0"/>
+          <a:ext cx="0" cy="0"/>
+          <a:chOff x="0" y="0"/>
+          <a:chExt cx="0" cy="0"/>
+        </a:xfrm>
+      </p:grpSpPr>
+      <p:pic>
+        <p:nvPicPr>
+          <p:cNvPr id="2" name="Image 0" descr="/Users/dogan/Documents/Vaults/Courses/wiki/classes/media-studies/decks/_build/img/crops/frank-drivein_a1777.jpg">    </p:cNvPr>
+          <p:cNvPicPr>
+            <a:picLocks noChangeAspect="1"/>
+          </p:cNvPicPr>
+          <p:nvPr/>
+        </p:nvPicPr>
+        <p:blipFill>
+          <a:blip r:embed="rId1"/>
+          <a:stretch>
+            <a:fillRect/>
+          </a:stretch>
+        </p:blipFill>
+        <p:spPr>
+          <a:xfrm>
+            <a:off x="0" y="0"/>
+            <a:ext cx="12188952" cy="6858000"/>
+          </a:xfrm>
+          <a:prstGeom prst="rect">
+            <a:avLst/>
+          </a:prstGeom>
+        </p:spPr>
+      </p:pic>
+      <p:sp>
+        <p:nvSpPr>
+          <p:cNvPr id="3" name="Shape 0"/>
+          <p:cNvSpPr/>
+          <p:nvPr/>
+        </p:nvSpPr>
+        <p:spPr>
+          <a:xfrm>
+            <a:off x="502920" y="502920"/>
+            <a:ext cx="5120640" cy="502920"/>
+          </a:xfrm>
+          <a:prstGeom prst="rect">
+            <a:avLst/>
+          </a:prstGeom>
+          <a:solidFill>
+            <a:srgbClr val="FAF8F1"/>
+          </a:solidFill>
+          <a:ln/>
+        </p:spPr>
+      </p:sp>
+      <p:sp>
+        <p:nvSpPr>
+          <p:cNvPr id="4" name="Text 1"/>
+          <p:cNvSpPr/>
+          <p:nvPr/>
+        </p:nvSpPr>
+        <p:spPr>
+          <a:xfrm>
+            <a:off x="704088" y="521208"/>
+            <a:ext cx="4846320" cy="274320"/>
+          </a:xfrm>
+          <a:prstGeom prst="rect">
+            <a:avLst/>
+          </a:prstGeom>
+          <a:noFill/>
+          <a:ln/>
+        </p:spPr>
+        <p:txBody>
+          <a:bodyPr wrap="square" lIns="0" tIns="0" rIns="0" bIns="0" rtlCol="0" anchor="ctr"/>
+          <a:lstStyle/>
+          <a:p>
+            <a:pPr algn="l" indent="0" marL="0">
+              <a:buNone/>
+            </a:pPr>
+            <a:r>
+              <a:rPr lang="en-US" sz="1100" b="1" spc="250" kern="0" dirty="0">
+                <a:solidFill>
+                  <a:srgbClr val="4A6B5D"/>
+                </a:solidFill>
+                <a:latin typeface="Arial" pitchFamily="34" charset="0"/>
+                <a:ea typeface="Arial" pitchFamily="34" charset="-122"/>
+                <a:cs typeface="Arial" pitchFamily="34" charset="-120"/>
+              </a:rPr>
+              <a:t>THE ACTIVE AUDIENCE</a:t>
+            </a:r>
+            <a:endParaRPr lang="en-US" sz="1100" dirty="0"/>
+          </a:p>
+        </p:txBody>
+      </p:sp>
+      <p:sp>
+        <p:nvSpPr>
+          <p:cNvPr id="5" name="Shape 2"/>
+          <p:cNvSpPr/>
+          <p:nvPr/>
+        </p:nvSpPr>
+        <p:spPr>
+          <a:xfrm>
+            <a:off x="457200" y="5230368"/>
+            <a:ext cx="8778240" cy="1243584"/>
+          </a:xfrm>
+          <a:prstGeom prst="rect">
+            <a:avLst/>
+          </a:prstGeom>
+          <a:solidFill>
+            <a:srgbClr val="FAF8F1"/>
+          </a:solidFill>
+          <a:ln/>
+        </p:spPr>
+      </p:sp>
+      <p:sp>
+        <p:nvSpPr>
+          <p:cNvPr id="6" name="Shape 3"/>
+          <p:cNvSpPr/>
+          <p:nvPr/>
+        </p:nvSpPr>
+        <p:spPr>
+          <a:xfrm>
+            <a:off x="676656" y="5468112"/>
+            <a:ext cx="731520" cy="0"/>
+          </a:xfrm>
+          <a:prstGeom prst="line">
+            <a:avLst/>
+          </a:prstGeom>
+          <a:noFill/>
+          <a:ln w="28575">
+            <a:solidFill>
+              <a:srgbClr val="8C3A38"/>
+            </a:solidFill>
+            <a:prstDash val="solid"/>
+          </a:ln>
+        </p:spPr>
+      </p:sp>
+      <p:sp>
+        <p:nvSpPr>
+          <p:cNvPr id="7" name="Text 4"/>
+          <p:cNvSpPr/>
+          <p:nvPr/>
+        </p:nvSpPr>
+        <p:spPr>
+          <a:xfrm>
+            <a:off x="676656" y="5541264"/>
+            <a:ext cx="8339328" cy="585216"/>
+          </a:xfrm>
+          <a:prstGeom prst="rect">
+            <a:avLst/>
+          </a:prstGeom>
+          <a:noFill/>
+          <a:ln/>
+        </p:spPr>
+        <p:txBody>
+          <a:bodyPr wrap="square" lIns="0" tIns="0" rIns="0" bIns="0" rtlCol="0" anchor="t"/>
+          <a:lstStyle/>
+          <a:p>
+            <a:pPr indent="0" marL="0">
+              <a:lnSpc>
+                <a:spcPts val="2200"/>
+              </a:lnSpc>
+              <a:buNone/>
+            </a:pPr>
+            <a:r>
+              <a:rPr lang="en-US" sz="1800" dirty="0">
+                <a:solidFill>
+                  <a:srgbClr val="24313F"/>
+                </a:solidFill>
+                <a:latin typeface="Georgia" pitchFamily="34" charset="0"/>
+                <a:ea typeface="Georgia" pitchFamily="34" charset="-122"/>
+                <a:cs typeface="Georgia" pitchFamily="34" charset="-120"/>
+              </a:rPr>
+              <a:t>Parked in the dark, arranged around a screen, doing the watching: an audience is never a blank surface.</a:t>
+            </a:r>
+            <a:endParaRPr lang="en-US" sz="1800" dirty="0"/>
+          </a:p>
+        </p:txBody>
+      </p:sp>
+      <p:sp>
+        <p:nvSpPr>
+          <p:cNvPr id="8" name="Text 5"/>
+          <p:cNvSpPr/>
+          <p:nvPr/>
+        </p:nvSpPr>
+        <p:spPr>
+          <a:xfrm>
+            <a:off x="676656" y="6181344"/>
+            <a:ext cx="8339328" cy="256032"/>
+          </a:xfrm>
+          <a:prstGeom prst="rect">
+            <a:avLst/>
+          </a:prstGeom>
+          <a:noFill/>
+          <a:ln/>
+        </p:spPr>
+        <p:txBody>
+          <a:bodyPr wrap="square" lIns="0" tIns="0" rIns="0" bIns="0" rtlCol="0" anchor="ctr"/>
+          <a:lstStyle/>
+          <a:p>
+            <a:pPr indent="0" marL="0">
+              <a:buNone/>
+            </a:pPr>
+            <a:r>
+              <a:rPr lang="en-US" sz="950" spc="50" kern="0" dirty="0">
+                <a:solidFill>
+                  <a:srgbClr val="7A7F72"/>
+                </a:solidFill>
+                <a:latin typeface="Arial" pitchFamily="34" charset="0"/>
+                <a:ea typeface="Arial" pitchFamily="34" charset="-122"/>
+                <a:cs typeface="Arial" pitchFamily="34" charset="-120"/>
+              </a:rPr>
+              <a:t>Robert Frank, Drive-in movie, Detroit, 1955</a:t>
+            </a:r>
+            <a:endParaRPr lang="en-US" sz="950" dirty="0"/>
           </a:p>
         </p:txBody>
       </p:sp>
@@ -6102,7 +8649,7 @@
                 <a:ea typeface="Arial" pitchFamily="34" charset="-122"/>
                 <a:cs typeface="Arial" pitchFamily="34" charset="-120"/>
               </a:rPr>
-              <a:t>THE LAST HELP WINDOW</a:t>
+              <a:t>THE HONEST MAP</a:t>
             </a:r>
             <a:endParaRPr lang="en-US" sz="1100" dirty="0"/>
           </a:p>
@@ -6141,7 +8688,7 @@
                 <a:ea typeface="Arial" pitchFamily="34" charset="-122"/>
                 <a:cs typeface="Arial" pitchFamily="34" charset="-120"/>
               </a:rPr>
-              <a:t>TRIAGE ORDER, NOT HAND-RAISING</a:t>
+              <a:t>THE L01 LOG'S DESCENDANT, WITH THEORY ATTACHED</a:t>
             </a:r>
             <a:endParaRPr lang="en-US" sz="1100" dirty="0"/>
           </a:p>
@@ -6178,24 +8725,27 @@
         </p:nvSpPr>
         <p:spPr>
           <a:xfrm>
-            <a:off x="822960" y="1280160"/>
-            <a:ext cx="10543032" cy="914400"/>
-          </a:xfrm>
-          <a:prstGeom prst="rect">
-            <a:avLst/>
-          </a:prstGeom>
-          <a:noFill/>
-          <a:ln/>
-        </p:spPr>
-        <p:txBody>
-          <a:bodyPr wrap="square" lIns="0" tIns="0" rIns="0" bIns="0" rtlCol="0" anchor="ctr"/>
-          <a:lstStyle/>
-          <a:p>
-            <a:pPr indent="0" marL="0">
-              <a:buNone/>
-            </a:pPr>
-            <a:r>
-              <a:rPr lang="en-US" sz="3800" dirty="0">
+            <a:off x="822960" y="1143000"/>
+            <a:ext cx="6400800" cy="1463040"/>
+          </a:xfrm>
+          <a:prstGeom prst="rect">
+            <a:avLst/>
+          </a:prstGeom>
+          <a:noFill/>
+          <a:ln/>
+        </p:spPr>
+        <p:txBody>
+          <a:bodyPr wrap="square" lIns="0" tIns="0" rIns="0" bIns="0" rtlCol="0" anchor="t"/>
+          <a:lstStyle/>
+          <a:p>
+            <a:pPr indent="0" marL="0">
+              <a:lnSpc>
+                <a:spcPts val="3800"/>
+              </a:lnSpc>
+              <a:buNone/>
+            </a:pPr>
+            <a:r>
+              <a:rPr lang="en-US" sz="3200" dirty="0">
                 <a:solidFill>
                   <a:srgbClr val="24313F"/>
                 </a:solidFill>
@@ -6203,9 +8753,29 @@
                 <a:ea typeface="Georgia" pitchFamily="34" charset="-122"/>
                 <a:cs typeface="Georgia" pitchFamily="34" charset="-120"/>
               </a:rPr>
-              <a:t>CCR surgery, by triage</a:t>
-            </a:r>
-            <a:endParaRPr lang="en-US" sz="3800" dirty="0"/>
+              <a:t>Your week, mapped onto</a:t>
+            </a:r>
+            <a:endParaRPr lang="en-US" sz="3200" dirty="0"/>
+          </a:p>
+          <a:p>
+            <a:pPr indent="0" marL="0">
+              <a:lnSpc>
+                <a:spcPts val="3800"/>
+              </a:lnSpc>
+              <a:buNone/>
+            </a:pPr>
+            <a:r>
+              <a:rPr lang="en-US" sz="3200" dirty="0">
+                <a:solidFill>
+                  <a:srgbClr val="24313F"/>
+                </a:solidFill>
+                <a:latin typeface="Georgia" pitchFamily="34" charset="0"/>
+                <a:ea typeface="Georgia" pitchFamily="34" charset="-122"/>
+                <a:cs typeface="Georgia" pitchFamily="34" charset="-120"/>
+              </a:rPr>
+              <a:t>the four gratifications</a:t>
+            </a:r>
+            <a:endParaRPr lang="en-US" sz="3200" dirty="0"/>
           </a:p>
         </p:txBody>
       </p:sp>
@@ -6217,7 +8787,7 @@
         </p:nvSpPr>
         <p:spPr>
           <a:xfrm>
-            <a:off x="822960" y="2514600"/>
+            <a:off x="822960" y="2788920"/>
             <a:ext cx="914400" cy="0"/>
           </a:xfrm>
           <a:prstGeom prst="line">
@@ -6240,8 +8810,8 @@
         </p:nvSpPr>
         <p:spPr>
           <a:xfrm>
-            <a:off x="822960" y="2743200"/>
-            <a:ext cx="9875520" cy="2011680"/>
+            <a:off x="822960" y="3017520"/>
+            <a:ext cx="6400800" cy="2377440"/>
           </a:xfrm>
           <a:prstGeom prst="rect">
             <a:avLst/>
@@ -6255,12 +8825,12 @@
           <a:p>
             <a:pPr indent="0" marL="0">
               <a:lnSpc>
-                <a:spcPts val="2800"/>
+                <a:spcPts val="2500"/>
               </a:lnSpc>
               <a:buNone/>
             </a:pPr>
             <a:r>
-              <a:rPr lang="en-US" sz="2000" dirty="0">
+              <a:rPr lang="en-US" sz="1700" dirty="0">
                 <a:solidFill>
                   <a:srgbClr val="24313F"/>
                 </a:solidFill>
@@ -6268,9 +8838,9 @@
                 <a:ea typeface="Georgia" pitchFamily="34" charset="-122"/>
                 <a:cs typeface="Georgia" pitchFamily="34" charset="-120"/>
               </a:rPr>
-              <a:t>The double is the last room where help is available before submission. The queue is ordered by CS11 severity, not by who raises a hand: every student is seen, and the strongest drafts get peer support instead of teacher time. Each visit ends with one fix executed, not promised. Friday is logistics, not heroics.</a:t>
-            </a:r>
-            <a:endParaRPr lang="en-US" sz="2000" dirty="0"/>
+              <a:t>Map your real weekly media use onto the four jobs. The honesty rule is absolute: the comfort re-watch and the 2 a.m. scroll are data, not confessions. Then the turn inward: which gratification does your own C1 product serve, and how would you know if it worked?</a:t>
+            </a:r>
+            <a:endParaRPr lang="en-US" sz="1700" dirty="0"/>
           </a:p>
         </p:txBody>
       </p:sp>
@@ -6282,13 +8852,15 @@
         </p:nvSpPr>
         <p:spPr>
           <a:xfrm>
-            <a:off x="822960" y="6382512"/>
-            <a:ext cx="10543032" cy="0"/>
-          </a:xfrm>
-          <a:prstGeom prst="line">
-            <a:avLst/>
-          </a:prstGeom>
-          <a:noFill/>
+            <a:off x="7589520" y="1051560"/>
+            <a:ext cx="3749040" cy="4663440"/>
+          </a:xfrm>
+          <a:prstGeom prst="rect">
+            <a:avLst/>
+          </a:prstGeom>
+          <a:solidFill>
+            <a:srgbClr val="FAF8F1"/>
+          </a:solidFill>
           <a:ln w="9525">
             <a:solidFill>
               <a:srgbClr val="D9D4C4"/>
@@ -6297,16 +8869,40 @@
           </a:ln>
         </p:spPr>
       </p:sp>
-      <p:sp>
-        <p:nvSpPr>
-          <p:cNvPr id="9" name="Text 7"/>
-          <p:cNvSpPr/>
-          <p:nvPr/>
-        </p:nvSpPr>
-        <p:spPr>
-          <a:xfrm>
-            <a:off x="822960" y="6419088"/>
-            <a:ext cx="7315200" cy="274320"/>
+      <p:pic>
+        <p:nvPicPr>
+          <p:cNvPr id="9" name="Image 0" descr="/Users/dogan/Documents/Vaults/Courses/wiki/classes/media-studies/decks/_build/img/ws52.jpg">    </p:cNvPr>
+          <p:cNvPicPr>
+            <a:picLocks noChangeAspect="1"/>
+          </p:cNvPicPr>
+          <p:nvPr/>
+        </p:nvPicPr>
+        <p:blipFill>
+          <a:blip r:embed="rId1"/>
+          <a:stretch>
+            <a:fillRect/>
+          </a:stretch>
+        </p:blipFill>
+        <p:spPr>
+          <a:xfrm>
+            <a:off x="7717536" y="2149004"/>
+            <a:ext cx="3493008" cy="2468552"/>
+          </a:xfrm>
+          <a:prstGeom prst="rect">
+            <a:avLst/>
+          </a:prstGeom>
+        </p:spPr>
+      </p:pic>
+      <p:sp>
+        <p:nvSpPr>
+          <p:cNvPr id="10" name="Text 7"/>
+          <p:cNvSpPr/>
+          <p:nvPr/>
+        </p:nvSpPr>
+        <p:spPr>
+          <a:xfrm>
+            <a:off x="7589520" y="5760720"/>
+            <a:ext cx="3749040" cy="320040"/>
           </a:xfrm>
           <a:prstGeom prst="rect">
             <a:avLst/>
@@ -6318,11 +8914,11 @@
           <a:bodyPr wrap="square" lIns="0" tIns="0" rIns="0" bIns="0" rtlCol="0" anchor="ctr"/>
           <a:lstStyle/>
           <a:p>
-            <a:pPr indent="0" marL="0">
-              <a:buNone/>
-            </a:pPr>
-            <a:r>
-              <a:rPr lang="en-US" sz="900" spc="150" kern="0" dirty="0">
+            <a:pPr algn="ctr" indent="0" marL="0">
+              <a:buNone/>
+            </a:pPr>
+            <a:r>
+              <a:rPr lang="en-US" sz="1000" dirty="0">
                 <a:solidFill>
                   <a:srgbClr val="7A7F72"/>
                 </a:solidFill>
@@ -6330,6 +8926,68 @@
                 <a:ea typeface="Arial" pitchFamily="34" charset="-122"/>
                 <a:cs typeface="Arial" pitchFamily="34" charset="-120"/>
               </a:rPr>
+              <a:t>WS 5.2, Technology and self: the body-map option for the honest map</a:t>
+            </a:r>
+            <a:endParaRPr lang="en-US" sz="1000" dirty="0"/>
+          </a:p>
+        </p:txBody>
+      </p:sp>
+      <p:sp>
+        <p:nvSpPr>
+          <p:cNvPr id="11" name="Shape 8"/>
+          <p:cNvSpPr/>
+          <p:nvPr/>
+        </p:nvSpPr>
+        <p:spPr>
+          <a:xfrm>
+            <a:off x="822960" y="6382512"/>
+            <a:ext cx="10543032" cy="0"/>
+          </a:xfrm>
+          <a:prstGeom prst="line">
+            <a:avLst/>
+          </a:prstGeom>
+          <a:noFill/>
+          <a:ln w="9525">
+            <a:solidFill>
+              <a:srgbClr val="D9D4C4"/>
+            </a:solidFill>
+            <a:prstDash val="solid"/>
+          </a:ln>
+        </p:spPr>
+      </p:sp>
+      <p:sp>
+        <p:nvSpPr>
+          <p:cNvPr id="12" name="Text 9"/>
+          <p:cNvSpPr/>
+          <p:nvPr/>
+        </p:nvSpPr>
+        <p:spPr>
+          <a:xfrm>
+            <a:off x="822960" y="6419088"/>
+            <a:ext cx="7315200" cy="274320"/>
+          </a:xfrm>
+          <a:prstGeom prst="rect">
+            <a:avLst/>
+          </a:prstGeom>
+          <a:noFill/>
+          <a:ln/>
+        </p:spPr>
+        <p:txBody>
+          <a:bodyPr wrap="square" lIns="0" tIns="0" rIns="0" bIns="0" rtlCol="0" anchor="ctr"/>
+          <a:lstStyle/>
+          <a:p>
+            <a:pPr indent="0" marL="0">
+              <a:buNone/>
+            </a:pPr>
+            <a:r>
+              <a:rPr lang="en-US" sz="900" spc="150" kern="0" dirty="0">
+                <a:solidFill>
+                  <a:srgbClr val="7A7F72"/>
+                </a:solidFill>
+                <a:latin typeface="Arial" pitchFamily="34" charset="0"/>
+                <a:ea typeface="Arial" pitchFamily="34" charset="-122"/>
+                <a:cs typeface="Arial" pitchFamily="34" charset="-120"/>
+              </a:rPr>
               <a:t>MEDIA STUDIES 9607 · SEMESTER I</a:t>
             </a:r>
             <a:endParaRPr lang="en-US" sz="900" dirty="0"/>
@@ -6338,7 +8996,7 @@
       </p:sp>
       <p:sp>
         <p:nvSpPr>
-          <p:cNvPr id="10" name="Text 8"/>
+          <p:cNvPr id="13" name="Text 10"/>
           <p:cNvSpPr/>
           <p:nvPr/>
         </p:nvSpPr>

--- a/content/decks/media-studies/media-studies-s1-lesson-14-audiences-and-the-portfolio-submission.pptx
+++ b/content/decks/media-studies/media-studies-s1-lesson-14-audiences-and-the-portfolio-submission.pptx
@@ -2537,6 +2537,65 @@
           </a:p>
         </p:txBody>
       </p:sp>
+      <p:sp>
+        <p:nvSpPr>
+          <p:cNvPr id="6" name="Text 4"/>
+          <p:cNvSpPr/>
+          <p:nvPr/>
+        </p:nvSpPr>
+        <p:spPr>
+          <a:xfrm>
+            <a:off x="822960" y="5806440"/>
+            <a:ext cx="10424160" cy="640080"/>
+          </a:xfrm>
+          <a:prstGeom prst="rect">
+            <a:avLst/>
+          </a:prstGeom>
+          <a:noFill/>
+          <a:ln/>
+        </p:spPr>
+        <p:txBody>
+          <a:bodyPr wrap="square" lIns="0" tIns="0" rIns="0" bIns="0" rtlCol="0" anchor="t"/>
+          <a:lstStyle/>
+          <a:p>
+            <a:pPr indent="0" marL="0">
+              <a:lnSpc>
+                <a:spcPts val="1900"/>
+              </a:lnSpc>
+              <a:buNone/>
+            </a:pPr>
+            <a:r>
+              <a:rPr lang="en-US" sz="1200" b="1" spc="100" kern="0" dirty="0">
+                <a:solidFill>
+                  <a:srgbClr val="7A7F72"/>
+                </a:solidFill>
+                <a:latin typeface="Arial" pitchFamily="34" charset="0"/>
+                <a:ea typeface="Arial" pitchFamily="34" charset="-122"/>
+                <a:cs typeface="Arial" pitchFamily="34" charset="-120"/>
+              </a:rPr>
+              <a:t>IN PLAIN WORDS   </a:t>
+            </a:r>
+            <a:pPr indent="0" marL="0">
+              <a:lnSpc>
+                <a:spcPts val="1900"/>
+              </a:lnSpc>
+              <a:buNone/>
+            </a:pPr>
+            <a:r>
+              <a:rPr lang="en-US" sz="1400" i="1" dirty="0">
+                <a:solidFill>
+                  <a:srgbClr val="4A6B5D"/>
+                </a:solidFill>
+                <a:latin typeface="Georgia" pitchFamily="34" charset="0"/>
+                <a:ea typeface="Georgia" pitchFamily="34" charset="-122"/>
+                <a:cs typeface="Georgia" pitchFamily="34" charset="-120"/>
+              </a:rPr>
+              <a:t>Audiences can now publish too. The old one-way power of media companies has shifted.</a:t>
+            </a:r>
+            <a:endParaRPr lang="en-US" sz="1200" dirty="0"/>
+          </a:p>
+        </p:txBody>
+      </p:sp>
     </p:spTree>
   </p:cSld>
   <p:clrMapOvr>
@@ -2911,7 +2970,7 @@
                 <a:ea typeface="Georgia" pitchFamily="34" charset="-122"/>
                 <a:cs typeface="Georgia" pitchFamily="34" charset="-120"/>
               </a:rPr>
-              <a:t>Participatory culture: fans poach, remix and build on texts. The audience is a workshop, not a hall.</a:t>
+              <a:t>Participatory culture: fans borrow, remix, and build on texts (Jenkins calls it poaching). The audience is a workshop, not a hall.</a:t>
             </a:r>
             <a:endParaRPr lang="en-US" sz="1500" dirty="0"/>
           </a:p>
@@ -3053,23 +3112,43 @@
         <p:spPr>
           <a:xfrm>
             <a:off x="822960" y="5440680"/>
-            <a:ext cx="10543032" cy="411480"/>
-          </a:xfrm>
-          <a:prstGeom prst="rect">
-            <a:avLst/>
-          </a:prstGeom>
-          <a:noFill/>
-          <a:ln/>
-        </p:spPr>
-        <p:txBody>
-          <a:bodyPr wrap="square" lIns="0" tIns="0" rIns="0" bIns="0" rtlCol="0" anchor="ctr"/>
-          <a:lstStyle/>
-          <a:p>
-            <a:pPr indent="0" marL="0">
-              <a:buNone/>
-            </a:pPr>
-            <a:r>
-              <a:rPr lang="en-US" sz="1500" i="1" dirty="0">
+            <a:ext cx="10543032" cy="365760"/>
+          </a:xfrm>
+          <a:prstGeom prst="rect">
+            <a:avLst/>
+          </a:prstGeom>
+          <a:noFill/>
+          <a:ln/>
+        </p:spPr>
+        <p:txBody>
+          <a:bodyPr wrap="square" lIns="0" tIns="0" rIns="0" bIns="0" rtlCol="0" anchor="t"/>
+          <a:lstStyle/>
+          <a:p>
+            <a:pPr indent="0" marL="0">
+              <a:lnSpc>
+                <a:spcPts val="1900"/>
+              </a:lnSpc>
+              <a:buNone/>
+            </a:pPr>
+            <a:r>
+              <a:rPr lang="en-US" sz="1250" b="1" spc="100" kern="0" dirty="0">
+                <a:solidFill>
+                  <a:srgbClr val="4A6B5D"/>
+                </a:solidFill>
+                <a:latin typeface="Arial" pitchFamily="34" charset="0"/>
+                <a:ea typeface="Arial" pitchFamily="34" charset="-122"/>
+                <a:cs typeface="Arial" pitchFamily="34" charset="-120"/>
+              </a:rPr>
+              <a:t>KEY POINT   </a:t>
+            </a:r>
+            <a:pPr indent="0" marL="0">
+              <a:lnSpc>
+                <a:spcPts val="1900"/>
+              </a:lnSpc>
+              <a:buNone/>
+            </a:pPr>
+            <a:r>
+              <a:rPr lang="en-US" sz="1450" i="1" dirty="0">
                 <a:solidFill>
                   <a:srgbClr val="4A6B5D"/>
                 </a:solidFill>
@@ -3077,9 +3156,9 @@
                 <a:ea typeface="Georgia" pitchFamily="34" charset="-122"/>
                 <a:cs typeface="Georgia" pitchFamily="34" charset="-120"/>
               </a:rPr>
-              <a:t>Your C1 blog is the proof of the claim: an audience member who published. Say so in the CCR.</a:t>
-            </a:r>
-            <a:endParaRPr lang="en-US" sz="1500" dirty="0"/>
+              <a:t>Your C1 blog proves the claim: you are an audience member who published. Say so in your CCR.</a:t>
+            </a:r>
+            <a:endParaRPr lang="en-US" sz="1250" dirty="0"/>
           </a:p>
         </p:txBody>
       </p:sp>
@@ -3388,7 +3467,7 @@
         <p:spPr>
           <a:xfrm>
             <a:off x="822960" y="2743200"/>
-            <a:ext cx="9875520" cy="2011680"/>
+            <a:ext cx="9875520" cy="2103120"/>
           </a:xfrm>
           <a:prstGeom prst="rect">
             <a:avLst/>
@@ -3407,7 +3486,24 @@
               <a:buNone/>
             </a:pPr>
             <a:r>
-              <a:rPr lang="en-US" sz="2000" dirty="0">
+              <a:rPr lang="en-US" sz="1700" b="1" spc="100" kern="0" dirty="0">
+                <a:solidFill>
+                  <a:srgbClr val="4A6B5D"/>
+                </a:solidFill>
+                <a:latin typeface="Arial" pitchFamily="34" charset="0"/>
+                <a:ea typeface="Arial" pitchFamily="34" charset="-122"/>
+                <a:cs typeface="Arial" pitchFamily="34" charset="-120"/>
+              </a:rPr>
+              <a:t>THE WINDOW   </a:t>
+            </a:r>
+            <a:pPr indent="0" marL="0">
+              <a:lnSpc>
+                <a:spcPts val="2800"/>
+              </a:lnSpc>
+              <a:buNone/>
+            </a:pPr>
+            <a:r>
+              <a:rPr lang="en-US" sz="1900" dirty="0">
                 <a:solidFill>
                   <a:srgbClr val="24313F"/>
                 </a:solidFill>
@@ -3415,9 +3511,83 @@
                 <a:ea typeface="Georgia" pitchFamily="34" charset="-122"/>
                 <a:cs typeface="Georgia" pitchFamily="34" charset="-120"/>
               </a:rPr>
-              <a:t>The double is the last room where help is available before submission. The queue is ordered by CS11 severity, not by who raises a hand: every student is seen, and the strongest drafts get peer support instead of teacher time. Each visit ends with one fix executed, not promised. Friday is logistics, not heroics.</a:t>
-            </a:r>
-            <a:endParaRPr lang="en-US" sz="2000" dirty="0"/>
+              <a:t>The double period is the last help before submission.</a:t>
+            </a:r>
+            <a:endParaRPr lang="en-US" sz="1700" dirty="0"/>
+          </a:p>
+          <a:p>
+            <a:pPr indent="0" marL="0">
+              <a:lnSpc>
+                <a:spcPts val="2800"/>
+              </a:lnSpc>
+              <a:buNone/>
+            </a:pPr>
+            <a:r>
+              <a:rPr lang="en-US" sz="1700" b="1" spc="100" kern="0" dirty="0">
+                <a:solidFill>
+                  <a:srgbClr val="4A6B5D"/>
+                </a:solidFill>
+                <a:latin typeface="Arial" pitchFamily="34" charset="0"/>
+                <a:ea typeface="Arial" pitchFamily="34" charset="-122"/>
+                <a:cs typeface="Arial" pitchFamily="34" charset="-120"/>
+              </a:rPr>
+              <a:t>THE QUEUE   </a:t>
+            </a:r>
+            <a:pPr indent="0" marL="0">
+              <a:lnSpc>
+                <a:spcPts val="2800"/>
+              </a:lnSpc>
+              <a:buNone/>
+            </a:pPr>
+            <a:r>
+              <a:rPr lang="en-US" sz="1900" dirty="0">
+                <a:solidFill>
+                  <a:srgbClr val="24313F"/>
+                </a:solidFill>
+                <a:latin typeface="Georgia" pitchFamily="34" charset="0"/>
+                <a:ea typeface="Georgia" pitchFamily="34" charset="-122"/>
+                <a:cs typeface="Georgia" pitchFamily="34" charset="-120"/>
+              </a:rPr>
+              <a:t>Ordered by CS11 severity, not by raised hands. Everyone is seen.</a:t>
+            </a:r>
+            <a:endParaRPr lang="en-US" sz="1700" dirty="0"/>
+          </a:p>
+          <a:p>
+            <a:pPr indent="0" marL="0">
+              <a:lnSpc>
+                <a:spcPts val="2800"/>
+              </a:lnSpc>
+              <a:buNone/>
+            </a:pPr>
+            <a:r>
+              <a:rPr lang="en-US" sz="1700" b="1" spc="100" kern="0" dirty="0">
+                <a:solidFill>
+                  <a:srgbClr val="4A6B5D"/>
+                </a:solidFill>
+                <a:latin typeface="Arial" pitchFamily="34" charset="0"/>
+                <a:ea typeface="Arial" pitchFamily="34" charset="-122"/>
+                <a:cs typeface="Arial" pitchFamily="34" charset="-120"/>
+              </a:rPr>
+              <a:t>THE RULE   </a:t>
+            </a:r>
+            <a:pPr indent="0" marL="0">
+              <a:lnSpc>
+                <a:spcPts val="2800"/>
+              </a:lnSpc>
+              <a:buNone/>
+            </a:pPr>
+            <a:r>
+              <a:rPr lang="en-US" sz="1900" dirty="0">
+                <a:solidFill>
+                  <a:srgbClr val="24313F"/>
+                </a:solidFill>
+                <a:latin typeface="Georgia" pitchFamily="34" charset="0"/>
+                <a:ea typeface="Georgia" pitchFamily="34" charset="-122"/>
+                <a:cs typeface="Georgia" pitchFamily="34" charset="-120"/>
+              </a:rPr>
+              <a:t>Each visit ends with one fix done, not promised. Friday is logistics only.</a:t>
+            </a:r>
+            <a:endParaRPr lang="en-US" sz="1700" dirty="0"/>
           </a:p>
         </p:txBody>
       </p:sp>
@@ -3964,7 +4134,7 @@
                 <a:ea typeface="Georgia" pitchFamily="34" charset="-122"/>
                 <a:cs typeface="Georgia" pitchFamily="34" charset="-120"/>
               </a:rPr>
-              <a:t>Each student bands their own portfolio against the C1 criteria before the mark; the gap is the conversation.</a:t>
+              <a:t>Band your own portfolio against the C1 criteria before you see the mark. The gap between the two bands is the conversation.</a:t>
             </a:r>
             <a:endParaRPr lang="en-US" sz="1650" dirty="0"/>
           </a:p>
@@ -4068,7 +4238,7 @@
                 <a:ea typeface="Georgia" pitchFamily="34" charset="-122"/>
                 <a:cs typeface="Georgia" pitchFamily="34" charset="-120"/>
               </a:rPr>
-              <a:t>Specific, evidenced, achievable in S2: hold focus in low light beats get better at filming.</a:t>
+              <a:t>Specific and achievable in S2: “hold focus in low light” beats “get better at filming.”</a:t>
             </a:r>
             <a:endParaRPr lang="en-US" sz="1650" dirty="0"/>
           </a:p>
@@ -5112,7 +5282,7 @@
                 <a:ea typeface="Georgia" pitchFamily="34" charset="-122"/>
                 <a:cs typeface="Georgia" pitchFamily="34" charset="-120"/>
               </a:rPr>
-              <a:t>A Super Bowl half-time show: aimed at everyone at once, priced accordingly.</a:t>
+              <a:t>A Super Bowl half-time show: aimed at everyone at once, and priced that way.</a:t>
             </a:r>
             <a:endParaRPr lang="en-US" sz="1450" dirty="0"/>
           </a:p>
@@ -5265,7 +5435,7 @@
                 <a:ea typeface="Georgia" pitchFamily="34" charset="-122"/>
                 <a:cs typeface="Georgia" pitchFamily="34" charset="-120"/>
               </a:rPr>
-              <a:t>A restoration channel: a defined interest group that finds the text itself.</a:t>
+              <a:t>A restoration channel: a small interest group that finds the text by itself.</a:t>
             </a:r>
             <a:endParaRPr lang="en-US" sz="1450" dirty="0"/>
           </a:p>
@@ -5418,7 +5588,7 @@
                 <a:ea typeface="Georgia" pitchFamily="34" charset="-122"/>
                 <a:cs typeface="Georgia" pitchFamily="34" charset="-120"/>
               </a:rPr>
-              <a:t>A comeback teaser: a precise profile of age, taste and platform. What advertisers pay for.</a:t>
+              <a:t>A comeback teaser: a precise profile of age, taste, and platform. This is what advertisers pay for.</a:t>
             </a:r>
             <a:endParaRPr lang="en-US" sz="1450" dirty="0"/>
           </a:p>
@@ -5433,7 +5603,7 @@
         <p:spPr>
           <a:xfrm>
             <a:off x="822960" y="5715000"/>
-            <a:ext cx="10543032" cy="548640"/>
+            <a:ext cx="10543032" cy="457200"/>
           </a:xfrm>
           <a:prstGeom prst="rect">
             <a:avLst/>
@@ -5452,7 +5622,7 @@
               <a:buNone/>
             </a:pPr>
             <a:r>
-              <a:rPr lang="en-US" sz="1200" i="1" dirty="0">
+              <a:rPr lang="en-US" sz="1000" b="1" spc="100" kern="0" dirty="0">
                 <a:solidFill>
                   <a:srgbClr val="7A7F72"/>
                 </a:solidFill>
@@ -5460,9 +5630,63 @@
                 <a:ea typeface="Arial" pitchFamily="34" charset="-122"/>
                 <a:cs typeface="Arial" pitchFamily="34" charset="-120"/>
               </a:rPr>
-              <a:t>Opened as Four Corners: mass, niche, target, undecided; commit by moving, one corner defends. Demographics vs psychographics: who they are, versus what they want.</a:t>
-            </a:r>
-            <a:endParaRPr lang="en-US" sz="1200" dirty="0"/>
+              <a:t>TASK   </a:t>
+            </a:r>
+            <a:pPr indent="0" marL="0">
+              <a:lnSpc>
+                <a:spcPts val="1600"/>
+              </a:lnSpc>
+              <a:buNone/>
+            </a:pPr>
+            <a:r>
+              <a:rPr lang="en-US" sz="1200" dirty="0">
+                <a:solidFill>
+                  <a:srgbClr val="7A7F72"/>
+                </a:solidFill>
+                <a:latin typeface="Georgia" pitchFamily="34" charset="0"/>
+                <a:ea typeface="Georgia" pitchFamily="34" charset="-122"/>
+                <a:cs typeface="Georgia" pitchFamily="34" charset="-120"/>
+              </a:rPr>
+              <a:t>Four Corners: mass, niche, target, or undecided. Move, then defend your corner.</a:t>
+            </a:r>
+            <a:endParaRPr lang="en-US" sz="1000" dirty="0"/>
+          </a:p>
+          <a:p>
+            <a:pPr indent="0" marL="0">
+              <a:lnSpc>
+                <a:spcPts val="1600"/>
+              </a:lnSpc>
+              <a:buNone/>
+            </a:pPr>
+            <a:r>
+              <a:rPr lang="en-US" sz="1000" b="1" spc="100" kern="0" dirty="0">
+                <a:solidFill>
+                  <a:srgbClr val="7A7F72"/>
+                </a:solidFill>
+                <a:latin typeface="Arial" pitchFamily="34" charset="0"/>
+                <a:ea typeface="Arial" pitchFamily="34" charset="-122"/>
+                <a:cs typeface="Arial" pitchFamily="34" charset="-120"/>
+              </a:rPr>
+              <a:t>TERMS   </a:t>
+            </a:r>
+            <a:pPr indent="0" marL="0">
+              <a:lnSpc>
+                <a:spcPts val="1600"/>
+              </a:lnSpc>
+              <a:buNone/>
+            </a:pPr>
+            <a:r>
+              <a:rPr lang="en-US" sz="1200" dirty="0">
+                <a:solidFill>
+                  <a:srgbClr val="7A7F72"/>
+                </a:solidFill>
+                <a:latin typeface="Georgia" pitchFamily="34" charset="0"/>
+                <a:ea typeface="Georgia" pitchFamily="34" charset="-122"/>
+                <a:cs typeface="Georgia" pitchFamily="34" charset="-120"/>
+              </a:rPr>
+              <a:t>Demographics: who the audience is. Psychographics: what the audience wants.</a:t>
+            </a:r>
+            <a:endParaRPr lang="en-US" sz="1000" dirty="0"/>
           </a:p>
         </p:txBody>
       </p:sp>
@@ -5742,6 +5966,65 @@
           </a:p>
         </p:txBody>
       </p:sp>
+      <p:sp>
+        <p:nvSpPr>
+          <p:cNvPr id="6" name="Text 4"/>
+          <p:cNvSpPr/>
+          <p:nvPr/>
+        </p:nvSpPr>
+        <p:spPr>
+          <a:xfrm>
+            <a:off x="822960" y="5806440"/>
+            <a:ext cx="10424160" cy="640080"/>
+          </a:xfrm>
+          <a:prstGeom prst="rect">
+            <a:avLst/>
+          </a:prstGeom>
+          <a:noFill/>
+          <a:ln/>
+        </p:spPr>
+        <p:txBody>
+          <a:bodyPr wrap="square" lIns="0" tIns="0" rIns="0" bIns="0" rtlCol="0" anchor="t"/>
+          <a:lstStyle/>
+          <a:p>
+            <a:pPr indent="0" marL="0">
+              <a:lnSpc>
+                <a:spcPts val="1900"/>
+              </a:lnSpc>
+              <a:buNone/>
+            </a:pPr>
+            <a:r>
+              <a:rPr lang="en-US" sz="1200" b="1" spc="100" kern="0" dirty="0">
+                <a:solidFill>
+                  <a:srgbClr val="7A7F72"/>
+                </a:solidFill>
+                <a:latin typeface="Arial" pitchFamily="34" charset="0"/>
+                <a:ea typeface="Arial" pitchFamily="34" charset="-122"/>
+                <a:cs typeface="Arial" pitchFamily="34" charset="-120"/>
+              </a:rPr>
+              <a:t>IN PLAIN WORDS   </a:t>
+            </a:r>
+            <a:pPr indent="0" marL="0">
+              <a:lnSpc>
+                <a:spcPts val="1900"/>
+              </a:lnSpc>
+              <a:buNone/>
+            </a:pPr>
+            <a:r>
+              <a:rPr lang="en-US" sz="1400" i="1" dirty="0">
+                <a:solidFill>
+                  <a:srgbClr val="4A6B5D"/>
+                </a:solidFill>
+                <a:latin typeface="Georgia" pitchFamily="34" charset="0"/>
+                <a:ea typeface="Georgia" pitchFamily="34" charset="-122"/>
+                <a:cs typeface="Georgia" pitchFamily="34" charset="-120"/>
+              </a:rPr>
+              <a:t>Stop asking only how media changes people. Ask what people use media for.</a:t>
+            </a:r>
+            <a:endParaRPr lang="en-US" sz="1200" dirty="0"/>
+          </a:p>
+        </p:txBody>
+      </p:sp>
     </p:spTree>
   </p:cSld>
   <p:clrMapOvr>
@@ -6131,23 +6414,26 @@
         <p:spPr>
           <a:xfrm>
             <a:off x="822960" y="5349240"/>
-            <a:ext cx="10543032" cy="365760"/>
-          </a:xfrm>
-          <a:prstGeom prst="rect">
-            <a:avLst/>
-          </a:prstGeom>
-          <a:noFill/>
-          <a:ln/>
-        </p:spPr>
-        <p:txBody>
-          <a:bodyPr wrap="square" lIns="0" tIns="0" rIns="0" bIns="0" rtlCol="0" anchor="ctr"/>
-          <a:lstStyle/>
-          <a:p>
-            <a:pPr indent="0" marL="0">
-              <a:buNone/>
-            </a:pPr>
-            <a:r>
-              <a:rPr lang="en-US" sz="1250" i="1" dirty="0">
+            <a:ext cx="10543032" cy="320040"/>
+          </a:xfrm>
+          <a:prstGeom prst="rect">
+            <a:avLst/>
+          </a:prstGeom>
+          <a:noFill/>
+          <a:ln/>
+        </p:spPr>
+        <p:txBody>
+          <a:bodyPr wrap="square" lIns="0" tIns="0" rIns="0" bIns="0" rtlCol="0" anchor="t"/>
+          <a:lstStyle/>
+          <a:p>
+            <a:pPr indent="0" marL="0">
+              <a:lnSpc>
+                <a:spcPts val="1700"/>
+              </a:lnSpc>
+              <a:buNone/>
+            </a:pPr>
+            <a:r>
+              <a:rPr lang="en-US" sz="1050" b="1" spc="100" kern="0" dirty="0">
                 <a:solidFill>
                   <a:srgbClr val="7A7F72"/>
                 </a:solidFill>
@@ -6155,9 +6441,26 @@
                 <a:ea typeface="Arial" pitchFamily="34" charset="-122"/>
                 <a:cs typeface="Arial" pitchFamily="34" charset="-120"/>
               </a:rPr>
-              <a:t>The counter-evidence log runs on myth-busting points: an example that survives the room's challenge scores.</a:t>
-            </a:r>
-            <a:endParaRPr lang="en-US" sz="1250" dirty="0"/>
+              <a:t>THE LOG   </a:t>
+            </a:r>
+            <a:pPr indent="0" marL="0">
+              <a:lnSpc>
+                <a:spcPts val="1700"/>
+              </a:lnSpc>
+              <a:buNone/>
+            </a:pPr>
+            <a:r>
+              <a:rPr lang="en-US" sz="1250" dirty="0">
+                <a:solidFill>
+                  <a:srgbClr val="7A7F72"/>
+                </a:solidFill>
+                <a:latin typeface="Georgia" pitchFamily="34" charset="0"/>
+                <a:ea typeface="Georgia" pitchFamily="34" charset="-122"/>
+                <a:cs typeface="Georgia" pitchFamily="34" charset="-120"/>
+              </a:rPr>
+              <a:t>Collect counter-evidence. An example that survives the room's challenge earns a point.</a:t>
+            </a:r>
+            <a:endParaRPr lang="en-US" sz="1050" dirty="0"/>
           </a:p>
         </p:txBody>
       </p:sp>
@@ -7425,7 +7728,7 @@
         <p:spPr>
           <a:xfrm>
             <a:off x="822960" y="5504688"/>
-            <a:ext cx="10543032" cy="594360"/>
+            <a:ext cx="10543032" cy="548640"/>
           </a:xfrm>
           <a:prstGeom prst="rect">
             <a:avLst/>
@@ -7444,7 +7747,7 @@
               <a:buNone/>
             </a:pPr>
             <a:r>
-              <a:rPr lang="en-US" sz="1200" i="1" dirty="0">
+              <a:rPr lang="en-US" sz="1000" b="1" spc="100" kern="0" dirty="0">
                 <a:solidFill>
                   <a:srgbClr val="7A7F72"/>
                 </a:solidFill>
@@ -7452,9 +7755,63 @@
                 <a:ea typeface="Arial" pitchFamily="34" charset="-122"/>
                 <a:cs typeface="Arial" pitchFamily="34" charset="-120"/>
               </a:rPr>
-              <a:t>Source: BARB, week 4 to 10 May 2026 (as reported by TVZone). The biggest programme of the week reached under a tenth of the country. Mass is relative; everything else on the dial is niche or target.</a:t>
-            </a:r>
-            <a:endParaRPr lang="en-US" sz="1200" dirty="0"/>
+              <a:t>SOURCE   </a:t>
+            </a:r>
+            <a:pPr indent="0" marL="0">
+              <a:lnSpc>
+                <a:spcPts val="1600"/>
+              </a:lnSpc>
+              <a:buNone/>
+            </a:pPr>
+            <a:r>
+              <a:rPr lang="en-US" sz="1200" dirty="0">
+                <a:solidFill>
+                  <a:srgbClr val="7A7F72"/>
+                </a:solidFill>
+                <a:latin typeface="Georgia" pitchFamily="34" charset="0"/>
+                <a:ea typeface="Georgia" pitchFamily="34" charset="-122"/>
+                <a:cs typeface="Georgia" pitchFamily="34" charset="-120"/>
+              </a:rPr>
+              <a:t>BARB (UK audience measurement), week of 4 to 10 May 2026, via TVZone.</a:t>
+            </a:r>
+            <a:endParaRPr lang="en-US" sz="1000" dirty="0"/>
+          </a:p>
+          <a:p>
+            <a:pPr indent="0" marL="0">
+              <a:lnSpc>
+                <a:spcPts val="1600"/>
+              </a:lnSpc>
+              <a:buNone/>
+            </a:pPr>
+            <a:r>
+              <a:rPr lang="en-US" sz="1000" b="1" spc="100" kern="0" dirty="0">
+                <a:solidFill>
+                  <a:srgbClr val="7A7F72"/>
+                </a:solidFill>
+                <a:latin typeface="Arial" pitchFamily="34" charset="0"/>
+                <a:ea typeface="Arial" pitchFamily="34" charset="-122"/>
+                <a:cs typeface="Arial" pitchFamily="34" charset="-120"/>
+              </a:rPr>
+              <a:t>KEY POINT   </a:t>
+            </a:r>
+            <a:pPr indent="0" marL="0">
+              <a:lnSpc>
+                <a:spcPts val="1600"/>
+              </a:lnSpc>
+              <a:buNone/>
+            </a:pPr>
+            <a:r>
+              <a:rPr lang="en-US" sz="1200" dirty="0">
+                <a:solidFill>
+                  <a:srgbClr val="7A7F72"/>
+                </a:solidFill>
+                <a:latin typeface="Georgia" pitchFamily="34" charset="0"/>
+                <a:ea typeface="Georgia" pitchFamily="34" charset="-122"/>
+                <a:cs typeface="Georgia" pitchFamily="34" charset="-120"/>
+              </a:rPr>
+              <a:t>The biggest program of the week reached less than a tenth of the country. Mass is relative.</a:t>
+            </a:r>
+            <a:endParaRPr lang="en-US" sz="1000" dirty="0"/>
           </a:p>
         </p:txBody>
       </p:sp>
@@ -8539,7 +8896,7 @@
                 <a:ea typeface="Georgia" pitchFamily="34" charset="-122"/>
                 <a:cs typeface="Georgia" pitchFamily="34" charset="-120"/>
               </a:rPr>
-              <a:t>Parked in the dark, arranged around a screen, doing the watching: an audience is never a blank surface.</a:t>
+              <a:t>Parked in the dark, arranged around a screen, doing the watching. An audience is never blank or passive.</a:t>
             </a:r>
             <a:endParaRPr lang="en-US" sz="1800" dirty="0"/>
           </a:p>
@@ -8825,12 +9182,29 @@
           <a:p>
             <a:pPr indent="0" marL="0">
               <a:lnSpc>
-                <a:spcPts val="2500"/>
+                <a:spcPts val="2400"/>
               </a:lnSpc>
               <a:buNone/>
             </a:pPr>
             <a:r>
-              <a:rPr lang="en-US" sz="1700" dirty="0">
+              <a:rPr lang="en-US" sz="1400" b="1" spc="100" kern="0" dirty="0">
+                <a:solidFill>
+                  <a:srgbClr val="4A6B5D"/>
+                </a:solidFill>
+                <a:latin typeface="Arial" pitchFamily="34" charset="0"/>
+                <a:ea typeface="Arial" pitchFamily="34" charset="-122"/>
+                <a:cs typeface="Arial" pitchFamily="34" charset="-120"/>
+              </a:rPr>
+              <a:t>TASK   </a:t>
+            </a:r>
+            <a:pPr indent="0" marL="0">
+              <a:lnSpc>
+                <a:spcPts val="2400"/>
+              </a:lnSpc>
+              <a:buNone/>
+            </a:pPr>
+            <a:r>
+              <a:rPr lang="en-US" sz="1600" dirty="0">
                 <a:solidFill>
                   <a:srgbClr val="24313F"/>
                 </a:solidFill>
@@ -8838,9 +9212,83 @@
                 <a:ea typeface="Georgia" pitchFamily="34" charset="-122"/>
                 <a:cs typeface="Georgia" pitchFamily="34" charset="-120"/>
               </a:rPr>
-              <a:t>Map your real weekly media use onto the four jobs. The honesty rule is absolute: the comfort re-watch and the 2 a.m. scroll are data, not confessions. Then the turn inward: which gratification does your own C1 product serve, and how would you know if it worked?</a:t>
-            </a:r>
-            <a:endParaRPr lang="en-US" sz="1700" dirty="0"/>
+              <a:t>Map your real weekly media use onto the four gratifications.</a:t>
+            </a:r>
+            <a:endParaRPr lang="en-US" sz="1400" dirty="0"/>
+          </a:p>
+          <a:p>
+            <a:pPr indent="0" marL="0">
+              <a:lnSpc>
+                <a:spcPts val="2400"/>
+              </a:lnSpc>
+              <a:buNone/>
+            </a:pPr>
+            <a:r>
+              <a:rPr lang="en-US" sz="1400" b="1" spc="100" kern="0" dirty="0">
+                <a:solidFill>
+                  <a:srgbClr val="4A6B5D"/>
+                </a:solidFill>
+                <a:latin typeface="Arial" pitchFamily="34" charset="0"/>
+                <a:ea typeface="Arial" pitchFamily="34" charset="-122"/>
+                <a:cs typeface="Arial" pitchFamily="34" charset="-120"/>
+              </a:rPr>
+              <a:t>THE RULE   </a:t>
+            </a:r>
+            <a:pPr indent="0" marL="0">
+              <a:lnSpc>
+                <a:spcPts val="2400"/>
+              </a:lnSpc>
+              <a:buNone/>
+            </a:pPr>
+            <a:r>
+              <a:rPr lang="en-US" sz="1600" dirty="0">
+                <a:solidFill>
+                  <a:srgbClr val="24313F"/>
+                </a:solidFill>
+                <a:latin typeface="Georgia" pitchFamily="34" charset="0"/>
+                <a:ea typeface="Georgia" pitchFamily="34" charset="-122"/>
+                <a:cs typeface="Georgia" pitchFamily="34" charset="-120"/>
+              </a:rPr>
+              <a:t>Total honesty. The comfort re-watch and the 2 a.m. scroll are data, not confessions.</a:t>
+            </a:r>
+            <a:endParaRPr lang="en-US" sz="1400" dirty="0"/>
+          </a:p>
+          <a:p>
+            <a:pPr indent="0" marL="0">
+              <a:lnSpc>
+                <a:spcPts val="2400"/>
+              </a:lnSpc>
+              <a:buNone/>
+            </a:pPr>
+            <a:r>
+              <a:rPr lang="en-US" sz="1400" b="1" spc="100" kern="0" dirty="0">
+                <a:solidFill>
+                  <a:srgbClr val="4A6B5D"/>
+                </a:solidFill>
+                <a:latin typeface="Arial" pitchFamily="34" charset="0"/>
+                <a:ea typeface="Arial" pitchFamily="34" charset="-122"/>
+                <a:cs typeface="Arial" pitchFamily="34" charset="-120"/>
+              </a:rPr>
+              <a:t>THEN   </a:t>
+            </a:r>
+            <a:pPr indent="0" marL="0">
+              <a:lnSpc>
+                <a:spcPts val="2400"/>
+              </a:lnSpc>
+              <a:buNone/>
+            </a:pPr>
+            <a:r>
+              <a:rPr lang="en-US" sz="1600" dirty="0">
+                <a:solidFill>
+                  <a:srgbClr val="24313F"/>
+                </a:solidFill>
+                <a:latin typeface="Georgia" pitchFamily="34" charset="0"/>
+                <a:ea typeface="Georgia" pitchFamily="34" charset="-122"/>
+                <a:cs typeface="Georgia" pitchFamily="34" charset="-120"/>
+              </a:rPr>
+              <a:t>Which gratification does your own C1 product serve? How would you know if it worked?</a:t>
+            </a:r>
+            <a:endParaRPr lang="en-US" sz="1400" dirty="0"/>
           </a:p>
         </p:txBody>
       </p:sp>

--- a/content/decks/media-studies/media-studies-s1-lesson-14-audiences-and-the-portfolio-submission.pptx
+++ b/content/decks/media-studies/media-studies-s1-lesson-14-audiences-and-the-portfolio-submission.pptx
@@ -2356,7 +2356,7 @@
                 <a:ea typeface="Arial" pitchFamily="34" charset="-122"/>
                 <a:cs typeface="Arial" pitchFamily="34" charset="-120"/>
               </a:rPr>
-              <a:t>Six days  ·  Monday 23 November to Tuesday 1 December</a:t>
+              <a:t>Five days  ·  Monday 23 to Monday 30 November</a:t>
             </a:r>
             <a:endParaRPr lang="en-US" sz="1300" dirty="0"/>
           </a:p>
@@ -3991,7 +3991,7 @@
                 <a:ea typeface="Arial" pitchFamily="34" charset="-122"/>
                 <a:cs typeface="Arial" pitchFamily="34" charset="-120"/>
               </a:rPr>
-              <a:t>SELF-BAND BEFORE THE MARK</a:t>
+              <a:t>MONDAY 30 NOVEMBER · SELF-BAND BEFORE THE MARK</a:t>
             </a:r>
             <a:endParaRPr lang="en-US" sz="1100" dirty="0"/>
           </a:p>
@@ -4342,7 +4342,7 @@
                 <a:ea typeface="Georgia" pitchFamily="34" charset="-122"/>
                 <a:cs typeface="Georgia" pitchFamily="34" charset="-120"/>
               </a:rPr>
-              <a:t>Wednesday 16 December, Component 2 Section A. Today is the last session that clears the notice window.</a:t>
+              <a:t>Wednesday 16 December, Component 2 Section A. Sixteen days' notice; the one-week rule is cleared with room to spare.</a:t>
             </a:r>
             <a:endParaRPr lang="en-US" sz="1650" dirty="0"/>
           </a:p>
